--- a/content/05-teaching-resources/slides/core/22-project-management.pptx
+++ b/content/05-teaching-resources/slides/core/22-project-management.pptx
@@ -8,12 +8,16 @@
     <p:sldId id="256" r:id="rId7"/>
     <p:sldId id="257" r:id="rId8"/>
     <p:sldId id="258" r:id="rId9"/>
-    <p:sldId id="259" r:id="rId11"/>
+    <p:sldId id="259" r:id="rId10"/>
     <p:sldId id="260" r:id="rId12"/>
     <p:sldId id="261" r:id="rId13"/>
     <p:sldId id="262" r:id="rId14"/>
     <p:sldId id="263" r:id="rId15"/>
     <p:sldId id="264" r:id="rId16"/>
+    <p:sldId id="265" r:id="rId17"/>
+    <p:sldId id="266" r:id="rId18"/>
+    <p:sldId id="267" r:id="rId19"/>
+    <p:sldId id="268" r:id="rId20"/>
   </p:sldIdLst>
   <p:sldSz cx="12191695" cy="6858000" type="screen4x3"/>
   <p:notesSz cx="6858000" cy="9144000"/>
@@ -580,7 +584,22 @@
           <a:lstStyle/>
           <a:p>
             <a:r>
-              <a:t>Give students a few minutes to answer on mini whiteboards or paper, then reveal the answers on the next slide.</a:t>
+              <a:t>Answers:</a:t>
+            </a:r>
+          </a:p>
+          <a:p>
+            <a:r>
+              <a:t>1. The brief, goals and success criteria are set.</a:t>
+            </a:r>
+          </a:p>
+          <a:p>
+            <a:r>
+              <a:t>2. E.g. budget, time, quality.</a:t>
+            </a:r>
+          </a:p>
+          <a:p>
+            <a:r>
+              <a:t>3. To learn lessons for future projects.</a:t>
             </a:r>
           </a:p>
         </p:txBody>
@@ -650,7 +669,22 @@
           <a:lstStyle/>
           <a:p>
             <a:r>
-              <a:t>Talk through any answers the class found difficult.</a:t>
+              <a:t>Answers:</a:t>
+            </a:r>
+          </a:p>
+          <a:p>
+            <a:r>
+              <a:t>1. The shortest possible project length.</a:t>
+            </a:r>
+          </a:p>
+          <a:p>
+            <a:r>
+              <a:t>2. Escalating only when limits are exceeded.</a:t>
+            </a:r>
+          </a:p>
+          <a:p>
+            <a:r>
+              <a:t>3. Optimistic, likely and pessimistic time estimates.</a:t>
             </a:r>
           </a:p>
         </p:txBody>
@@ -720,7 +754,7 @@
           <a:lstStyle/>
           <a:p>
             <a:r>
-              <a:t>If ordering can start during design, the path is order, machine, assemble, test = 12 days; if it waits for design, 15 days. Discuss both.</a:t>
+              <a:t>Give students a few minutes to answer on mini whiteboards or paper, then reveal the answers on the next slide.</a:t>
             </a:r>
           </a:p>
         </p:txBody>
@@ -746,6 +780,146 @@
 </file>
 
 <file path=ppt/notesSlides/notesSlide5.xml><?xml version="1.0" encoding="utf-8"?>
+<p:notes xmlns:a="http://schemas.openxmlformats.org/drawingml/2006/main" xmlns:p="http://schemas.openxmlformats.org/presentationml/2006/main" xmlns:r="http://schemas.openxmlformats.org/officeDocument/2006/relationships">
+  <p:cSld>
+    <p:spTree>
+      <p:nvGrpSpPr>
+        <p:cNvPr id="1" name=""/>
+        <p:cNvGrpSpPr/>
+        <p:nvPr/>
+      </p:nvGrpSpPr>
+      <p:grpSpPr>
+        <a:xfrm>
+          <a:off x="0" y="0"/>
+          <a:ext cx="0" cy="0"/>
+          <a:chOff x="0" y="0"/>
+          <a:chExt cx="0" cy="0"/>
+        </a:xfrm>
+      </p:grpSpPr>
+      <p:sp>
+        <p:nvSpPr>
+          <p:cNvPr id="2" name="Slide Image Placeholder 1"/>
+          <p:cNvSpPr>
+            <a:spLocks noGrp="1"/>
+          </p:cNvSpPr>
+          <p:nvPr>
+            <p:ph type="sldImg" idx="2"/>
+          </p:nvPr>
+        </p:nvSpPr>
+        <p:spPr/>
+      </p:sp>
+      <p:sp>
+        <p:nvSpPr>
+          <p:cNvPr id="3" name="Notes Placeholder 2"/>
+          <p:cNvSpPr>
+            <a:spLocks noGrp="1"/>
+          </p:cNvSpPr>
+          <p:nvPr>
+            <p:ph type="body" idx="3" sz="quarter"/>
+          </p:nvPr>
+        </p:nvSpPr>
+        <p:spPr/>
+        <p:txBody>
+          <a:bodyPr/>
+          <a:lstStyle/>
+          <a:p>
+            <a:r>
+              <a:t>Talk through any answers the class found difficult.</a:t>
+            </a:r>
+          </a:p>
+        </p:txBody>
+      </p:sp>
+      <p:sp>
+        <p:nvSpPr>
+          <p:cNvPr id="4" name="Slide Number Placeholder 3"/>
+          <p:cNvSpPr>
+            <a:spLocks noGrp="1"/>
+          </p:cNvSpPr>
+          <p:nvPr>
+            <p:ph type="sldNum" idx="5" sz="quarter"/>
+          </p:nvPr>
+        </p:nvSpPr>
+        <p:spPr/>
+      </p:sp>
+    </p:spTree>
+  </p:cSld>
+  <p:clrMapOvr>
+    <a:masterClrMapping/>
+  </p:clrMapOvr>
+</p:notes>
+</file>
+
+<file path=ppt/notesSlides/notesSlide6.xml><?xml version="1.0" encoding="utf-8"?>
+<p:notes xmlns:a="http://schemas.openxmlformats.org/drawingml/2006/main" xmlns:p="http://schemas.openxmlformats.org/presentationml/2006/main" xmlns:r="http://schemas.openxmlformats.org/officeDocument/2006/relationships">
+  <p:cSld>
+    <p:spTree>
+      <p:nvGrpSpPr>
+        <p:cNvPr id="1" name=""/>
+        <p:cNvGrpSpPr/>
+        <p:nvPr/>
+      </p:nvGrpSpPr>
+      <p:grpSpPr>
+        <a:xfrm>
+          <a:off x="0" y="0"/>
+          <a:ext cx="0" cy="0"/>
+          <a:chOff x="0" y="0"/>
+          <a:chExt cx="0" cy="0"/>
+        </a:xfrm>
+      </p:grpSpPr>
+      <p:sp>
+        <p:nvSpPr>
+          <p:cNvPr id="2" name="Slide Image Placeholder 1"/>
+          <p:cNvSpPr>
+            <a:spLocks noGrp="1"/>
+          </p:cNvSpPr>
+          <p:nvPr>
+            <p:ph type="sldImg" idx="2"/>
+          </p:nvPr>
+        </p:nvSpPr>
+        <p:spPr/>
+      </p:sp>
+      <p:sp>
+        <p:nvSpPr>
+          <p:cNvPr id="3" name="Notes Placeholder 2"/>
+          <p:cNvSpPr>
+            <a:spLocks noGrp="1"/>
+          </p:cNvSpPr>
+          <p:nvPr>
+            <p:ph type="body" idx="3" sz="quarter"/>
+          </p:nvPr>
+        </p:nvSpPr>
+        <p:spPr/>
+        <p:txBody>
+          <a:bodyPr/>
+          <a:lstStyle/>
+          <a:p>
+            <a:r>
+              <a:t>If ordering can start during design, the path is order, machine, assemble, test = 12 days; if it waits for design, 15 days. Discuss both.</a:t>
+            </a:r>
+          </a:p>
+        </p:txBody>
+      </p:sp>
+      <p:sp>
+        <p:nvSpPr>
+          <p:cNvPr id="4" name="Slide Number Placeholder 3"/>
+          <p:cNvSpPr>
+            <a:spLocks noGrp="1"/>
+          </p:cNvSpPr>
+          <p:nvPr>
+            <p:ph type="sldNum" idx="5" sz="quarter"/>
+          </p:nvPr>
+        </p:nvSpPr>
+        <p:spPr/>
+      </p:sp>
+    </p:spTree>
+  </p:cSld>
+  <p:clrMapOvr>
+    <a:masterClrMapping/>
+  </p:clrMapOvr>
+</p:notes>
+</file>
+
+<file path=ppt/notesSlides/notesSlide7.xml><?xml version="1.0" encoding="utf-8"?>
 <p:notes xmlns:a="http://schemas.openxmlformats.org/drawingml/2006/main" xmlns:p="http://schemas.openxmlformats.org/presentationml/2006/main" xmlns:r="http://schemas.openxmlformats.org/officeDocument/2006/relationships">
   <p:cSld>
     <p:spTree>
@@ -4115,6 +4289,2355 @@
 </p:sld>
 </file>
 
+<file path=ppt/slides/slide10.xml><?xml version="1.0" encoding="utf-8"?>
+<p:sld xmlns:a="http://schemas.openxmlformats.org/drawingml/2006/main" xmlns:p="http://schemas.openxmlformats.org/presentationml/2006/main" xmlns:r="http://schemas.openxmlformats.org/officeDocument/2006/relationships">
+  <p:cSld>
+    <p:bg>
+      <p:bgPr>
+        <a:solidFill>
+          <a:srgbClr val="FFFFFF"/>
+        </a:solidFill>
+        <a:effectLst/>
+      </p:bgPr>
+    </p:bg>
+    <p:spTree>
+      <p:nvGrpSpPr>
+        <p:cNvPr id="1" name=""/>
+        <p:cNvGrpSpPr/>
+        <p:nvPr/>
+      </p:nvGrpSpPr>
+      <p:grpSpPr/>
+      <p:sp>
+        <p:nvSpPr>
+          <p:cNvPr id="2" name="TextBox 1"/>
+          <p:cNvSpPr txBox="1"/>
+          <p:nvPr/>
+        </p:nvSpPr>
+        <p:spPr>
+          <a:xfrm>
+            <a:off x="548640" y="320040"/>
+            <a:ext cx="11094415" cy="274320"/>
+          </a:xfrm>
+          <a:prstGeom prst="rect">
+            <a:avLst/>
+          </a:prstGeom>
+          <a:noFill/>
+        </p:spPr>
+        <p:txBody>
+          <a:bodyPr wrap="square" anchor="t" lIns="0" rIns="0" tIns="0" bIns="0"/>
+          <a:lstStyle/>
+          <a:p>
+            <a:pPr algn="l"/>
+            <a:r>
+              <a:rPr sz="1100" b="1" i="0">
+                <a:solidFill>
+                  <a:srgbClr val="54595D"/>
+                </a:solidFill>
+                <a:latin typeface="Calibri"/>
+              </a:rPr>
+              <a:t>ENGINEERING CORE  ·  Core topic 17</a:t>
+            </a:r>
+          </a:p>
+        </p:txBody>
+      </p:sp>
+      <p:sp>
+        <p:nvSpPr>
+          <p:cNvPr id="3" name="TextBox 2"/>
+          <p:cNvSpPr txBox="1"/>
+          <p:nvPr/>
+        </p:nvSpPr>
+        <p:spPr>
+          <a:xfrm>
+            <a:off x="548640" y="566928"/>
+            <a:ext cx="11094415" cy="822960"/>
+          </a:xfrm>
+          <a:prstGeom prst="rect">
+            <a:avLst/>
+          </a:prstGeom>
+          <a:noFill/>
+        </p:spPr>
+        <p:txBody>
+          <a:bodyPr wrap="square" anchor="ctr" lIns="0" rIns="0" tIns="0" bIns="0"/>
+          <a:lstStyle/>
+          <a:p>
+            <a:pPr algn="l"/>
+            <a:r>
+              <a:rPr sz="3200" b="1" i="0">
+                <a:solidFill>
+                  <a:srgbClr val="03306E"/>
+                </a:solidFill>
+                <a:latin typeface="Cambria"/>
+              </a:rPr>
+              <a:t>Check your understanding</a:t>
+            </a:r>
+          </a:p>
+        </p:txBody>
+      </p:sp>
+      <p:sp>
+        <p:nvSpPr>
+          <p:cNvPr id="4" name="TextBox 3"/>
+          <p:cNvSpPr txBox="1"/>
+          <p:nvPr/>
+        </p:nvSpPr>
+        <p:spPr>
+          <a:xfrm>
+            <a:off x="548640" y="6446520"/>
+            <a:ext cx="8229600" cy="274320"/>
+          </a:xfrm>
+          <a:prstGeom prst="rect">
+            <a:avLst/>
+          </a:prstGeom>
+          <a:noFill/>
+        </p:spPr>
+        <p:txBody>
+          <a:bodyPr wrap="square" anchor="t" lIns="0" rIns="0" tIns="0" bIns="0"/>
+          <a:lstStyle/>
+          <a:p>
+            <a:pPr algn="l"/>
+            <a:r>
+              <a:rPr sz="1000" b="0" i="0">
+                <a:solidFill>
+                  <a:srgbClr val="54595D"/>
+                </a:solidFill>
+                <a:latin typeface="Calibri"/>
+              </a:rPr>
+              <a:t>Design and Development for Engineering and Manufacturing T Level  ·  Project and Programme Management</a:t>
+            </a:r>
+          </a:p>
+        </p:txBody>
+      </p:sp>
+      <p:sp>
+        <p:nvSpPr>
+          <p:cNvPr id="5" name="TextBox 4"/>
+          <p:cNvSpPr txBox="1"/>
+          <p:nvPr/>
+        </p:nvSpPr>
+        <p:spPr>
+          <a:xfrm>
+            <a:off x="10728655" y="6446520"/>
+            <a:ext cx="914400" cy="274320"/>
+          </a:xfrm>
+          <a:prstGeom prst="rect">
+            <a:avLst/>
+          </a:prstGeom>
+          <a:noFill/>
+        </p:spPr>
+        <p:txBody>
+          <a:bodyPr wrap="square" anchor="t" lIns="0" rIns="0" tIns="0" bIns="0"/>
+          <a:lstStyle/>
+          <a:p>
+            <a:pPr algn="r"/>
+            <a:r>
+              <a:rPr sz="1000" b="0" i="0">
+                <a:solidFill>
+                  <a:srgbClr val="54595D"/>
+                </a:solidFill>
+                <a:latin typeface="Calibri"/>
+              </a:rPr>
+              <a:t>10</a:t>
+            </a:r>
+          </a:p>
+        </p:txBody>
+      </p:sp>
+      <p:sp>
+        <p:nvSpPr>
+          <p:cNvPr id="6" name="Oval 5"/>
+          <p:cNvSpPr/>
+          <p:nvPr/>
+        </p:nvSpPr>
+        <p:spPr>
+          <a:xfrm>
+            <a:off x="548640" y="1618488"/>
+            <a:ext cx="411480" cy="411480"/>
+          </a:xfrm>
+          <a:prstGeom prst="ellipse">
+            <a:avLst/>
+          </a:prstGeom>
+          <a:solidFill>
+            <a:srgbClr val="F2B705"/>
+          </a:solidFill>
+          <a:ln>
+            <a:noFill/>
+          </a:ln>
+          <a:effectLst/>
+        </p:spPr>
+        <p:style>
+          <a:lnRef idx="1">
+            <a:schemeClr val="accent1"/>
+          </a:lnRef>
+          <a:fillRef idx="3">
+            <a:schemeClr val="accent1"/>
+          </a:fillRef>
+          <a:effectRef idx="2">
+            <a:schemeClr val="accent1"/>
+          </a:effectRef>
+          <a:fontRef idx="minor">
+            <a:schemeClr val="lt1"/>
+          </a:fontRef>
+        </p:style>
+        <p:txBody>
+          <a:bodyPr rtlCol="0" anchor="ctr" lIns="0" rIns="0" tIns="0" bIns="0"/>
+          <a:lstStyle/>
+          <a:p>
+            <a:pPr algn="ctr"/>
+            <a:r>
+              <a:rPr sz="1400" b="1">
+                <a:solidFill>
+                  <a:srgbClr val="202122"/>
+                </a:solidFill>
+                <a:latin typeface="Calibri"/>
+              </a:rPr>
+              <a:t>1</a:t>
+            </a:r>
+          </a:p>
+        </p:txBody>
+      </p:sp>
+      <p:sp>
+        <p:nvSpPr>
+          <p:cNvPr id="7" name="TextBox 6"/>
+          <p:cNvSpPr txBox="1"/>
+          <p:nvPr/>
+        </p:nvSpPr>
+        <p:spPr>
+          <a:xfrm>
+            <a:off x="1234440" y="1600200"/>
+            <a:ext cx="10408615" cy="1030986"/>
+          </a:xfrm>
+          <a:prstGeom prst="rect">
+            <a:avLst/>
+          </a:prstGeom>
+          <a:noFill/>
+        </p:spPr>
+        <p:txBody>
+          <a:bodyPr wrap="square" anchor="t" lIns="0" rIns="0" tIns="0" bIns="0"/>
+          <a:lstStyle/>
+          <a:p>
+            <a:pPr algn="l"/>
+            <a:r>
+              <a:rPr sz="2200" b="0" i="0">
+                <a:solidFill>
+                  <a:srgbClr val="202122"/>
+                </a:solidFill>
+                <a:latin typeface="Calibri"/>
+              </a:rPr>
+              <a:t>What happens if a critical path task is delayed?</a:t>
+            </a:r>
+          </a:p>
+        </p:txBody>
+      </p:sp>
+      <p:sp>
+        <p:nvSpPr>
+          <p:cNvPr id="8" name="Oval 7"/>
+          <p:cNvSpPr/>
+          <p:nvPr/>
+        </p:nvSpPr>
+        <p:spPr>
+          <a:xfrm>
+            <a:off x="548640" y="2814066"/>
+            <a:ext cx="411480" cy="411480"/>
+          </a:xfrm>
+          <a:prstGeom prst="ellipse">
+            <a:avLst/>
+          </a:prstGeom>
+          <a:solidFill>
+            <a:srgbClr val="F2B705"/>
+          </a:solidFill>
+          <a:ln>
+            <a:noFill/>
+          </a:ln>
+          <a:effectLst/>
+        </p:spPr>
+        <p:style>
+          <a:lnRef idx="1">
+            <a:schemeClr val="accent1"/>
+          </a:lnRef>
+          <a:fillRef idx="3">
+            <a:schemeClr val="accent1"/>
+          </a:fillRef>
+          <a:effectRef idx="2">
+            <a:schemeClr val="accent1"/>
+          </a:effectRef>
+          <a:fontRef idx="minor">
+            <a:schemeClr val="lt1"/>
+          </a:fontRef>
+        </p:style>
+        <p:txBody>
+          <a:bodyPr rtlCol="0" anchor="ctr" lIns="0" rIns="0" tIns="0" bIns="0"/>
+          <a:lstStyle/>
+          <a:p>
+            <a:pPr algn="ctr"/>
+            <a:r>
+              <a:rPr sz="1400" b="1">
+                <a:solidFill>
+                  <a:srgbClr val="202122"/>
+                </a:solidFill>
+                <a:latin typeface="Calibri"/>
+              </a:rPr>
+              <a:t>2</a:t>
+            </a:r>
+          </a:p>
+        </p:txBody>
+      </p:sp>
+      <p:sp>
+        <p:nvSpPr>
+          <p:cNvPr id="9" name="TextBox 8"/>
+          <p:cNvSpPr txBox="1"/>
+          <p:nvPr/>
+        </p:nvSpPr>
+        <p:spPr>
+          <a:xfrm>
+            <a:off x="1234440" y="2795778"/>
+            <a:ext cx="10408615" cy="1030986"/>
+          </a:xfrm>
+          <a:prstGeom prst="rect">
+            <a:avLst/>
+          </a:prstGeom>
+          <a:noFill/>
+        </p:spPr>
+        <p:txBody>
+          <a:bodyPr wrap="square" anchor="t" lIns="0" rIns="0" tIns="0" bIns="0"/>
+          <a:lstStyle/>
+          <a:p>
+            <a:pPr algn="l"/>
+            <a:r>
+              <a:rPr sz="2200" b="0" i="0">
+                <a:solidFill>
+                  <a:srgbClr val="202122"/>
+                </a:solidFill>
+                <a:latin typeface="Calibri"/>
+              </a:rPr>
+              <a:t>What is managing by exception?</a:t>
+            </a:r>
+          </a:p>
+        </p:txBody>
+      </p:sp>
+      <p:sp>
+        <p:nvSpPr>
+          <p:cNvPr id="10" name="Oval 9"/>
+          <p:cNvSpPr/>
+          <p:nvPr/>
+        </p:nvSpPr>
+        <p:spPr>
+          <a:xfrm>
+            <a:off x="548640" y="4009644"/>
+            <a:ext cx="411480" cy="411480"/>
+          </a:xfrm>
+          <a:prstGeom prst="ellipse">
+            <a:avLst/>
+          </a:prstGeom>
+          <a:solidFill>
+            <a:srgbClr val="F2B705"/>
+          </a:solidFill>
+          <a:ln>
+            <a:noFill/>
+          </a:ln>
+          <a:effectLst/>
+        </p:spPr>
+        <p:style>
+          <a:lnRef idx="1">
+            <a:schemeClr val="accent1"/>
+          </a:lnRef>
+          <a:fillRef idx="3">
+            <a:schemeClr val="accent1"/>
+          </a:fillRef>
+          <a:effectRef idx="2">
+            <a:schemeClr val="accent1"/>
+          </a:effectRef>
+          <a:fontRef idx="minor">
+            <a:schemeClr val="lt1"/>
+          </a:fontRef>
+        </p:style>
+        <p:txBody>
+          <a:bodyPr rtlCol="0" anchor="ctr" lIns="0" rIns="0" tIns="0" bIns="0"/>
+          <a:lstStyle/>
+          <a:p>
+            <a:pPr algn="ctr"/>
+            <a:r>
+              <a:rPr sz="1400" b="1">
+                <a:solidFill>
+                  <a:srgbClr val="202122"/>
+                </a:solidFill>
+                <a:latin typeface="Calibri"/>
+              </a:rPr>
+              <a:t>3</a:t>
+            </a:r>
+          </a:p>
+        </p:txBody>
+      </p:sp>
+      <p:sp>
+        <p:nvSpPr>
+          <p:cNvPr id="11" name="TextBox 10"/>
+          <p:cNvSpPr txBox="1"/>
+          <p:nvPr/>
+        </p:nvSpPr>
+        <p:spPr>
+          <a:xfrm>
+            <a:off x="1234440" y="3991356"/>
+            <a:ext cx="10408615" cy="1030986"/>
+          </a:xfrm>
+          <a:prstGeom prst="rect">
+            <a:avLst/>
+          </a:prstGeom>
+          <a:noFill/>
+        </p:spPr>
+        <p:txBody>
+          <a:bodyPr wrap="square" anchor="t" lIns="0" rIns="0" tIns="0" bIns="0"/>
+          <a:lstStyle/>
+          <a:p>
+            <a:pPr algn="l"/>
+            <a:r>
+              <a:rPr sz="2200" b="0" i="0">
+                <a:solidFill>
+                  <a:srgbClr val="202122"/>
+                </a:solidFill>
+                <a:latin typeface="Calibri"/>
+              </a:rPr>
+              <a:t>What does PERT use for time estimates?</a:t>
+            </a:r>
+          </a:p>
+        </p:txBody>
+      </p:sp>
+      <p:sp>
+        <p:nvSpPr>
+          <p:cNvPr id="12" name="Oval 11"/>
+          <p:cNvSpPr/>
+          <p:nvPr/>
+        </p:nvSpPr>
+        <p:spPr>
+          <a:xfrm>
+            <a:off x="548640" y="5205221"/>
+            <a:ext cx="411480" cy="411480"/>
+          </a:xfrm>
+          <a:prstGeom prst="ellipse">
+            <a:avLst/>
+          </a:prstGeom>
+          <a:solidFill>
+            <a:srgbClr val="F2B705"/>
+          </a:solidFill>
+          <a:ln>
+            <a:noFill/>
+          </a:ln>
+          <a:effectLst/>
+        </p:spPr>
+        <p:style>
+          <a:lnRef idx="1">
+            <a:schemeClr val="accent1"/>
+          </a:lnRef>
+          <a:fillRef idx="3">
+            <a:schemeClr val="accent1"/>
+          </a:fillRef>
+          <a:effectRef idx="2">
+            <a:schemeClr val="accent1"/>
+          </a:effectRef>
+          <a:fontRef idx="minor">
+            <a:schemeClr val="lt1"/>
+          </a:fontRef>
+        </p:style>
+        <p:txBody>
+          <a:bodyPr rtlCol="0" anchor="ctr" lIns="0" rIns="0" tIns="0" bIns="0"/>
+          <a:lstStyle/>
+          <a:p>
+            <a:pPr algn="ctr"/>
+            <a:r>
+              <a:rPr sz="1400" b="1">
+                <a:solidFill>
+                  <a:srgbClr val="202122"/>
+                </a:solidFill>
+                <a:latin typeface="Calibri"/>
+              </a:rPr>
+              <a:t>4</a:t>
+            </a:r>
+          </a:p>
+        </p:txBody>
+      </p:sp>
+      <p:sp>
+        <p:nvSpPr>
+          <p:cNvPr id="13" name="TextBox 12"/>
+          <p:cNvSpPr txBox="1"/>
+          <p:nvPr/>
+        </p:nvSpPr>
+        <p:spPr>
+          <a:xfrm>
+            <a:off x="1234440" y="5186933"/>
+            <a:ext cx="10408615" cy="1030986"/>
+          </a:xfrm>
+          <a:prstGeom prst="rect">
+            <a:avLst/>
+          </a:prstGeom>
+          <a:noFill/>
+        </p:spPr>
+        <p:txBody>
+          <a:bodyPr wrap="square" anchor="t" lIns="0" rIns="0" tIns="0" bIns="0"/>
+          <a:lstStyle/>
+          <a:p>
+            <a:pPr algn="l"/>
+            <a:r>
+              <a:rPr sz="2200" b="0" i="0">
+                <a:solidFill>
+                  <a:srgbClr val="202122"/>
+                </a:solidFill>
+                <a:latin typeface="Calibri"/>
+              </a:rPr>
+              <a:t>Name three project constraints.</a:t>
+            </a:r>
+          </a:p>
+        </p:txBody>
+      </p:sp>
+    </p:spTree>
+  </p:cSld>
+  <p:clrMapOvr>
+    <a:masterClrMapping/>
+  </p:clrMapOvr>
+</p:sld>
+</file>
+
+<file path=ppt/slides/slide11.xml><?xml version="1.0" encoding="utf-8"?>
+<p:sld xmlns:a="http://schemas.openxmlformats.org/drawingml/2006/main" xmlns:p="http://schemas.openxmlformats.org/presentationml/2006/main" xmlns:r="http://schemas.openxmlformats.org/officeDocument/2006/relationships">
+  <p:cSld>
+    <p:bg>
+      <p:bgPr>
+        <a:solidFill>
+          <a:srgbClr val="FFFFFF"/>
+        </a:solidFill>
+        <a:effectLst/>
+      </p:bgPr>
+    </p:bg>
+    <p:spTree>
+      <p:nvGrpSpPr>
+        <p:cNvPr id="1" name=""/>
+        <p:cNvGrpSpPr/>
+        <p:nvPr/>
+      </p:nvGrpSpPr>
+      <p:grpSpPr/>
+      <p:sp>
+        <p:nvSpPr>
+          <p:cNvPr id="2" name="TextBox 1"/>
+          <p:cNvSpPr txBox="1"/>
+          <p:nvPr/>
+        </p:nvSpPr>
+        <p:spPr>
+          <a:xfrm>
+            <a:off x="548640" y="320040"/>
+            <a:ext cx="11094415" cy="274320"/>
+          </a:xfrm>
+          <a:prstGeom prst="rect">
+            <a:avLst/>
+          </a:prstGeom>
+          <a:noFill/>
+        </p:spPr>
+        <p:txBody>
+          <a:bodyPr wrap="square" anchor="t" lIns="0" rIns="0" tIns="0" bIns="0"/>
+          <a:lstStyle/>
+          <a:p>
+            <a:pPr algn="l"/>
+            <a:r>
+              <a:rPr sz="1100" b="1" i="0">
+                <a:solidFill>
+                  <a:srgbClr val="54595D"/>
+                </a:solidFill>
+                <a:latin typeface="Calibri"/>
+              </a:rPr>
+              <a:t>ENGINEERING CORE  ·  Core topic 17</a:t>
+            </a:r>
+          </a:p>
+        </p:txBody>
+      </p:sp>
+      <p:sp>
+        <p:nvSpPr>
+          <p:cNvPr id="3" name="TextBox 2"/>
+          <p:cNvSpPr txBox="1"/>
+          <p:nvPr/>
+        </p:nvSpPr>
+        <p:spPr>
+          <a:xfrm>
+            <a:off x="548640" y="566928"/>
+            <a:ext cx="11094415" cy="822960"/>
+          </a:xfrm>
+          <a:prstGeom prst="rect">
+            <a:avLst/>
+          </a:prstGeom>
+          <a:noFill/>
+        </p:spPr>
+        <p:txBody>
+          <a:bodyPr wrap="square" anchor="ctr" lIns="0" rIns="0" tIns="0" bIns="0"/>
+          <a:lstStyle/>
+          <a:p>
+            <a:pPr algn="l"/>
+            <a:r>
+              <a:rPr sz="3200" b="1" i="0">
+                <a:solidFill>
+                  <a:srgbClr val="03306E"/>
+                </a:solidFill>
+                <a:latin typeface="Cambria"/>
+              </a:rPr>
+              <a:t>Answers</a:t>
+            </a:r>
+          </a:p>
+        </p:txBody>
+      </p:sp>
+      <p:sp>
+        <p:nvSpPr>
+          <p:cNvPr id="4" name="TextBox 3"/>
+          <p:cNvSpPr txBox="1"/>
+          <p:nvPr/>
+        </p:nvSpPr>
+        <p:spPr>
+          <a:xfrm>
+            <a:off x="548640" y="6446520"/>
+            <a:ext cx="8229600" cy="274320"/>
+          </a:xfrm>
+          <a:prstGeom prst="rect">
+            <a:avLst/>
+          </a:prstGeom>
+          <a:noFill/>
+        </p:spPr>
+        <p:txBody>
+          <a:bodyPr wrap="square" anchor="t" lIns="0" rIns="0" tIns="0" bIns="0"/>
+          <a:lstStyle/>
+          <a:p>
+            <a:pPr algn="l"/>
+            <a:r>
+              <a:rPr sz="1000" b="0" i="0">
+                <a:solidFill>
+                  <a:srgbClr val="54595D"/>
+                </a:solidFill>
+                <a:latin typeface="Calibri"/>
+              </a:rPr>
+              <a:t>Design and Development for Engineering and Manufacturing T Level  ·  Project and Programme Management</a:t>
+            </a:r>
+          </a:p>
+        </p:txBody>
+      </p:sp>
+      <p:sp>
+        <p:nvSpPr>
+          <p:cNvPr id="5" name="TextBox 4"/>
+          <p:cNvSpPr txBox="1"/>
+          <p:nvPr/>
+        </p:nvSpPr>
+        <p:spPr>
+          <a:xfrm>
+            <a:off x="10728655" y="6446520"/>
+            <a:ext cx="914400" cy="274320"/>
+          </a:xfrm>
+          <a:prstGeom prst="rect">
+            <a:avLst/>
+          </a:prstGeom>
+          <a:noFill/>
+        </p:spPr>
+        <p:txBody>
+          <a:bodyPr wrap="square" anchor="t" lIns="0" rIns="0" tIns="0" bIns="0"/>
+          <a:lstStyle/>
+          <a:p>
+            <a:pPr algn="r"/>
+            <a:r>
+              <a:rPr sz="1000" b="0" i="0">
+                <a:solidFill>
+                  <a:srgbClr val="54595D"/>
+                </a:solidFill>
+                <a:latin typeface="Calibri"/>
+              </a:rPr>
+              <a:t>11</a:t>
+            </a:r>
+          </a:p>
+        </p:txBody>
+      </p:sp>
+      <p:sp>
+        <p:nvSpPr>
+          <p:cNvPr id="6" name="Oval 5"/>
+          <p:cNvSpPr/>
+          <p:nvPr/>
+        </p:nvSpPr>
+        <p:spPr>
+          <a:xfrm>
+            <a:off x="548640" y="1618488"/>
+            <a:ext cx="411480" cy="411480"/>
+          </a:xfrm>
+          <a:prstGeom prst="ellipse">
+            <a:avLst/>
+          </a:prstGeom>
+          <a:solidFill>
+            <a:srgbClr val="F2B705"/>
+          </a:solidFill>
+          <a:ln>
+            <a:noFill/>
+          </a:ln>
+          <a:effectLst/>
+        </p:spPr>
+        <p:style>
+          <a:lnRef idx="1">
+            <a:schemeClr val="accent1"/>
+          </a:lnRef>
+          <a:fillRef idx="3">
+            <a:schemeClr val="accent1"/>
+          </a:fillRef>
+          <a:effectRef idx="2">
+            <a:schemeClr val="accent1"/>
+          </a:effectRef>
+          <a:fontRef idx="minor">
+            <a:schemeClr val="lt1"/>
+          </a:fontRef>
+        </p:style>
+        <p:txBody>
+          <a:bodyPr rtlCol="0" anchor="ctr" lIns="0" rIns="0" tIns="0" bIns="0"/>
+          <a:lstStyle/>
+          <a:p>
+            <a:pPr algn="ctr"/>
+            <a:r>
+              <a:rPr sz="1400" b="1">
+                <a:solidFill>
+                  <a:srgbClr val="202122"/>
+                </a:solidFill>
+                <a:latin typeface="Calibri"/>
+              </a:rPr>
+              <a:t>1</a:t>
+            </a:r>
+          </a:p>
+        </p:txBody>
+      </p:sp>
+      <p:sp>
+        <p:nvSpPr>
+          <p:cNvPr id="7" name="TextBox 6"/>
+          <p:cNvSpPr txBox="1"/>
+          <p:nvPr/>
+        </p:nvSpPr>
+        <p:spPr>
+          <a:xfrm>
+            <a:off x="1234440" y="1600200"/>
+            <a:ext cx="10408615" cy="1030986"/>
+          </a:xfrm>
+          <a:prstGeom prst="rect">
+            <a:avLst/>
+          </a:prstGeom>
+          <a:noFill/>
+        </p:spPr>
+        <p:txBody>
+          <a:bodyPr wrap="square" anchor="t" lIns="0" rIns="0" tIns="0" bIns="0"/>
+          <a:lstStyle/>
+          <a:p>
+            <a:pPr algn="l"/>
+            <a:r>
+              <a:rPr sz="1800" b="0" i="0">
+                <a:solidFill>
+                  <a:srgbClr val="54595D"/>
+                </a:solidFill>
+                <a:latin typeface="Calibri"/>
+              </a:rPr>
+              <a:t>What happens if a critical path task is delayed?</a:t>
+            </a:r>
+          </a:p>
+          <a:p>
+            <a:r>
+              <a:rPr sz="1800" b="1">
+                <a:solidFill>
+                  <a:srgbClr val="03306E"/>
+                </a:solidFill>
+                <a:latin typeface="Calibri"/>
+              </a:rPr>
+              <a:t>The whole project is delayed.</a:t>
+            </a:r>
+          </a:p>
+        </p:txBody>
+      </p:sp>
+      <p:sp>
+        <p:nvSpPr>
+          <p:cNvPr id="8" name="Oval 7"/>
+          <p:cNvSpPr/>
+          <p:nvPr/>
+        </p:nvSpPr>
+        <p:spPr>
+          <a:xfrm>
+            <a:off x="548640" y="2814066"/>
+            <a:ext cx="411480" cy="411480"/>
+          </a:xfrm>
+          <a:prstGeom prst="ellipse">
+            <a:avLst/>
+          </a:prstGeom>
+          <a:solidFill>
+            <a:srgbClr val="F2B705"/>
+          </a:solidFill>
+          <a:ln>
+            <a:noFill/>
+          </a:ln>
+          <a:effectLst/>
+        </p:spPr>
+        <p:style>
+          <a:lnRef idx="1">
+            <a:schemeClr val="accent1"/>
+          </a:lnRef>
+          <a:fillRef idx="3">
+            <a:schemeClr val="accent1"/>
+          </a:fillRef>
+          <a:effectRef idx="2">
+            <a:schemeClr val="accent1"/>
+          </a:effectRef>
+          <a:fontRef idx="minor">
+            <a:schemeClr val="lt1"/>
+          </a:fontRef>
+        </p:style>
+        <p:txBody>
+          <a:bodyPr rtlCol="0" anchor="ctr" lIns="0" rIns="0" tIns="0" bIns="0"/>
+          <a:lstStyle/>
+          <a:p>
+            <a:pPr algn="ctr"/>
+            <a:r>
+              <a:rPr sz="1400" b="1">
+                <a:solidFill>
+                  <a:srgbClr val="202122"/>
+                </a:solidFill>
+                <a:latin typeface="Calibri"/>
+              </a:rPr>
+              <a:t>2</a:t>
+            </a:r>
+          </a:p>
+        </p:txBody>
+      </p:sp>
+      <p:sp>
+        <p:nvSpPr>
+          <p:cNvPr id="9" name="TextBox 8"/>
+          <p:cNvSpPr txBox="1"/>
+          <p:nvPr/>
+        </p:nvSpPr>
+        <p:spPr>
+          <a:xfrm>
+            <a:off x="1234440" y="2795778"/>
+            <a:ext cx="10408615" cy="1030986"/>
+          </a:xfrm>
+          <a:prstGeom prst="rect">
+            <a:avLst/>
+          </a:prstGeom>
+          <a:noFill/>
+        </p:spPr>
+        <p:txBody>
+          <a:bodyPr wrap="square" anchor="t" lIns="0" rIns="0" tIns="0" bIns="0"/>
+          <a:lstStyle/>
+          <a:p>
+            <a:pPr algn="l"/>
+            <a:r>
+              <a:rPr sz="1800" b="0" i="0">
+                <a:solidFill>
+                  <a:srgbClr val="54595D"/>
+                </a:solidFill>
+                <a:latin typeface="Calibri"/>
+              </a:rPr>
+              <a:t>What is managing by exception?</a:t>
+            </a:r>
+          </a:p>
+          <a:p>
+            <a:r>
+              <a:rPr sz="1800" b="1">
+                <a:solidFill>
+                  <a:srgbClr val="03306E"/>
+                </a:solidFill>
+                <a:latin typeface="Calibri"/>
+              </a:rPr>
+              <a:t>Only escalating issues when agreed tolerances are exceeded.</a:t>
+            </a:r>
+          </a:p>
+        </p:txBody>
+      </p:sp>
+      <p:sp>
+        <p:nvSpPr>
+          <p:cNvPr id="10" name="Oval 9"/>
+          <p:cNvSpPr/>
+          <p:nvPr/>
+        </p:nvSpPr>
+        <p:spPr>
+          <a:xfrm>
+            <a:off x="548640" y="4009644"/>
+            <a:ext cx="411480" cy="411480"/>
+          </a:xfrm>
+          <a:prstGeom prst="ellipse">
+            <a:avLst/>
+          </a:prstGeom>
+          <a:solidFill>
+            <a:srgbClr val="F2B705"/>
+          </a:solidFill>
+          <a:ln>
+            <a:noFill/>
+          </a:ln>
+          <a:effectLst/>
+        </p:spPr>
+        <p:style>
+          <a:lnRef idx="1">
+            <a:schemeClr val="accent1"/>
+          </a:lnRef>
+          <a:fillRef idx="3">
+            <a:schemeClr val="accent1"/>
+          </a:fillRef>
+          <a:effectRef idx="2">
+            <a:schemeClr val="accent1"/>
+          </a:effectRef>
+          <a:fontRef idx="minor">
+            <a:schemeClr val="lt1"/>
+          </a:fontRef>
+        </p:style>
+        <p:txBody>
+          <a:bodyPr rtlCol="0" anchor="ctr" lIns="0" rIns="0" tIns="0" bIns="0"/>
+          <a:lstStyle/>
+          <a:p>
+            <a:pPr algn="ctr"/>
+            <a:r>
+              <a:rPr sz="1400" b="1">
+                <a:solidFill>
+                  <a:srgbClr val="202122"/>
+                </a:solidFill>
+                <a:latin typeface="Calibri"/>
+              </a:rPr>
+              <a:t>3</a:t>
+            </a:r>
+          </a:p>
+        </p:txBody>
+      </p:sp>
+      <p:sp>
+        <p:nvSpPr>
+          <p:cNvPr id="11" name="TextBox 10"/>
+          <p:cNvSpPr txBox="1"/>
+          <p:nvPr/>
+        </p:nvSpPr>
+        <p:spPr>
+          <a:xfrm>
+            <a:off x="1234440" y="3991356"/>
+            <a:ext cx="10408615" cy="1030986"/>
+          </a:xfrm>
+          <a:prstGeom prst="rect">
+            <a:avLst/>
+          </a:prstGeom>
+          <a:noFill/>
+        </p:spPr>
+        <p:txBody>
+          <a:bodyPr wrap="square" anchor="t" lIns="0" rIns="0" tIns="0" bIns="0"/>
+          <a:lstStyle/>
+          <a:p>
+            <a:pPr algn="l"/>
+            <a:r>
+              <a:rPr sz="1800" b="0" i="0">
+                <a:solidFill>
+                  <a:srgbClr val="54595D"/>
+                </a:solidFill>
+                <a:latin typeface="Calibri"/>
+              </a:rPr>
+              <a:t>What does PERT use for time estimates?</a:t>
+            </a:r>
+          </a:p>
+          <a:p>
+            <a:r>
+              <a:rPr sz="1800" b="1">
+                <a:solidFill>
+                  <a:srgbClr val="03306E"/>
+                </a:solidFill>
+                <a:latin typeface="Calibri"/>
+              </a:rPr>
+              <a:t>Optimistic, most likely and pessimistic estimates.</a:t>
+            </a:r>
+          </a:p>
+        </p:txBody>
+      </p:sp>
+      <p:sp>
+        <p:nvSpPr>
+          <p:cNvPr id="12" name="Oval 11"/>
+          <p:cNvSpPr/>
+          <p:nvPr/>
+        </p:nvSpPr>
+        <p:spPr>
+          <a:xfrm>
+            <a:off x="548640" y="5205221"/>
+            <a:ext cx="411480" cy="411480"/>
+          </a:xfrm>
+          <a:prstGeom prst="ellipse">
+            <a:avLst/>
+          </a:prstGeom>
+          <a:solidFill>
+            <a:srgbClr val="F2B705"/>
+          </a:solidFill>
+          <a:ln>
+            <a:noFill/>
+          </a:ln>
+          <a:effectLst/>
+        </p:spPr>
+        <p:style>
+          <a:lnRef idx="1">
+            <a:schemeClr val="accent1"/>
+          </a:lnRef>
+          <a:fillRef idx="3">
+            <a:schemeClr val="accent1"/>
+          </a:fillRef>
+          <a:effectRef idx="2">
+            <a:schemeClr val="accent1"/>
+          </a:effectRef>
+          <a:fontRef idx="minor">
+            <a:schemeClr val="lt1"/>
+          </a:fontRef>
+        </p:style>
+        <p:txBody>
+          <a:bodyPr rtlCol="0" anchor="ctr" lIns="0" rIns="0" tIns="0" bIns="0"/>
+          <a:lstStyle/>
+          <a:p>
+            <a:pPr algn="ctr"/>
+            <a:r>
+              <a:rPr sz="1400" b="1">
+                <a:solidFill>
+                  <a:srgbClr val="202122"/>
+                </a:solidFill>
+                <a:latin typeface="Calibri"/>
+              </a:rPr>
+              <a:t>4</a:t>
+            </a:r>
+          </a:p>
+        </p:txBody>
+      </p:sp>
+      <p:sp>
+        <p:nvSpPr>
+          <p:cNvPr id="13" name="TextBox 12"/>
+          <p:cNvSpPr txBox="1"/>
+          <p:nvPr/>
+        </p:nvSpPr>
+        <p:spPr>
+          <a:xfrm>
+            <a:off x="1234440" y="5186933"/>
+            <a:ext cx="10408615" cy="1030986"/>
+          </a:xfrm>
+          <a:prstGeom prst="rect">
+            <a:avLst/>
+          </a:prstGeom>
+          <a:noFill/>
+        </p:spPr>
+        <p:txBody>
+          <a:bodyPr wrap="square" anchor="t" lIns="0" rIns="0" tIns="0" bIns="0"/>
+          <a:lstStyle/>
+          <a:p>
+            <a:pPr algn="l"/>
+            <a:r>
+              <a:rPr sz="1800" b="0" i="0">
+                <a:solidFill>
+                  <a:srgbClr val="54595D"/>
+                </a:solidFill>
+                <a:latin typeface="Calibri"/>
+              </a:rPr>
+              <a:t>Name three project constraints.</a:t>
+            </a:r>
+          </a:p>
+          <a:p>
+            <a:r>
+              <a:rPr sz="1800" b="1">
+                <a:solidFill>
+                  <a:srgbClr val="03306E"/>
+                </a:solidFill>
+                <a:latin typeface="Calibri"/>
+              </a:rPr>
+              <a:t>Any three, e.g. budget, time, quality.</a:t>
+            </a:r>
+          </a:p>
+        </p:txBody>
+      </p:sp>
+    </p:spTree>
+  </p:cSld>
+  <p:clrMapOvr>
+    <a:masterClrMapping/>
+  </p:clrMapOvr>
+</p:sld>
+</file>
+
+<file path=ppt/slides/slide12.xml><?xml version="1.0" encoding="utf-8"?>
+<p:sld xmlns:a="http://schemas.openxmlformats.org/drawingml/2006/main" xmlns:p="http://schemas.openxmlformats.org/presentationml/2006/main" xmlns:r="http://schemas.openxmlformats.org/officeDocument/2006/relationships">
+  <p:cSld>
+    <p:bg>
+      <p:bgPr>
+        <a:solidFill>
+          <a:srgbClr val="FFFFFF"/>
+        </a:solidFill>
+        <a:effectLst/>
+      </p:bgPr>
+    </p:bg>
+    <p:spTree>
+      <p:nvGrpSpPr>
+        <p:cNvPr id="1" name=""/>
+        <p:cNvGrpSpPr/>
+        <p:nvPr/>
+      </p:nvGrpSpPr>
+      <p:grpSpPr/>
+      <p:sp>
+        <p:nvSpPr>
+          <p:cNvPr id="2" name="TextBox 1"/>
+          <p:cNvSpPr txBox="1"/>
+          <p:nvPr/>
+        </p:nvSpPr>
+        <p:spPr>
+          <a:xfrm>
+            <a:off x="548640" y="320040"/>
+            <a:ext cx="11094415" cy="274320"/>
+          </a:xfrm>
+          <a:prstGeom prst="rect">
+            <a:avLst/>
+          </a:prstGeom>
+          <a:noFill/>
+        </p:spPr>
+        <p:txBody>
+          <a:bodyPr wrap="square" anchor="t" lIns="0" rIns="0" tIns="0" bIns="0"/>
+          <a:lstStyle/>
+          <a:p>
+            <a:pPr algn="l"/>
+            <a:r>
+              <a:rPr sz="1100" b="1" i="0">
+                <a:solidFill>
+                  <a:srgbClr val="54595D"/>
+                </a:solidFill>
+                <a:latin typeface="Calibri"/>
+              </a:rPr>
+              <a:t>ENGINEERING CORE  ·  Core topic 17</a:t>
+            </a:r>
+          </a:p>
+        </p:txBody>
+      </p:sp>
+      <p:sp>
+        <p:nvSpPr>
+          <p:cNvPr id="3" name="TextBox 2"/>
+          <p:cNvSpPr txBox="1"/>
+          <p:nvPr/>
+        </p:nvSpPr>
+        <p:spPr>
+          <a:xfrm>
+            <a:off x="548640" y="566928"/>
+            <a:ext cx="11094415" cy="822960"/>
+          </a:xfrm>
+          <a:prstGeom prst="rect">
+            <a:avLst/>
+          </a:prstGeom>
+          <a:noFill/>
+        </p:spPr>
+        <p:txBody>
+          <a:bodyPr wrap="square" anchor="ctr" lIns="0" rIns="0" tIns="0" bIns="0"/>
+          <a:lstStyle/>
+          <a:p>
+            <a:pPr algn="l"/>
+            <a:r>
+              <a:rPr sz="3200" b="1" i="0">
+                <a:solidFill>
+                  <a:srgbClr val="03306E"/>
+                </a:solidFill>
+                <a:latin typeface="Cambria"/>
+              </a:rPr>
+              <a:t>Activity: Plan a workshop project</a:t>
+            </a:r>
+          </a:p>
+        </p:txBody>
+      </p:sp>
+      <p:sp>
+        <p:nvSpPr>
+          <p:cNvPr id="4" name="TextBox 3"/>
+          <p:cNvSpPr txBox="1"/>
+          <p:nvPr/>
+        </p:nvSpPr>
+        <p:spPr>
+          <a:xfrm>
+            <a:off x="548640" y="6446520"/>
+            <a:ext cx="8229600" cy="274320"/>
+          </a:xfrm>
+          <a:prstGeom prst="rect">
+            <a:avLst/>
+          </a:prstGeom>
+          <a:noFill/>
+        </p:spPr>
+        <p:txBody>
+          <a:bodyPr wrap="square" anchor="t" lIns="0" rIns="0" tIns="0" bIns="0"/>
+          <a:lstStyle/>
+          <a:p>
+            <a:pPr algn="l"/>
+            <a:r>
+              <a:rPr sz="1000" b="0" i="0">
+                <a:solidFill>
+                  <a:srgbClr val="54595D"/>
+                </a:solidFill>
+                <a:latin typeface="Calibri"/>
+              </a:rPr>
+              <a:t>Design and Development for Engineering and Manufacturing T Level  ·  Project and Programme Management</a:t>
+            </a:r>
+          </a:p>
+        </p:txBody>
+      </p:sp>
+      <p:sp>
+        <p:nvSpPr>
+          <p:cNvPr id="5" name="TextBox 4"/>
+          <p:cNvSpPr txBox="1"/>
+          <p:nvPr/>
+        </p:nvSpPr>
+        <p:spPr>
+          <a:xfrm>
+            <a:off x="10728655" y="6446520"/>
+            <a:ext cx="914400" cy="274320"/>
+          </a:xfrm>
+          <a:prstGeom prst="rect">
+            <a:avLst/>
+          </a:prstGeom>
+          <a:noFill/>
+        </p:spPr>
+        <p:txBody>
+          <a:bodyPr wrap="square" anchor="t" lIns="0" rIns="0" tIns="0" bIns="0"/>
+          <a:lstStyle/>
+          <a:p>
+            <a:pPr algn="r"/>
+            <a:r>
+              <a:rPr sz="1000" b="0" i="0">
+                <a:solidFill>
+                  <a:srgbClr val="54595D"/>
+                </a:solidFill>
+                <a:latin typeface="Calibri"/>
+              </a:rPr>
+              <a:t>12</a:t>
+            </a:r>
+          </a:p>
+        </p:txBody>
+      </p:sp>
+      <p:sp>
+        <p:nvSpPr>
+          <p:cNvPr id="6" name="Rounded Rectangle 5"/>
+          <p:cNvSpPr/>
+          <p:nvPr/>
+        </p:nvSpPr>
+        <p:spPr>
+          <a:xfrm>
+            <a:off x="548640" y="1508760"/>
+            <a:ext cx="2011680" cy="457200"/>
+          </a:xfrm>
+          <a:prstGeom prst="roundRect">
+            <a:avLst>
+              <a:gd name="adj" fmla="val 50000"/>
+            </a:avLst>
+          </a:prstGeom>
+          <a:solidFill>
+            <a:srgbClr val="F2B705"/>
+          </a:solidFill>
+          <a:ln>
+            <a:noFill/>
+          </a:ln>
+          <a:effectLst/>
+        </p:spPr>
+        <p:style>
+          <a:lnRef idx="1">
+            <a:schemeClr val="accent1"/>
+          </a:lnRef>
+          <a:fillRef idx="3">
+            <a:schemeClr val="accent1"/>
+          </a:fillRef>
+          <a:effectRef idx="2">
+            <a:schemeClr val="accent1"/>
+          </a:effectRef>
+          <a:fontRef idx="minor">
+            <a:schemeClr val="lt1"/>
+          </a:fontRef>
+        </p:style>
+        <p:txBody>
+          <a:bodyPr rtlCol="0" anchor="ctr"/>
+          <a:lstStyle/>
+          <a:p/>
+        </p:txBody>
+      </p:sp>
+      <p:sp>
+        <p:nvSpPr>
+          <p:cNvPr id="7" name="TextBox 6"/>
+          <p:cNvSpPr txBox="1"/>
+          <p:nvPr/>
+        </p:nvSpPr>
+        <p:spPr>
+          <a:xfrm>
+            <a:off x="548640" y="1508760"/>
+            <a:ext cx="2011680" cy="457200"/>
+          </a:xfrm>
+          <a:prstGeom prst="rect">
+            <a:avLst/>
+          </a:prstGeom>
+          <a:noFill/>
+        </p:spPr>
+        <p:txBody>
+          <a:bodyPr wrap="square" anchor="ctr" lIns="0" rIns="0" tIns="0" bIns="0"/>
+          <a:lstStyle/>
+          <a:p>
+            <a:pPr algn="ctr"/>
+            <a:r>
+              <a:rPr sz="1400" b="1" i="0">
+                <a:solidFill>
+                  <a:srgbClr val="202122"/>
+                </a:solidFill>
+                <a:latin typeface="Calibri"/>
+              </a:rPr>
+              <a:t>30 minutes</a:t>
+            </a:r>
+          </a:p>
+        </p:txBody>
+      </p:sp>
+      <p:sp>
+        <p:nvSpPr>
+          <p:cNvPr id="8" name="TextBox 7"/>
+          <p:cNvSpPr txBox="1"/>
+          <p:nvPr/>
+        </p:nvSpPr>
+        <p:spPr>
+          <a:xfrm>
+            <a:off x="2743200" y="1508760"/>
+            <a:ext cx="4754880" cy="457200"/>
+          </a:xfrm>
+          <a:prstGeom prst="rect">
+            <a:avLst/>
+          </a:prstGeom>
+          <a:noFill/>
+        </p:spPr>
+        <p:txBody>
+          <a:bodyPr wrap="square" anchor="ctr" lIns="0" rIns="0" tIns="0" bIns="0"/>
+          <a:lstStyle/>
+          <a:p>
+            <a:pPr algn="l"/>
+            <a:r>
+              <a:rPr sz="1400" b="0" i="1">
+                <a:solidFill>
+                  <a:srgbClr val="54595D"/>
+                </a:solidFill>
+                <a:latin typeface="Calibri"/>
+              </a:rPr>
+              <a:t>Pairs</a:t>
+            </a:r>
+          </a:p>
+        </p:txBody>
+      </p:sp>
+      <p:sp>
+        <p:nvSpPr>
+          <p:cNvPr id="9" name="Oval 8"/>
+          <p:cNvSpPr/>
+          <p:nvPr/>
+        </p:nvSpPr>
+        <p:spPr>
+          <a:xfrm>
+            <a:off x="548640" y="2482596"/>
+            <a:ext cx="384048" cy="384048"/>
+          </a:xfrm>
+          <a:prstGeom prst="ellipse">
+            <a:avLst/>
+          </a:prstGeom>
+          <a:solidFill>
+            <a:srgbClr val="0645AD"/>
+          </a:solidFill>
+          <a:ln>
+            <a:noFill/>
+          </a:ln>
+          <a:effectLst/>
+        </p:spPr>
+        <p:style>
+          <a:lnRef idx="1">
+            <a:schemeClr val="accent1"/>
+          </a:lnRef>
+          <a:fillRef idx="3">
+            <a:schemeClr val="accent1"/>
+          </a:fillRef>
+          <a:effectRef idx="2">
+            <a:schemeClr val="accent1"/>
+          </a:effectRef>
+          <a:fontRef idx="minor">
+            <a:schemeClr val="lt1"/>
+          </a:fontRef>
+        </p:style>
+        <p:txBody>
+          <a:bodyPr rtlCol="0" anchor="ctr" lIns="0" rIns="0" tIns="0" bIns="0"/>
+          <a:lstStyle/>
+          <a:p>
+            <a:pPr algn="ctr"/>
+            <a:r>
+              <a:rPr sz="1300" b="1">
+                <a:solidFill>
+                  <a:srgbClr val="FFFFFF"/>
+                </a:solidFill>
+                <a:latin typeface="Calibri"/>
+              </a:rPr>
+              <a:t>1</a:t>
+            </a:r>
+          </a:p>
+        </p:txBody>
+      </p:sp>
+      <p:sp>
+        <p:nvSpPr>
+          <p:cNvPr id="10" name="TextBox 9"/>
+          <p:cNvSpPr txBox="1"/>
+          <p:nvPr/>
+        </p:nvSpPr>
+        <p:spPr>
+          <a:xfrm>
+            <a:off x="1143000" y="2240280"/>
+            <a:ext cx="5943600" cy="868680"/>
+          </a:xfrm>
+          <a:prstGeom prst="rect">
+            <a:avLst/>
+          </a:prstGeom>
+          <a:noFill/>
+        </p:spPr>
+        <p:txBody>
+          <a:bodyPr wrap="square" anchor="ctr" lIns="0" rIns="0" tIns="0" bIns="0"/>
+          <a:lstStyle/>
+          <a:p>
+            <a:pPr algn="l"/>
+            <a:r>
+              <a:rPr sz="1700" b="0" i="0">
+                <a:solidFill>
+                  <a:srgbClr val="202122"/>
+                </a:solidFill>
+                <a:latin typeface="Calibri"/>
+              </a:rPr>
+              <a:t>Tasks: design (3 days), order parts (5), machine parts (4), assemble (2), test (1). Machining can't start until parts arrive.</a:t>
+            </a:r>
+          </a:p>
+        </p:txBody>
+      </p:sp>
+      <p:sp>
+        <p:nvSpPr>
+          <p:cNvPr id="11" name="Oval 10"/>
+          <p:cNvSpPr/>
+          <p:nvPr/>
+        </p:nvSpPr>
+        <p:spPr>
+          <a:xfrm>
+            <a:off x="548640" y="3461004"/>
+            <a:ext cx="384048" cy="384048"/>
+          </a:xfrm>
+          <a:prstGeom prst="ellipse">
+            <a:avLst/>
+          </a:prstGeom>
+          <a:solidFill>
+            <a:srgbClr val="0645AD"/>
+          </a:solidFill>
+          <a:ln>
+            <a:noFill/>
+          </a:ln>
+          <a:effectLst/>
+        </p:spPr>
+        <p:style>
+          <a:lnRef idx="1">
+            <a:schemeClr val="accent1"/>
+          </a:lnRef>
+          <a:fillRef idx="3">
+            <a:schemeClr val="accent1"/>
+          </a:fillRef>
+          <a:effectRef idx="2">
+            <a:schemeClr val="accent1"/>
+          </a:effectRef>
+          <a:fontRef idx="minor">
+            <a:schemeClr val="lt1"/>
+          </a:fontRef>
+        </p:style>
+        <p:txBody>
+          <a:bodyPr rtlCol="0" anchor="ctr" lIns="0" rIns="0" tIns="0" bIns="0"/>
+          <a:lstStyle/>
+          <a:p>
+            <a:pPr algn="ctr"/>
+            <a:r>
+              <a:rPr sz="1300" b="1">
+                <a:solidFill>
+                  <a:srgbClr val="FFFFFF"/>
+                </a:solidFill>
+                <a:latin typeface="Calibri"/>
+              </a:rPr>
+              <a:t>2</a:t>
+            </a:r>
+          </a:p>
+        </p:txBody>
+      </p:sp>
+      <p:sp>
+        <p:nvSpPr>
+          <p:cNvPr id="12" name="TextBox 11"/>
+          <p:cNvSpPr txBox="1"/>
+          <p:nvPr/>
+        </p:nvSpPr>
+        <p:spPr>
+          <a:xfrm>
+            <a:off x="1143000" y="3218688"/>
+            <a:ext cx="5943600" cy="868680"/>
+          </a:xfrm>
+          <a:prstGeom prst="rect">
+            <a:avLst/>
+          </a:prstGeom>
+          <a:noFill/>
+        </p:spPr>
+        <p:txBody>
+          <a:bodyPr wrap="square" anchor="ctr" lIns="0" rIns="0" tIns="0" bIns="0"/>
+          <a:lstStyle/>
+          <a:p>
+            <a:pPr algn="l"/>
+            <a:r>
+              <a:rPr sz="1700" b="0" i="0">
+                <a:solidFill>
+                  <a:srgbClr val="202122"/>
+                </a:solidFill>
+                <a:latin typeface="Calibri"/>
+              </a:rPr>
+              <a:t>Draw a Gantt chart.</a:t>
+            </a:r>
+          </a:p>
+        </p:txBody>
+      </p:sp>
+      <p:sp>
+        <p:nvSpPr>
+          <p:cNvPr id="13" name="Oval 12"/>
+          <p:cNvSpPr/>
+          <p:nvPr/>
+        </p:nvSpPr>
+        <p:spPr>
+          <a:xfrm>
+            <a:off x="548640" y="4439412"/>
+            <a:ext cx="384048" cy="384048"/>
+          </a:xfrm>
+          <a:prstGeom prst="ellipse">
+            <a:avLst/>
+          </a:prstGeom>
+          <a:solidFill>
+            <a:srgbClr val="0645AD"/>
+          </a:solidFill>
+          <a:ln>
+            <a:noFill/>
+          </a:ln>
+          <a:effectLst/>
+        </p:spPr>
+        <p:style>
+          <a:lnRef idx="1">
+            <a:schemeClr val="accent1"/>
+          </a:lnRef>
+          <a:fillRef idx="3">
+            <a:schemeClr val="accent1"/>
+          </a:fillRef>
+          <a:effectRef idx="2">
+            <a:schemeClr val="accent1"/>
+          </a:effectRef>
+          <a:fontRef idx="minor">
+            <a:schemeClr val="lt1"/>
+          </a:fontRef>
+        </p:style>
+        <p:txBody>
+          <a:bodyPr rtlCol="0" anchor="ctr" lIns="0" rIns="0" tIns="0" bIns="0"/>
+          <a:lstStyle/>
+          <a:p>
+            <a:pPr algn="ctr"/>
+            <a:r>
+              <a:rPr sz="1300" b="1">
+                <a:solidFill>
+                  <a:srgbClr val="FFFFFF"/>
+                </a:solidFill>
+                <a:latin typeface="Calibri"/>
+              </a:rPr>
+              <a:t>3</a:t>
+            </a:r>
+          </a:p>
+        </p:txBody>
+      </p:sp>
+      <p:sp>
+        <p:nvSpPr>
+          <p:cNvPr id="14" name="TextBox 13"/>
+          <p:cNvSpPr txBox="1"/>
+          <p:nvPr/>
+        </p:nvSpPr>
+        <p:spPr>
+          <a:xfrm>
+            <a:off x="1143000" y="4197096"/>
+            <a:ext cx="5943600" cy="868680"/>
+          </a:xfrm>
+          <a:prstGeom prst="rect">
+            <a:avLst/>
+          </a:prstGeom>
+          <a:noFill/>
+        </p:spPr>
+        <p:txBody>
+          <a:bodyPr wrap="square" anchor="ctr" lIns="0" rIns="0" tIns="0" bIns="0"/>
+          <a:lstStyle/>
+          <a:p>
+            <a:pPr algn="l"/>
+            <a:r>
+              <a:rPr sz="1700" b="0" i="0">
+                <a:solidFill>
+                  <a:srgbClr val="202122"/>
+                </a:solidFill>
+                <a:latin typeface="Calibri"/>
+              </a:rPr>
+              <a:t>Find the critical path and total duration.</a:t>
+            </a:r>
+          </a:p>
+        </p:txBody>
+      </p:sp>
+      <p:sp>
+        <p:nvSpPr>
+          <p:cNvPr id="15" name="Oval 14"/>
+          <p:cNvSpPr/>
+          <p:nvPr/>
+        </p:nvSpPr>
+        <p:spPr>
+          <a:xfrm>
+            <a:off x="548640" y="5417820"/>
+            <a:ext cx="384048" cy="384048"/>
+          </a:xfrm>
+          <a:prstGeom prst="ellipse">
+            <a:avLst/>
+          </a:prstGeom>
+          <a:solidFill>
+            <a:srgbClr val="0645AD"/>
+          </a:solidFill>
+          <a:ln>
+            <a:noFill/>
+          </a:ln>
+          <a:effectLst/>
+        </p:spPr>
+        <p:style>
+          <a:lnRef idx="1">
+            <a:schemeClr val="accent1"/>
+          </a:lnRef>
+          <a:fillRef idx="3">
+            <a:schemeClr val="accent1"/>
+          </a:fillRef>
+          <a:effectRef idx="2">
+            <a:schemeClr val="accent1"/>
+          </a:effectRef>
+          <a:fontRef idx="minor">
+            <a:schemeClr val="lt1"/>
+          </a:fontRef>
+        </p:style>
+        <p:txBody>
+          <a:bodyPr rtlCol="0" anchor="ctr" lIns="0" rIns="0" tIns="0" bIns="0"/>
+          <a:lstStyle/>
+          <a:p>
+            <a:pPr algn="ctr"/>
+            <a:r>
+              <a:rPr sz="1300" b="1">
+                <a:solidFill>
+                  <a:srgbClr val="FFFFFF"/>
+                </a:solidFill>
+                <a:latin typeface="Calibri"/>
+              </a:rPr>
+              <a:t>4</a:t>
+            </a:r>
+          </a:p>
+        </p:txBody>
+      </p:sp>
+      <p:sp>
+        <p:nvSpPr>
+          <p:cNvPr id="16" name="TextBox 15"/>
+          <p:cNvSpPr txBox="1"/>
+          <p:nvPr/>
+        </p:nvSpPr>
+        <p:spPr>
+          <a:xfrm>
+            <a:off x="1143000" y="5175504"/>
+            <a:ext cx="5943600" cy="868680"/>
+          </a:xfrm>
+          <a:prstGeom prst="rect">
+            <a:avLst/>
+          </a:prstGeom>
+          <a:noFill/>
+        </p:spPr>
+        <p:txBody>
+          <a:bodyPr wrap="square" anchor="ctr" lIns="0" rIns="0" tIns="0" bIns="0"/>
+          <a:lstStyle/>
+          <a:p>
+            <a:pPr algn="l"/>
+            <a:r>
+              <a:rPr sz="1700" b="0" i="0">
+                <a:solidFill>
+                  <a:srgbClr val="202122"/>
+                </a:solidFill>
+                <a:latin typeface="Calibri"/>
+              </a:rPr>
+              <a:t>Write one contingency plan.</a:t>
+            </a:r>
+          </a:p>
+        </p:txBody>
+      </p:sp>
+      <p:sp>
+        <p:nvSpPr>
+          <p:cNvPr id="17" name="Rounded Rectangle 16"/>
+          <p:cNvSpPr/>
+          <p:nvPr/>
+        </p:nvSpPr>
+        <p:spPr>
+          <a:xfrm>
+            <a:off x="7772400" y="1508760"/>
+            <a:ext cx="3867912" cy="4572000"/>
+          </a:xfrm>
+          <a:prstGeom prst="roundRect">
+            <a:avLst>
+              <a:gd name="adj" fmla="val 8000"/>
+            </a:avLst>
+          </a:prstGeom>
+          <a:solidFill>
+            <a:srgbClr val="EAF3FF"/>
+          </a:solidFill>
+          <a:ln>
+            <a:noFill/>
+          </a:ln>
+          <a:effectLst/>
+        </p:spPr>
+        <p:style>
+          <a:lnRef idx="1">
+            <a:schemeClr val="accent1"/>
+          </a:lnRef>
+          <a:fillRef idx="3">
+            <a:schemeClr val="accent1"/>
+          </a:fillRef>
+          <a:effectRef idx="2">
+            <a:schemeClr val="accent1"/>
+          </a:effectRef>
+          <a:fontRef idx="minor">
+            <a:schemeClr val="lt1"/>
+          </a:fontRef>
+        </p:style>
+        <p:txBody>
+          <a:bodyPr rtlCol="0" anchor="ctr"/>
+          <a:lstStyle/>
+          <a:p/>
+        </p:txBody>
+      </p:sp>
+      <p:sp>
+        <p:nvSpPr>
+          <p:cNvPr id="18" name="TextBox 17"/>
+          <p:cNvSpPr txBox="1"/>
+          <p:nvPr/>
+        </p:nvSpPr>
+        <p:spPr>
+          <a:xfrm>
+            <a:off x="8046720" y="1737360"/>
+            <a:ext cx="3291840" cy="365760"/>
+          </a:xfrm>
+          <a:prstGeom prst="rect">
+            <a:avLst/>
+          </a:prstGeom>
+          <a:noFill/>
+        </p:spPr>
+        <p:txBody>
+          <a:bodyPr wrap="square" anchor="t" lIns="0" rIns="0" tIns="0" bIns="0"/>
+          <a:lstStyle/>
+          <a:p>
+            <a:pPr algn="l"/>
+            <a:r>
+              <a:rPr sz="1300" b="1" i="0">
+                <a:solidFill>
+                  <a:srgbClr val="0645AD"/>
+                </a:solidFill>
+                <a:latin typeface="Calibri"/>
+              </a:rPr>
+              <a:t>SUCCESS CRITERIA</a:t>
+            </a:r>
+          </a:p>
+        </p:txBody>
+      </p:sp>
+      <p:sp>
+        <p:nvSpPr>
+          <p:cNvPr id="19" name="TextBox 18"/>
+          <p:cNvSpPr txBox="1"/>
+          <p:nvPr/>
+        </p:nvSpPr>
+        <p:spPr>
+          <a:xfrm>
+            <a:off x="8046720" y="2240280"/>
+            <a:ext cx="3337560" cy="3657600"/>
+          </a:xfrm>
+          <a:prstGeom prst="rect">
+            <a:avLst/>
+          </a:prstGeom>
+          <a:noFill/>
+        </p:spPr>
+        <p:txBody>
+          <a:bodyPr wrap="square" lIns="0" rIns="0" tIns="0" bIns="0">
+            <a:spAutoFit/>
+          </a:bodyPr>
+          <a:lstStyle/>
+          <a:p>
+            <a:pPr marL="274320" indent="-274320">
+              <a:spcAft>
+                <a:spcPts val="810"/>
+              </a:spcAft>
+              <a:buClr>
+                <a:srgbClr val="0645AD"/>
+              </a:buClr>
+              <a:buFont typeface="Arial"/>
+              <a:buChar char="•"/>
+            </a:pPr>
+            <a:r>
+              <a:rPr sz="1800" b="0">
+                <a:solidFill>
+                  <a:srgbClr val="202122"/>
+                </a:solidFill>
+                <a:latin typeface="Calibri"/>
+              </a:rPr>
+              <a:t>Dependencies correct</a:t>
+            </a:r>
+          </a:p>
+          <a:p>
+            <a:pPr marL="274320" indent="-274320">
+              <a:spcAft>
+                <a:spcPts val="810"/>
+              </a:spcAft>
+              <a:buClr>
+                <a:srgbClr val="0645AD"/>
+              </a:buClr>
+              <a:buFont typeface="Arial"/>
+              <a:buChar char="•"/>
+            </a:pPr>
+            <a:r>
+              <a:rPr sz="1800" b="0">
+                <a:solidFill>
+                  <a:srgbClr val="202122"/>
+                </a:solidFill>
+                <a:latin typeface="Calibri"/>
+              </a:rPr>
+              <a:t>Critical path identified</a:t>
+            </a:r>
+          </a:p>
+          <a:p>
+            <a:pPr marL="274320" indent="-274320">
+              <a:spcAft>
+                <a:spcPts val="810"/>
+              </a:spcAft>
+              <a:buClr>
+                <a:srgbClr val="0645AD"/>
+              </a:buClr>
+              <a:buFont typeface="Arial"/>
+              <a:buChar char="•"/>
+            </a:pPr>
+            <a:r>
+              <a:rPr sz="1800" b="0">
+                <a:solidFill>
+                  <a:srgbClr val="202122"/>
+                </a:solidFill>
+                <a:latin typeface="Calibri"/>
+              </a:rPr>
+              <a:t>Contingency is realistic</a:t>
+            </a:r>
+          </a:p>
+        </p:txBody>
+      </p:sp>
+    </p:spTree>
+  </p:cSld>
+  <p:clrMapOvr>
+    <a:masterClrMapping/>
+  </p:clrMapOvr>
+</p:sld>
+</file>
+
+<file path=ppt/slides/slide13.xml><?xml version="1.0" encoding="utf-8"?>
+<p:sld xmlns:a="http://schemas.openxmlformats.org/drawingml/2006/main" xmlns:p="http://schemas.openxmlformats.org/presentationml/2006/main" xmlns:r="http://schemas.openxmlformats.org/officeDocument/2006/relationships">
+  <p:cSld>
+    <p:bg>
+      <p:bgPr>
+        <a:solidFill>
+          <a:srgbClr val="03306E"/>
+        </a:solidFill>
+        <a:effectLst/>
+      </p:bgPr>
+    </p:bg>
+    <p:spTree>
+      <p:nvGrpSpPr>
+        <p:cNvPr id="1" name=""/>
+        <p:cNvGrpSpPr/>
+        <p:nvPr/>
+      </p:nvGrpSpPr>
+      <p:grpSpPr/>
+      <p:sp>
+        <p:nvSpPr>
+          <p:cNvPr id="2" name="TextBox 1"/>
+          <p:cNvSpPr txBox="1"/>
+          <p:nvPr/>
+        </p:nvSpPr>
+        <p:spPr>
+          <a:xfrm>
+            <a:off x="548640" y="320040"/>
+            <a:ext cx="11094415" cy="274320"/>
+          </a:xfrm>
+          <a:prstGeom prst="rect">
+            <a:avLst/>
+          </a:prstGeom>
+          <a:noFill/>
+        </p:spPr>
+        <p:txBody>
+          <a:bodyPr wrap="square" anchor="t" lIns="0" rIns="0" tIns="0" bIns="0"/>
+          <a:lstStyle/>
+          <a:p>
+            <a:pPr algn="l"/>
+            <a:r>
+              <a:rPr sz="1100" b="1" i="0">
+                <a:solidFill>
+                  <a:srgbClr val="A9C8F0"/>
+                </a:solidFill>
+                <a:latin typeface="Calibri"/>
+              </a:rPr>
+              <a:t>ENGINEERING CORE  ·  Core topic 17</a:t>
+            </a:r>
+          </a:p>
+        </p:txBody>
+      </p:sp>
+      <p:sp>
+        <p:nvSpPr>
+          <p:cNvPr id="3" name="TextBox 2"/>
+          <p:cNvSpPr txBox="1"/>
+          <p:nvPr/>
+        </p:nvSpPr>
+        <p:spPr>
+          <a:xfrm>
+            <a:off x="548640" y="566928"/>
+            <a:ext cx="11094415" cy="822960"/>
+          </a:xfrm>
+          <a:prstGeom prst="rect">
+            <a:avLst/>
+          </a:prstGeom>
+          <a:noFill/>
+        </p:spPr>
+        <p:txBody>
+          <a:bodyPr wrap="square" anchor="ctr" lIns="0" rIns="0" tIns="0" bIns="0"/>
+          <a:lstStyle/>
+          <a:p>
+            <a:pPr algn="l"/>
+            <a:r>
+              <a:rPr sz="3200" b="1" i="0">
+                <a:solidFill>
+                  <a:srgbClr val="FFFFFF"/>
+                </a:solidFill>
+                <a:latin typeface="Cambria"/>
+              </a:rPr>
+              <a:t>Exit ticket</a:t>
+            </a:r>
+          </a:p>
+        </p:txBody>
+      </p:sp>
+      <p:sp>
+        <p:nvSpPr>
+          <p:cNvPr id="4" name="Oval 3"/>
+          <p:cNvSpPr/>
+          <p:nvPr/>
+        </p:nvSpPr>
+        <p:spPr>
+          <a:xfrm>
+            <a:off x="548640" y="1737360"/>
+            <a:ext cx="502920" cy="502920"/>
+          </a:xfrm>
+          <a:prstGeom prst="ellipse">
+            <a:avLst/>
+          </a:prstGeom>
+          <a:solidFill>
+            <a:srgbClr val="F2B705"/>
+          </a:solidFill>
+          <a:ln>
+            <a:noFill/>
+          </a:ln>
+          <a:effectLst/>
+        </p:spPr>
+        <p:style>
+          <a:lnRef idx="1">
+            <a:schemeClr val="accent1"/>
+          </a:lnRef>
+          <a:fillRef idx="3">
+            <a:schemeClr val="accent1"/>
+          </a:fillRef>
+          <a:effectRef idx="2">
+            <a:schemeClr val="accent1"/>
+          </a:effectRef>
+          <a:fontRef idx="minor">
+            <a:schemeClr val="lt1"/>
+          </a:fontRef>
+        </p:style>
+        <p:txBody>
+          <a:bodyPr rtlCol="0" anchor="ctr" lIns="0" rIns="0" tIns="0" bIns="0"/>
+          <a:lstStyle/>
+          <a:p>
+            <a:pPr algn="ctr"/>
+            <a:r>
+              <a:rPr sz="1700" b="1">
+                <a:solidFill>
+                  <a:srgbClr val="202122"/>
+                </a:solidFill>
+                <a:latin typeface="Calibri"/>
+              </a:rPr>
+              <a:t>1</a:t>
+            </a:r>
+          </a:p>
+        </p:txBody>
+      </p:sp>
+      <p:sp>
+        <p:nvSpPr>
+          <p:cNvPr id="5" name="TextBox 4"/>
+          <p:cNvSpPr txBox="1"/>
+          <p:nvPr/>
+        </p:nvSpPr>
+        <p:spPr>
+          <a:xfrm>
+            <a:off x="1325880" y="1645920"/>
+            <a:ext cx="6583680" cy="822960"/>
+          </a:xfrm>
+          <a:prstGeom prst="rect">
+            <a:avLst/>
+          </a:prstGeom>
+          <a:noFill/>
+        </p:spPr>
+        <p:txBody>
+          <a:bodyPr wrap="square" anchor="ctr" lIns="0" rIns="0" tIns="0" bIns="0"/>
+          <a:lstStyle/>
+          <a:p>
+            <a:pPr algn="l"/>
+            <a:r>
+              <a:rPr sz="2000" b="0" i="0">
+                <a:solidFill>
+                  <a:srgbClr val="FFFFFF"/>
+                </a:solidFill>
+                <a:latin typeface="Calibri"/>
+              </a:rPr>
+              <a:t>Why involve regulators as stakeholders?</a:t>
+            </a:r>
+          </a:p>
+        </p:txBody>
+      </p:sp>
+      <p:sp>
+        <p:nvSpPr>
+          <p:cNvPr id="6" name="Oval 5"/>
+          <p:cNvSpPr/>
+          <p:nvPr/>
+        </p:nvSpPr>
+        <p:spPr>
+          <a:xfrm>
+            <a:off x="548640" y="2697480"/>
+            <a:ext cx="502920" cy="502920"/>
+          </a:xfrm>
+          <a:prstGeom prst="ellipse">
+            <a:avLst/>
+          </a:prstGeom>
+          <a:solidFill>
+            <a:srgbClr val="F2B705"/>
+          </a:solidFill>
+          <a:ln>
+            <a:noFill/>
+          </a:ln>
+          <a:effectLst/>
+        </p:spPr>
+        <p:style>
+          <a:lnRef idx="1">
+            <a:schemeClr val="accent1"/>
+          </a:lnRef>
+          <a:fillRef idx="3">
+            <a:schemeClr val="accent1"/>
+          </a:fillRef>
+          <a:effectRef idx="2">
+            <a:schemeClr val="accent1"/>
+          </a:effectRef>
+          <a:fontRef idx="minor">
+            <a:schemeClr val="lt1"/>
+          </a:fontRef>
+        </p:style>
+        <p:txBody>
+          <a:bodyPr rtlCol="0" anchor="ctr" lIns="0" rIns="0" tIns="0" bIns="0"/>
+          <a:lstStyle/>
+          <a:p>
+            <a:pPr algn="ctr"/>
+            <a:r>
+              <a:rPr sz="1700" b="1">
+                <a:solidFill>
+                  <a:srgbClr val="202122"/>
+                </a:solidFill>
+                <a:latin typeface="Calibri"/>
+              </a:rPr>
+              <a:t>2</a:t>
+            </a:r>
+          </a:p>
+        </p:txBody>
+      </p:sp>
+      <p:sp>
+        <p:nvSpPr>
+          <p:cNvPr id="7" name="TextBox 6"/>
+          <p:cNvSpPr txBox="1"/>
+          <p:nvPr/>
+        </p:nvSpPr>
+        <p:spPr>
+          <a:xfrm>
+            <a:off x="1325880" y="2606040"/>
+            <a:ext cx="6583680" cy="822960"/>
+          </a:xfrm>
+          <a:prstGeom prst="rect">
+            <a:avLst/>
+          </a:prstGeom>
+          <a:noFill/>
+        </p:spPr>
+        <p:txBody>
+          <a:bodyPr wrap="square" anchor="ctr" lIns="0" rIns="0" tIns="0" bIns="0"/>
+          <a:lstStyle/>
+          <a:p>
+            <a:pPr algn="l"/>
+            <a:r>
+              <a:rPr sz="2000" b="0" i="0">
+                <a:solidFill>
+                  <a:srgbClr val="FFFFFF"/>
+                </a:solidFill>
+                <a:latin typeface="Calibri"/>
+              </a:rPr>
+              <a:t>What is float?</a:t>
+            </a:r>
+          </a:p>
+        </p:txBody>
+      </p:sp>
+      <p:sp>
+        <p:nvSpPr>
+          <p:cNvPr id="8" name="Oval 7"/>
+          <p:cNvSpPr/>
+          <p:nvPr/>
+        </p:nvSpPr>
+        <p:spPr>
+          <a:xfrm>
+            <a:off x="548640" y="3657600"/>
+            <a:ext cx="502920" cy="502920"/>
+          </a:xfrm>
+          <a:prstGeom prst="ellipse">
+            <a:avLst/>
+          </a:prstGeom>
+          <a:solidFill>
+            <a:srgbClr val="F2B705"/>
+          </a:solidFill>
+          <a:ln>
+            <a:noFill/>
+          </a:ln>
+          <a:effectLst/>
+        </p:spPr>
+        <p:style>
+          <a:lnRef idx="1">
+            <a:schemeClr val="accent1"/>
+          </a:lnRef>
+          <a:fillRef idx="3">
+            <a:schemeClr val="accent1"/>
+          </a:fillRef>
+          <a:effectRef idx="2">
+            <a:schemeClr val="accent1"/>
+          </a:effectRef>
+          <a:fontRef idx="minor">
+            <a:schemeClr val="lt1"/>
+          </a:fontRef>
+        </p:style>
+        <p:txBody>
+          <a:bodyPr rtlCol="0" anchor="ctr" lIns="0" rIns="0" tIns="0" bIns="0"/>
+          <a:lstStyle/>
+          <a:p>
+            <a:pPr algn="ctr"/>
+            <a:r>
+              <a:rPr sz="1700" b="1">
+                <a:solidFill>
+                  <a:srgbClr val="202122"/>
+                </a:solidFill>
+                <a:latin typeface="Calibri"/>
+              </a:rPr>
+              <a:t>3</a:t>
+            </a:r>
+          </a:p>
+        </p:txBody>
+      </p:sp>
+      <p:sp>
+        <p:nvSpPr>
+          <p:cNvPr id="9" name="TextBox 8"/>
+          <p:cNvSpPr txBox="1"/>
+          <p:nvPr/>
+        </p:nvSpPr>
+        <p:spPr>
+          <a:xfrm>
+            <a:off x="1325880" y="3566160"/>
+            <a:ext cx="6583680" cy="822960"/>
+          </a:xfrm>
+          <a:prstGeom prst="rect">
+            <a:avLst/>
+          </a:prstGeom>
+          <a:noFill/>
+        </p:spPr>
+        <p:txBody>
+          <a:bodyPr wrap="square" anchor="ctr" lIns="0" rIns="0" tIns="0" bIns="0"/>
+          <a:lstStyle/>
+          <a:p>
+            <a:pPr algn="l"/>
+            <a:r>
+              <a:rPr sz="2000" b="0" i="0">
+                <a:solidFill>
+                  <a:srgbClr val="FFFFFF"/>
+                </a:solidFill>
+                <a:latin typeface="Calibri"/>
+              </a:rPr>
+              <a:t>When would you manage by stages?</a:t>
+            </a:r>
+          </a:p>
+        </p:txBody>
+      </p:sp>
+      <p:sp>
+        <p:nvSpPr>
+          <p:cNvPr id="10" name="Rounded Rectangle 9"/>
+          <p:cNvSpPr/>
+          <p:nvPr/>
+        </p:nvSpPr>
+        <p:spPr>
+          <a:xfrm>
+            <a:off x="8229600" y="1645920"/>
+            <a:ext cx="3410712" cy="2926080"/>
+          </a:xfrm>
+          <a:prstGeom prst="roundRect">
+            <a:avLst>
+              <a:gd name="adj" fmla="val 8000"/>
+            </a:avLst>
+          </a:prstGeom>
+          <a:solidFill>
+            <a:srgbClr val="0645AD"/>
+          </a:solidFill>
+          <a:ln>
+            <a:noFill/>
+          </a:ln>
+          <a:effectLst/>
+        </p:spPr>
+        <p:style>
+          <a:lnRef idx="1">
+            <a:schemeClr val="accent1"/>
+          </a:lnRef>
+          <a:fillRef idx="3">
+            <a:schemeClr val="accent1"/>
+          </a:fillRef>
+          <a:effectRef idx="2">
+            <a:schemeClr val="accent1"/>
+          </a:effectRef>
+          <a:fontRef idx="minor">
+            <a:schemeClr val="lt1"/>
+          </a:fontRef>
+        </p:style>
+        <p:txBody>
+          <a:bodyPr rtlCol="0" anchor="ctr"/>
+          <a:lstStyle/>
+          <a:p/>
+        </p:txBody>
+      </p:sp>
+      <p:sp>
+        <p:nvSpPr>
+          <p:cNvPr id="11" name="TextBox 10"/>
+          <p:cNvSpPr txBox="1"/>
+          <p:nvPr/>
+        </p:nvSpPr>
+        <p:spPr>
+          <a:xfrm>
+            <a:off x="8503920" y="1874519"/>
+            <a:ext cx="2926080" cy="365760"/>
+          </a:xfrm>
+          <a:prstGeom prst="rect">
+            <a:avLst/>
+          </a:prstGeom>
+          <a:noFill/>
+        </p:spPr>
+        <p:txBody>
+          <a:bodyPr wrap="square" anchor="t" lIns="0" rIns="0" tIns="0" bIns="0"/>
+          <a:lstStyle/>
+          <a:p>
+            <a:pPr algn="l"/>
+            <a:r>
+              <a:rPr sz="1300" b="1" i="0">
+                <a:solidFill>
+                  <a:srgbClr val="A9C8F0"/>
+                </a:solidFill>
+                <a:latin typeface="Calibri"/>
+              </a:rPr>
+              <a:t>REVISE THIS TOPIC</a:t>
+            </a:r>
+          </a:p>
+        </p:txBody>
+      </p:sp>
+      <p:sp>
+        <p:nvSpPr>
+          <p:cNvPr id="12" name="TextBox 11"/>
+          <p:cNvSpPr txBox="1"/>
+          <p:nvPr/>
+        </p:nvSpPr>
+        <p:spPr>
+          <a:xfrm>
+            <a:off x="8503920" y="2286000"/>
+            <a:ext cx="2926080" cy="548640"/>
+          </a:xfrm>
+          <a:prstGeom prst="rect">
+            <a:avLst/>
+          </a:prstGeom>
+          <a:noFill/>
+        </p:spPr>
+        <p:txBody>
+          <a:bodyPr wrap="square" anchor="t" lIns="0" rIns="0" tIns="0" bIns="0"/>
+          <a:lstStyle/>
+          <a:p>
+            <a:pPr algn="l"/>
+            <a:r>
+              <a:rPr sz="1400" b="0" i="0">
+                <a:solidFill>
+                  <a:srgbClr val="FFFFFF"/>
+                </a:solidFill>
+                <a:latin typeface="Calibri"/>
+              </a:rPr>
+              <a:t>Revision notes for this lesson are on the study wiki:</a:t>
+            </a:r>
+          </a:p>
+        </p:txBody>
+      </p:sp>
+      <p:sp>
+        <p:nvSpPr>
+          <p:cNvPr id="13" name="TextBox 12"/>
+          <p:cNvSpPr txBox="1"/>
+          <p:nvPr/>
+        </p:nvSpPr>
+        <p:spPr>
+          <a:xfrm>
+            <a:off x="8503920" y="2926080"/>
+            <a:ext cx="2926080" cy="1463040"/>
+          </a:xfrm>
+          <a:prstGeom prst="rect">
+            <a:avLst/>
+          </a:prstGeom>
+          <a:noFill/>
+        </p:spPr>
+        <p:txBody>
+          <a:bodyPr wrap="square" anchor="t" lIns="0" rIns="0" tIns="0" bIns="0"/>
+          <a:lstStyle/>
+          <a:p>
+            <a:pPr algn="l"/>
+            <a:r>
+              <a:rPr sz="2000" b="1" i="0">
+                <a:solidFill>
+                  <a:srgbClr val="FFFFFF"/>
+                </a:solidFill>
+                <a:latin typeface="Cambria"/>
+              </a:rPr>
+              <a:t>Engineering Core, Part 2</a:t>
+            </a:r>
+          </a:p>
+        </p:txBody>
+      </p:sp>
+      <p:sp>
+        <p:nvSpPr>
+          <p:cNvPr id="14" name="TextBox 13"/>
+          <p:cNvSpPr txBox="1"/>
+          <p:nvPr/>
+        </p:nvSpPr>
+        <p:spPr>
+          <a:xfrm>
+            <a:off x="548640" y="5669280"/>
+            <a:ext cx="11094415" cy="548640"/>
+          </a:xfrm>
+          <a:prstGeom prst="rect">
+            <a:avLst/>
+          </a:prstGeom>
+          <a:noFill/>
+        </p:spPr>
+        <p:txBody>
+          <a:bodyPr wrap="square" anchor="t" lIns="0" rIns="0" tIns="0" bIns="0"/>
+          <a:lstStyle/>
+          <a:p>
+            <a:pPr algn="l"/>
+            <a:r>
+              <a:rPr sz="1200" b="0" i="0">
+                <a:solidFill>
+                  <a:srgbClr val="A9C8F0"/>
+                </a:solidFill>
+                <a:latin typeface="Calibri"/>
+              </a:rPr>
+              <a:t>https://lana6478.github.io/T-level-Design-Development-Engineering-Manufacturing/#/01-core-component/02-engineering-core-part2.md</a:t>
+            </a:r>
+          </a:p>
+        </p:txBody>
+      </p:sp>
+    </p:spTree>
+  </p:cSld>
+  <p:clrMapOvr>
+    <a:masterClrMapping/>
+  </p:clrMapOvr>
+</p:sld>
+</file>
+
 <file path=ppt/slides/slide2.xml><?xml version="1.0" encoding="utf-8"?>
 <p:sld xmlns:a="http://schemas.openxmlformats.org/drawingml/2006/main" xmlns:p="http://schemas.openxmlformats.org/presentationml/2006/main" xmlns:r="http://schemas.openxmlformats.org/officeDocument/2006/relationships">
   <p:cSld>
@@ -4912,20 +7435,93 @@
       </p:sp>
       <p:sp>
         <p:nvSpPr>
-          <p:cNvPr id="6" name="Rectangle 5"/>
+          <p:cNvPr id="6" name="TextBox 5"/>
+          <p:cNvSpPr txBox="1"/>
+          <p:nvPr/>
+        </p:nvSpPr>
+        <p:spPr>
+          <a:xfrm>
+            <a:off x="548640" y="1554480"/>
+            <a:ext cx="6720840" cy="4617720"/>
+          </a:xfrm>
+          <a:prstGeom prst="rect">
+            <a:avLst/>
+          </a:prstGeom>
+          <a:noFill/>
+        </p:spPr>
+        <p:txBody>
+          <a:bodyPr wrap="square" lIns="0" rIns="0" tIns="0" bIns="0">
+            <a:spAutoFit/>
+          </a:bodyPr>
+          <a:lstStyle/>
+          <a:p>
+            <a:pPr>
+              <a:spcAft>
+                <a:spcPts val="1260"/>
+              </a:spcAft>
+            </a:pPr>
+            <a:r>
+              <a:rPr sz="2100" b="0">
+                <a:solidFill>
+                  <a:srgbClr val="202122"/>
+                </a:solidFill>
+                <a:latin typeface="Calibri"/>
+              </a:rPr>
+              <a:t>Projects follow a life cycle. Initiation sets the brief, goals and success criteria. Planning works out resources, schedule and risks. Implementation does the work. Monitoring tracks progress against the plan. Reporting keeps stakeholders informed. Evaluation reviews what went well and what to improve.</a:t>
+            </a:r>
+          </a:p>
+          <a:p>
+            <a:pPr>
+              <a:spcAft>
+                <a:spcPts val="1260"/>
+              </a:spcAft>
+            </a:pPr>
+            <a:r>
+              <a:rPr sz="2100" b="0">
+                <a:solidFill>
+                  <a:srgbClr val="202122"/>
+                </a:solidFill>
+                <a:latin typeface="Calibri"/>
+              </a:rPr>
+              <a:t>Constraints include budget, cost, quality, time, safety, resources, communication, reputation and changing requirements. Risks are managed throughout.</a:t>
+            </a:r>
+          </a:p>
+          <a:p>
+            <a:pPr>
+              <a:spcAft>
+                <a:spcPts val="1260"/>
+              </a:spcAft>
+            </a:pPr>
+            <a:r>
+              <a:rPr sz="2100" b="0">
+                <a:solidFill>
+                  <a:srgbClr val="202122"/>
+                </a:solidFill>
+                <a:latin typeface="Calibri"/>
+              </a:rPr>
+              <a:t>Collaborative working, including matrix structures and shared digital tools, helps teams work together.</a:t>
+            </a:r>
+          </a:p>
+        </p:txBody>
+      </p:sp>
+      <p:sp>
+        <p:nvSpPr>
+          <p:cNvPr id="7" name="Rounded Rectangle 6"/>
           <p:cNvSpPr/>
           <p:nvPr/>
         </p:nvSpPr>
         <p:spPr>
           <a:xfrm>
-            <a:off x="1416024" y="2816352"/>
-            <a:ext cx="9359646" cy="36576"/>
-          </a:xfrm>
-          <a:prstGeom prst="rect">
-            <a:avLst/>
+            <a:off x="7772400" y="1554480"/>
+            <a:ext cx="3867912" cy="4526280"/>
+          </a:xfrm>
+          <a:prstGeom prst="roundRect">
+            <a:avLst>
+              <a:gd name="adj" fmla="val 8000"/>
+            </a:avLst>
           </a:prstGeom>
           <a:solidFill>
-            <a:srgbClr val="A9C8F0"/>
+            <a:srgbClr val="03306E"/>
           </a:solidFill>
           <a:ln>
             <a:noFill/>
@@ -4954,14 +7550,14 @@
       </p:sp>
       <p:sp>
         <p:nvSpPr>
-          <p:cNvPr id="7" name="Oval 6"/>
+          <p:cNvPr id="8" name="Oval 7"/>
           <p:cNvSpPr/>
           <p:nvPr/>
         </p:nvSpPr>
         <p:spPr>
           <a:xfrm>
-            <a:off x="1095984" y="2514600"/>
-            <a:ext cx="640080" cy="640080"/>
+            <a:off x="8046720" y="1828800"/>
+            <a:ext cx="548640" cy="548640"/>
           </a:xfrm>
           <a:prstGeom prst="ellipse">
             <a:avLst/>
@@ -4994,27 +7590,27 @@
           <a:p>
             <a:pPr algn="ctr"/>
             <a:r>
-              <a:rPr sz="2000" b="1">
+              <a:rPr sz="1300" b="1">
                 <a:solidFill>
                   <a:srgbClr val="202122"/>
                 </a:solidFill>
                 <a:latin typeface="Calibri"/>
               </a:rPr>
-              <a:t>1</a:t>
-            </a:r>
-          </a:p>
-        </p:txBody>
-      </p:sp>
-      <p:sp>
-        <p:nvSpPr>
-          <p:cNvPr id="8" name="TextBox 7"/>
+              <a:t>e.g.</a:t>
+            </a:r>
+          </a:p>
+        </p:txBody>
+      </p:sp>
+      <p:sp>
+        <p:nvSpPr>
+          <p:cNvPr id="9" name="TextBox 8"/>
           <p:cNvSpPr txBox="1"/>
           <p:nvPr/>
         </p:nvSpPr>
         <p:spPr>
           <a:xfrm>
-            <a:off x="548640" y="3291840"/>
-            <a:ext cx="1734769" cy="731520"/>
+            <a:off x="8046720" y="2560320"/>
+            <a:ext cx="3291840" cy="365760"/>
           </a:xfrm>
           <a:prstGeom prst="rect">
             <a:avLst/>
@@ -5025,61 +7621,17 @@
           <a:bodyPr wrap="square" anchor="t" lIns="0" rIns="0" tIns="0" bIns="0"/>
           <a:lstStyle/>
           <a:p>
-            <a:pPr algn="ctr"/>
-            <a:r>
-              <a:rPr sz="1700" b="1" i="0">
-                <a:solidFill>
-                  <a:srgbClr val="03306E"/>
-                </a:solidFill>
-                <a:latin typeface="Calibri"/>
-              </a:rPr>
-              <a:t>Initiate</a:t>
-            </a:r>
-          </a:p>
-        </p:txBody>
-      </p:sp>
-      <p:sp>
-        <p:nvSpPr>
-          <p:cNvPr id="9" name="Rounded Rectangle 8"/>
-          <p:cNvSpPr/>
-          <p:nvPr/>
-        </p:nvSpPr>
-        <p:spPr>
-          <a:xfrm>
-            <a:off x="548640" y="4069080"/>
-            <a:ext cx="1734769" cy="1188720"/>
-          </a:xfrm>
-          <a:prstGeom prst="roundRect">
-            <a:avLst>
-              <a:gd name="adj" fmla="val 6000"/>
-            </a:avLst>
-          </a:prstGeom>
-          <a:solidFill>
-            <a:srgbClr val="EAF3FF"/>
-          </a:solidFill>
-          <a:ln>
-            <a:noFill/>
-          </a:ln>
-          <a:effectLst/>
-        </p:spPr>
-        <p:style>
-          <a:lnRef idx="1">
-            <a:schemeClr val="accent1"/>
-          </a:lnRef>
-          <a:fillRef idx="3">
-            <a:schemeClr val="accent1"/>
-          </a:fillRef>
-          <a:effectRef idx="2">
-            <a:schemeClr val="accent1"/>
-          </a:effectRef>
-          <a:fontRef idx="minor">
-            <a:schemeClr val="lt1"/>
-          </a:fontRef>
-        </p:style>
-        <p:txBody>
-          <a:bodyPr rtlCol="0" anchor="ctr"/>
-          <a:lstStyle/>
-          <a:p/>
+            <a:pPr algn="l"/>
+            <a:r>
+              <a:rPr sz="1300" b="1" i="0">
+                <a:solidFill>
+                  <a:srgbClr val="A9C8F0"/>
+                </a:solidFill>
+                <a:latin typeface="Calibri"/>
+              </a:rPr>
+              <a:t>EXAMPLE</a:t>
+            </a:r>
+          </a:p>
         </p:txBody>
       </p:sp>
       <p:sp>
@@ -5090,8 +7642,8 @@
         </p:nvSpPr>
         <p:spPr>
           <a:xfrm>
-            <a:off x="685800" y="4206240"/>
-            <a:ext cx="1460449" cy="914400"/>
+            <a:off x="8046720" y="2971800"/>
+            <a:ext cx="3291840" cy="2971800"/>
           </a:xfrm>
           <a:prstGeom prst="rect">
             <a:avLst/>
@@ -5104,828 +7656,13 @@
           <a:p>
             <a:pPr algn="l"/>
             <a:r>
-              <a:rPr sz="1700" b="0" i="0">
-                <a:solidFill>
-                  <a:srgbClr val="202122"/>
-                </a:solidFill>
-                <a:latin typeface="Calibri"/>
-              </a:rPr>
-              <a:t>Brief, goals and success criteria.</a:t>
-            </a:r>
-          </a:p>
-        </p:txBody>
-      </p:sp>
-      <p:sp>
-        <p:nvSpPr>
-          <p:cNvPr id="11" name="Oval 10"/>
-          <p:cNvSpPr/>
-          <p:nvPr/>
-        </p:nvSpPr>
-        <p:spPr>
-          <a:xfrm>
-            <a:off x="2967913" y="2514600"/>
-            <a:ext cx="640080" cy="640080"/>
-          </a:xfrm>
-          <a:prstGeom prst="ellipse">
-            <a:avLst/>
-          </a:prstGeom>
-          <a:solidFill>
-            <a:srgbClr val="F2B705"/>
-          </a:solidFill>
-          <a:ln>
-            <a:noFill/>
-          </a:ln>
-          <a:effectLst/>
-        </p:spPr>
-        <p:style>
-          <a:lnRef idx="1">
-            <a:schemeClr val="accent1"/>
-          </a:lnRef>
-          <a:fillRef idx="3">
-            <a:schemeClr val="accent1"/>
-          </a:fillRef>
-          <a:effectRef idx="2">
-            <a:schemeClr val="accent1"/>
-          </a:effectRef>
-          <a:fontRef idx="minor">
-            <a:schemeClr val="lt1"/>
-          </a:fontRef>
-        </p:style>
-        <p:txBody>
-          <a:bodyPr rtlCol="0" anchor="ctr" lIns="0" rIns="0" tIns="0" bIns="0"/>
-          <a:lstStyle/>
-          <a:p>
-            <a:pPr algn="ctr"/>
-            <a:r>
-              <a:rPr sz="2000" b="1">
-                <a:solidFill>
-                  <a:srgbClr val="202122"/>
-                </a:solidFill>
-                <a:latin typeface="Calibri"/>
-              </a:rPr>
-              <a:t>2</a:t>
-            </a:r>
-          </a:p>
-        </p:txBody>
-      </p:sp>
-      <p:sp>
-        <p:nvSpPr>
-          <p:cNvPr id="12" name="TextBox 11"/>
-          <p:cNvSpPr txBox="1"/>
-          <p:nvPr/>
-        </p:nvSpPr>
-        <p:spPr>
-          <a:xfrm>
-            <a:off x="2420569" y="3291840"/>
-            <a:ext cx="1734769" cy="731520"/>
-          </a:xfrm>
-          <a:prstGeom prst="rect">
-            <a:avLst/>
-          </a:prstGeom>
-          <a:noFill/>
-        </p:spPr>
-        <p:txBody>
-          <a:bodyPr wrap="square" anchor="t" lIns="0" rIns="0" tIns="0" bIns="0"/>
-          <a:lstStyle/>
-          <a:p>
-            <a:pPr algn="ctr"/>
-            <a:r>
-              <a:rPr sz="1700" b="1" i="0">
-                <a:solidFill>
-                  <a:srgbClr val="03306E"/>
-                </a:solidFill>
-                <a:latin typeface="Calibri"/>
-              </a:rPr>
-              <a:t>Plan</a:t>
-            </a:r>
-          </a:p>
-        </p:txBody>
-      </p:sp>
-      <p:sp>
-        <p:nvSpPr>
-          <p:cNvPr id="13" name="Rounded Rectangle 12"/>
-          <p:cNvSpPr/>
-          <p:nvPr/>
-        </p:nvSpPr>
-        <p:spPr>
-          <a:xfrm>
-            <a:off x="2420569" y="4069080"/>
-            <a:ext cx="1734769" cy="1188720"/>
-          </a:xfrm>
-          <a:prstGeom prst="roundRect">
-            <a:avLst>
-              <a:gd name="adj" fmla="val 6000"/>
-            </a:avLst>
-          </a:prstGeom>
-          <a:solidFill>
-            <a:srgbClr val="EAF3FF"/>
-          </a:solidFill>
-          <a:ln>
-            <a:noFill/>
-          </a:ln>
-          <a:effectLst/>
-        </p:spPr>
-        <p:style>
-          <a:lnRef idx="1">
-            <a:schemeClr val="accent1"/>
-          </a:lnRef>
-          <a:fillRef idx="3">
-            <a:schemeClr val="accent1"/>
-          </a:fillRef>
-          <a:effectRef idx="2">
-            <a:schemeClr val="accent1"/>
-          </a:effectRef>
-          <a:fontRef idx="minor">
-            <a:schemeClr val="lt1"/>
-          </a:fontRef>
-        </p:style>
-        <p:txBody>
-          <a:bodyPr rtlCol="0" anchor="ctr"/>
-          <a:lstStyle/>
-          <a:p/>
-        </p:txBody>
-      </p:sp>
-      <p:sp>
-        <p:nvSpPr>
-          <p:cNvPr id="14" name="TextBox 13"/>
-          <p:cNvSpPr txBox="1"/>
-          <p:nvPr/>
-        </p:nvSpPr>
-        <p:spPr>
-          <a:xfrm>
-            <a:off x="2557729" y="4206240"/>
-            <a:ext cx="1460449" cy="914400"/>
-          </a:xfrm>
-          <a:prstGeom prst="rect">
-            <a:avLst/>
-          </a:prstGeom>
-          <a:noFill/>
-        </p:spPr>
-        <p:txBody>
-          <a:bodyPr wrap="square" anchor="t" lIns="0" rIns="0" tIns="0" bIns="0"/>
-          <a:lstStyle/>
-          <a:p>
-            <a:pPr algn="l"/>
-            <a:r>
-              <a:rPr sz="1700" b="0" i="0">
-                <a:solidFill>
-                  <a:srgbClr val="202122"/>
-                </a:solidFill>
-                <a:latin typeface="Calibri"/>
-              </a:rPr>
-              <a:t>Resources, schedule, risks.</a:t>
-            </a:r>
-          </a:p>
-        </p:txBody>
-      </p:sp>
-      <p:sp>
-        <p:nvSpPr>
-          <p:cNvPr id="15" name="Oval 14"/>
-          <p:cNvSpPr/>
-          <p:nvPr/>
-        </p:nvSpPr>
-        <p:spPr>
-          <a:xfrm>
-            <a:off x="4839843" y="2514600"/>
-            <a:ext cx="640080" cy="640080"/>
-          </a:xfrm>
-          <a:prstGeom prst="ellipse">
-            <a:avLst/>
-          </a:prstGeom>
-          <a:solidFill>
-            <a:srgbClr val="F2B705"/>
-          </a:solidFill>
-          <a:ln>
-            <a:noFill/>
-          </a:ln>
-          <a:effectLst/>
-        </p:spPr>
-        <p:style>
-          <a:lnRef idx="1">
-            <a:schemeClr val="accent1"/>
-          </a:lnRef>
-          <a:fillRef idx="3">
-            <a:schemeClr val="accent1"/>
-          </a:fillRef>
-          <a:effectRef idx="2">
-            <a:schemeClr val="accent1"/>
-          </a:effectRef>
-          <a:fontRef idx="minor">
-            <a:schemeClr val="lt1"/>
-          </a:fontRef>
-        </p:style>
-        <p:txBody>
-          <a:bodyPr rtlCol="0" anchor="ctr" lIns="0" rIns="0" tIns="0" bIns="0"/>
-          <a:lstStyle/>
-          <a:p>
-            <a:pPr algn="ctr"/>
-            <a:r>
-              <a:rPr sz="2000" b="1">
-                <a:solidFill>
-                  <a:srgbClr val="202122"/>
-                </a:solidFill>
-                <a:latin typeface="Calibri"/>
-              </a:rPr>
-              <a:t>3</a:t>
-            </a:r>
-          </a:p>
-        </p:txBody>
-      </p:sp>
-      <p:sp>
-        <p:nvSpPr>
-          <p:cNvPr id="16" name="TextBox 15"/>
-          <p:cNvSpPr txBox="1"/>
-          <p:nvPr/>
-        </p:nvSpPr>
-        <p:spPr>
-          <a:xfrm>
-            <a:off x="4292498" y="3291840"/>
-            <a:ext cx="1734769" cy="731520"/>
-          </a:xfrm>
-          <a:prstGeom prst="rect">
-            <a:avLst/>
-          </a:prstGeom>
-          <a:noFill/>
-        </p:spPr>
-        <p:txBody>
-          <a:bodyPr wrap="square" anchor="t" lIns="0" rIns="0" tIns="0" bIns="0"/>
-          <a:lstStyle/>
-          <a:p>
-            <a:pPr algn="ctr"/>
-            <a:r>
-              <a:rPr sz="1700" b="1" i="0">
-                <a:solidFill>
-                  <a:srgbClr val="03306E"/>
-                </a:solidFill>
-                <a:latin typeface="Calibri"/>
-              </a:rPr>
-              <a:t>Implement</a:t>
-            </a:r>
-          </a:p>
-        </p:txBody>
-      </p:sp>
-      <p:sp>
-        <p:nvSpPr>
-          <p:cNvPr id="17" name="Rounded Rectangle 16"/>
-          <p:cNvSpPr/>
-          <p:nvPr/>
-        </p:nvSpPr>
-        <p:spPr>
-          <a:xfrm>
-            <a:off x="4292498" y="4069080"/>
-            <a:ext cx="1734769" cy="1188720"/>
-          </a:xfrm>
-          <a:prstGeom prst="roundRect">
-            <a:avLst>
-              <a:gd name="adj" fmla="val 6000"/>
-            </a:avLst>
-          </a:prstGeom>
-          <a:solidFill>
-            <a:srgbClr val="EAF3FF"/>
-          </a:solidFill>
-          <a:ln>
-            <a:noFill/>
-          </a:ln>
-          <a:effectLst/>
-        </p:spPr>
-        <p:style>
-          <a:lnRef idx="1">
-            <a:schemeClr val="accent1"/>
-          </a:lnRef>
-          <a:fillRef idx="3">
-            <a:schemeClr val="accent1"/>
-          </a:fillRef>
-          <a:effectRef idx="2">
-            <a:schemeClr val="accent1"/>
-          </a:effectRef>
-          <a:fontRef idx="minor">
-            <a:schemeClr val="lt1"/>
-          </a:fontRef>
-        </p:style>
-        <p:txBody>
-          <a:bodyPr rtlCol="0" anchor="ctr"/>
-          <a:lstStyle/>
-          <a:p/>
-        </p:txBody>
-      </p:sp>
-      <p:sp>
-        <p:nvSpPr>
-          <p:cNvPr id="18" name="TextBox 17"/>
-          <p:cNvSpPr txBox="1"/>
-          <p:nvPr/>
-        </p:nvSpPr>
-        <p:spPr>
-          <a:xfrm>
-            <a:off x="4429658" y="4206240"/>
-            <a:ext cx="1460449" cy="914400"/>
-          </a:xfrm>
-          <a:prstGeom prst="rect">
-            <a:avLst/>
-          </a:prstGeom>
-          <a:noFill/>
-        </p:spPr>
-        <p:txBody>
-          <a:bodyPr wrap="square" anchor="t" lIns="0" rIns="0" tIns="0" bIns="0"/>
-          <a:lstStyle/>
-          <a:p>
-            <a:pPr algn="l"/>
-            <a:r>
-              <a:rPr sz="1700" b="0" i="0">
-                <a:solidFill>
-                  <a:srgbClr val="202122"/>
-                </a:solidFill>
-                <a:latin typeface="Calibri"/>
-              </a:rPr>
-              <a:t>Do the work.</a:t>
-            </a:r>
-          </a:p>
-        </p:txBody>
-      </p:sp>
-      <p:sp>
-        <p:nvSpPr>
-          <p:cNvPr id="19" name="Oval 18"/>
-          <p:cNvSpPr/>
-          <p:nvPr/>
-        </p:nvSpPr>
-        <p:spPr>
-          <a:xfrm>
-            <a:off x="6711772" y="2514600"/>
-            <a:ext cx="640080" cy="640080"/>
-          </a:xfrm>
-          <a:prstGeom prst="ellipse">
-            <a:avLst/>
-          </a:prstGeom>
-          <a:solidFill>
-            <a:srgbClr val="F2B705"/>
-          </a:solidFill>
-          <a:ln>
-            <a:noFill/>
-          </a:ln>
-          <a:effectLst/>
-        </p:spPr>
-        <p:style>
-          <a:lnRef idx="1">
-            <a:schemeClr val="accent1"/>
-          </a:lnRef>
-          <a:fillRef idx="3">
-            <a:schemeClr val="accent1"/>
-          </a:fillRef>
-          <a:effectRef idx="2">
-            <a:schemeClr val="accent1"/>
-          </a:effectRef>
-          <a:fontRef idx="minor">
-            <a:schemeClr val="lt1"/>
-          </a:fontRef>
-        </p:style>
-        <p:txBody>
-          <a:bodyPr rtlCol="0" anchor="ctr" lIns="0" rIns="0" tIns="0" bIns="0"/>
-          <a:lstStyle/>
-          <a:p>
-            <a:pPr algn="ctr"/>
-            <a:r>
-              <a:rPr sz="2000" b="1">
-                <a:solidFill>
-                  <a:srgbClr val="202122"/>
-                </a:solidFill>
-                <a:latin typeface="Calibri"/>
-              </a:rPr>
-              <a:t>4</a:t>
-            </a:r>
-          </a:p>
-        </p:txBody>
-      </p:sp>
-      <p:sp>
-        <p:nvSpPr>
-          <p:cNvPr id="20" name="TextBox 19"/>
-          <p:cNvSpPr txBox="1"/>
-          <p:nvPr/>
-        </p:nvSpPr>
-        <p:spPr>
-          <a:xfrm>
-            <a:off x="6164427" y="3291840"/>
-            <a:ext cx="1734769" cy="731520"/>
-          </a:xfrm>
-          <a:prstGeom prst="rect">
-            <a:avLst/>
-          </a:prstGeom>
-          <a:noFill/>
-        </p:spPr>
-        <p:txBody>
-          <a:bodyPr wrap="square" anchor="t" lIns="0" rIns="0" tIns="0" bIns="0"/>
-          <a:lstStyle/>
-          <a:p>
-            <a:pPr algn="ctr"/>
-            <a:r>
-              <a:rPr sz="1700" b="1" i="0">
-                <a:solidFill>
-                  <a:srgbClr val="03306E"/>
-                </a:solidFill>
-                <a:latin typeface="Calibri"/>
-              </a:rPr>
-              <a:t>Monitor</a:t>
-            </a:r>
-          </a:p>
-        </p:txBody>
-      </p:sp>
-      <p:sp>
-        <p:nvSpPr>
-          <p:cNvPr id="21" name="Rounded Rectangle 20"/>
-          <p:cNvSpPr/>
-          <p:nvPr/>
-        </p:nvSpPr>
-        <p:spPr>
-          <a:xfrm>
-            <a:off x="6164427" y="4069080"/>
-            <a:ext cx="1734769" cy="1188720"/>
-          </a:xfrm>
-          <a:prstGeom prst="roundRect">
-            <a:avLst>
-              <a:gd name="adj" fmla="val 6000"/>
-            </a:avLst>
-          </a:prstGeom>
-          <a:solidFill>
-            <a:srgbClr val="EAF3FF"/>
-          </a:solidFill>
-          <a:ln>
-            <a:noFill/>
-          </a:ln>
-          <a:effectLst/>
-        </p:spPr>
-        <p:style>
-          <a:lnRef idx="1">
-            <a:schemeClr val="accent1"/>
-          </a:lnRef>
-          <a:fillRef idx="3">
-            <a:schemeClr val="accent1"/>
-          </a:fillRef>
-          <a:effectRef idx="2">
-            <a:schemeClr val="accent1"/>
-          </a:effectRef>
-          <a:fontRef idx="minor">
-            <a:schemeClr val="lt1"/>
-          </a:fontRef>
-        </p:style>
-        <p:txBody>
-          <a:bodyPr rtlCol="0" anchor="ctr"/>
-          <a:lstStyle/>
-          <a:p/>
-        </p:txBody>
-      </p:sp>
-      <p:sp>
-        <p:nvSpPr>
-          <p:cNvPr id="22" name="TextBox 21"/>
-          <p:cNvSpPr txBox="1"/>
-          <p:nvPr/>
-        </p:nvSpPr>
-        <p:spPr>
-          <a:xfrm>
-            <a:off x="6301587" y="4206240"/>
-            <a:ext cx="1460449" cy="914400"/>
-          </a:xfrm>
-          <a:prstGeom prst="rect">
-            <a:avLst/>
-          </a:prstGeom>
-          <a:noFill/>
-        </p:spPr>
-        <p:txBody>
-          <a:bodyPr wrap="square" anchor="t" lIns="0" rIns="0" tIns="0" bIns="0"/>
-          <a:lstStyle/>
-          <a:p>
-            <a:pPr algn="l"/>
-            <a:r>
-              <a:rPr sz="1700" b="0" i="0">
-                <a:solidFill>
-                  <a:srgbClr val="202122"/>
-                </a:solidFill>
-                <a:latin typeface="Calibri"/>
-              </a:rPr>
-              <a:t>Track against the plan.</a:t>
-            </a:r>
-          </a:p>
-        </p:txBody>
-      </p:sp>
-      <p:sp>
-        <p:nvSpPr>
-          <p:cNvPr id="23" name="Oval 22"/>
-          <p:cNvSpPr/>
-          <p:nvPr/>
-        </p:nvSpPr>
-        <p:spPr>
-          <a:xfrm>
-            <a:off x="8583701" y="2514600"/>
-            <a:ext cx="640080" cy="640080"/>
-          </a:xfrm>
-          <a:prstGeom prst="ellipse">
-            <a:avLst/>
-          </a:prstGeom>
-          <a:solidFill>
-            <a:srgbClr val="F2B705"/>
-          </a:solidFill>
-          <a:ln>
-            <a:noFill/>
-          </a:ln>
-          <a:effectLst/>
-        </p:spPr>
-        <p:style>
-          <a:lnRef idx="1">
-            <a:schemeClr val="accent1"/>
-          </a:lnRef>
-          <a:fillRef idx="3">
-            <a:schemeClr val="accent1"/>
-          </a:fillRef>
-          <a:effectRef idx="2">
-            <a:schemeClr val="accent1"/>
-          </a:effectRef>
-          <a:fontRef idx="minor">
-            <a:schemeClr val="lt1"/>
-          </a:fontRef>
-        </p:style>
-        <p:txBody>
-          <a:bodyPr rtlCol="0" anchor="ctr" lIns="0" rIns="0" tIns="0" bIns="0"/>
-          <a:lstStyle/>
-          <a:p>
-            <a:pPr algn="ctr"/>
-            <a:r>
-              <a:rPr sz="2000" b="1">
-                <a:solidFill>
-                  <a:srgbClr val="202122"/>
-                </a:solidFill>
-                <a:latin typeface="Calibri"/>
-              </a:rPr>
-              <a:t>5</a:t>
-            </a:r>
-          </a:p>
-        </p:txBody>
-      </p:sp>
-      <p:sp>
-        <p:nvSpPr>
-          <p:cNvPr id="24" name="TextBox 23"/>
-          <p:cNvSpPr txBox="1"/>
-          <p:nvPr/>
-        </p:nvSpPr>
-        <p:spPr>
-          <a:xfrm>
-            <a:off x="8036356" y="3291840"/>
-            <a:ext cx="1734769" cy="731520"/>
-          </a:xfrm>
-          <a:prstGeom prst="rect">
-            <a:avLst/>
-          </a:prstGeom>
-          <a:noFill/>
-        </p:spPr>
-        <p:txBody>
-          <a:bodyPr wrap="square" anchor="t" lIns="0" rIns="0" tIns="0" bIns="0"/>
-          <a:lstStyle/>
-          <a:p>
-            <a:pPr algn="ctr"/>
-            <a:r>
-              <a:rPr sz="1700" b="1" i="0">
-                <a:solidFill>
-                  <a:srgbClr val="03306E"/>
-                </a:solidFill>
-                <a:latin typeface="Calibri"/>
-              </a:rPr>
-              <a:t>Report</a:t>
-            </a:r>
-          </a:p>
-        </p:txBody>
-      </p:sp>
-      <p:sp>
-        <p:nvSpPr>
-          <p:cNvPr id="25" name="Rounded Rectangle 24"/>
-          <p:cNvSpPr/>
-          <p:nvPr/>
-        </p:nvSpPr>
-        <p:spPr>
-          <a:xfrm>
-            <a:off x="8036356" y="4069080"/>
-            <a:ext cx="1734769" cy="1188720"/>
-          </a:xfrm>
-          <a:prstGeom prst="roundRect">
-            <a:avLst>
-              <a:gd name="adj" fmla="val 6000"/>
-            </a:avLst>
-          </a:prstGeom>
-          <a:solidFill>
-            <a:srgbClr val="EAF3FF"/>
-          </a:solidFill>
-          <a:ln>
-            <a:noFill/>
-          </a:ln>
-          <a:effectLst/>
-        </p:spPr>
-        <p:style>
-          <a:lnRef idx="1">
-            <a:schemeClr val="accent1"/>
-          </a:lnRef>
-          <a:fillRef idx="3">
-            <a:schemeClr val="accent1"/>
-          </a:fillRef>
-          <a:effectRef idx="2">
-            <a:schemeClr val="accent1"/>
-          </a:effectRef>
-          <a:fontRef idx="minor">
-            <a:schemeClr val="lt1"/>
-          </a:fontRef>
-        </p:style>
-        <p:txBody>
-          <a:bodyPr rtlCol="0" anchor="ctr"/>
-          <a:lstStyle/>
-          <a:p/>
-        </p:txBody>
-      </p:sp>
-      <p:sp>
-        <p:nvSpPr>
-          <p:cNvPr id="26" name="TextBox 25"/>
-          <p:cNvSpPr txBox="1"/>
-          <p:nvPr/>
-        </p:nvSpPr>
-        <p:spPr>
-          <a:xfrm>
-            <a:off x="8173516" y="4206240"/>
-            <a:ext cx="1460449" cy="914400"/>
-          </a:xfrm>
-          <a:prstGeom prst="rect">
-            <a:avLst/>
-          </a:prstGeom>
-          <a:noFill/>
-        </p:spPr>
-        <p:txBody>
-          <a:bodyPr wrap="square" anchor="t" lIns="0" rIns="0" tIns="0" bIns="0"/>
-          <a:lstStyle/>
-          <a:p>
-            <a:pPr algn="l"/>
-            <a:r>
-              <a:rPr sz="1700" b="0" i="0">
-                <a:solidFill>
-                  <a:srgbClr val="202122"/>
-                </a:solidFill>
-                <a:latin typeface="Calibri"/>
-              </a:rPr>
-              <a:t>Keep stakeholders informed.</a:t>
-            </a:r>
-          </a:p>
-        </p:txBody>
-      </p:sp>
-      <p:sp>
-        <p:nvSpPr>
-          <p:cNvPr id="27" name="Oval 26"/>
-          <p:cNvSpPr/>
-          <p:nvPr/>
-        </p:nvSpPr>
-        <p:spPr>
-          <a:xfrm>
-            <a:off x="10455630" y="2514600"/>
-            <a:ext cx="640080" cy="640080"/>
-          </a:xfrm>
-          <a:prstGeom prst="ellipse">
-            <a:avLst/>
-          </a:prstGeom>
-          <a:solidFill>
-            <a:srgbClr val="F2B705"/>
-          </a:solidFill>
-          <a:ln>
-            <a:noFill/>
-          </a:ln>
-          <a:effectLst/>
-        </p:spPr>
-        <p:style>
-          <a:lnRef idx="1">
-            <a:schemeClr val="accent1"/>
-          </a:lnRef>
-          <a:fillRef idx="3">
-            <a:schemeClr val="accent1"/>
-          </a:fillRef>
-          <a:effectRef idx="2">
-            <a:schemeClr val="accent1"/>
-          </a:effectRef>
-          <a:fontRef idx="minor">
-            <a:schemeClr val="lt1"/>
-          </a:fontRef>
-        </p:style>
-        <p:txBody>
-          <a:bodyPr rtlCol="0" anchor="ctr" lIns="0" rIns="0" tIns="0" bIns="0"/>
-          <a:lstStyle/>
-          <a:p>
-            <a:pPr algn="ctr"/>
-            <a:r>
-              <a:rPr sz="2000" b="1">
-                <a:solidFill>
-                  <a:srgbClr val="202122"/>
-                </a:solidFill>
-                <a:latin typeface="Calibri"/>
-              </a:rPr>
-              <a:t>6</a:t>
-            </a:r>
-          </a:p>
-        </p:txBody>
-      </p:sp>
-      <p:sp>
-        <p:nvSpPr>
-          <p:cNvPr id="28" name="TextBox 27"/>
-          <p:cNvSpPr txBox="1"/>
-          <p:nvPr/>
-        </p:nvSpPr>
-        <p:spPr>
-          <a:xfrm>
-            <a:off x="9908286" y="3291840"/>
-            <a:ext cx="1734769" cy="731520"/>
-          </a:xfrm>
-          <a:prstGeom prst="rect">
-            <a:avLst/>
-          </a:prstGeom>
-          <a:noFill/>
-        </p:spPr>
-        <p:txBody>
-          <a:bodyPr wrap="square" anchor="t" lIns="0" rIns="0" tIns="0" bIns="0"/>
-          <a:lstStyle/>
-          <a:p>
-            <a:pPr algn="ctr"/>
-            <a:r>
-              <a:rPr sz="1700" b="1" i="0">
-                <a:solidFill>
-                  <a:srgbClr val="03306E"/>
-                </a:solidFill>
-                <a:latin typeface="Calibri"/>
-              </a:rPr>
-              <a:t>Evaluate</a:t>
-            </a:r>
-          </a:p>
-        </p:txBody>
-      </p:sp>
-      <p:sp>
-        <p:nvSpPr>
-          <p:cNvPr id="29" name="Rounded Rectangle 28"/>
-          <p:cNvSpPr/>
-          <p:nvPr/>
-        </p:nvSpPr>
-        <p:spPr>
-          <a:xfrm>
-            <a:off x="9908286" y="4069080"/>
-            <a:ext cx="1734769" cy="1188720"/>
-          </a:xfrm>
-          <a:prstGeom prst="roundRect">
-            <a:avLst>
-              <a:gd name="adj" fmla="val 6000"/>
-            </a:avLst>
-          </a:prstGeom>
-          <a:solidFill>
-            <a:srgbClr val="EAF3FF"/>
-          </a:solidFill>
-          <a:ln>
-            <a:noFill/>
-          </a:ln>
-          <a:effectLst/>
-        </p:spPr>
-        <p:style>
-          <a:lnRef idx="1">
-            <a:schemeClr val="accent1"/>
-          </a:lnRef>
-          <a:fillRef idx="3">
-            <a:schemeClr val="accent1"/>
-          </a:fillRef>
-          <a:effectRef idx="2">
-            <a:schemeClr val="accent1"/>
-          </a:effectRef>
-          <a:fontRef idx="minor">
-            <a:schemeClr val="lt1"/>
-          </a:fontRef>
-        </p:style>
-        <p:txBody>
-          <a:bodyPr rtlCol="0" anchor="ctr"/>
-          <a:lstStyle/>
-          <a:p/>
-        </p:txBody>
-      </p:sp>
-      <p:sp>
-        <p:nvSpPr>
-          <p:cNvPr id="30" name="TextBox 29"/>
-          <p:cNvSpPr txBox="1"/>
-          <p:nvPr/>
-        </p:nvSpPr>
-        <p:spPr>
-          <a:xfrm>
-            <a:off x="10045446" y="4206240"/>
-            <a:ext cx="1460449" cy="914400"/>
-          </a:xfrm>
-          <a:prstGeom prst="rect">
-            <a:avLst/>
-          </a:prstGeom>
-          <a:noFill/>
-        </p:spPr>
-        <p:txBody>
-          <a:bodyPr wrap="square" anchor="t" lIns="0" rIns="0" tIns="0" bIns="0"/>
-          <a:lstStyle/>
-          <a:p>
-            <a:pPr algn="l"/>
-            <a:r>
-              <a:rPr sz="1700" b="0" i="0">
-                <a:solidFill>
-                  <a:srgbClr val="202122"/>
-                </a:solidFill>
-                <a:latin typeface="Calibri"/>
-              </a:rPr>
-              <a:t>Review and learn.</a:t>
+              <a:rPr sz="1900" b="0" i="0">
+                <a:solidFill>
+                  <a:srgbClr val="FFFFFF"/>
+                </a:solidFill>
+                <a:latin typeface="Cambria"/>
+              </a:rPr>
+              <a:t>Designing a new jig: the brief sets the target cycle time, the plan schedules design, manufacture and testing, and the evaluation records lessons for the next jig.</a:t>
             </a:r>
           </a:p>
         </p:txBody>
@@ -6017,7 +7754,7 @@
                 </a:solidFill>
                 <a:latin typeface="Cambria"/>
               </a:rPr>
-              <a:t>Roles</a:t>
+              <a:t>The project life cycle</a:t>
             </a:r>
           </a:p>
         </p:txBody>
@@ -6090,14 +7827,142 @@
       </p:sp>
       <p:sp>
         <p:nvSpPr>
-          <p:cNvPr id="6" name="Rounded Rectangle 5"/>
+          <p:cNvPr id="6" name="Rectangle 5"/>
           <p:cNvSpPr/>
           <p:nvPr/>
         </p:nvSpPr>
         <p:spPr>
           <a:xfrm>
-            <a:off x="548640" y="1600200"/>
-            <a:ext cx="5410047" cy="2148840"/>
+            <a:off x="1416024" y="2816352"/>
+            <a:ext cx="9359646" cy="36576"/>
+          </a:xfrm>
+          <a:prstGeom prst="rect">
+            <a:avLst/>
+          </a:prstGeom>
+          <a:solidFill>
+            <a:srgbClr val="A9C8F0"/>
+          </a:solidFill>
+          <a:ln>
+            <a:noFill/>
+          </a:ln>
+          <a:effectLst/>
+        </p:spPr>
+        <p:style>
+          <a:lnRef idx="1">
+            <a:schemeClr val="accent1"/>
+          </a:lnRef>
+          <a:fillRef idx="3">
+            <a:schemeClr val="accent1"/>
+          </a:fillRef>
+          <a:effectRef idx="2">
+            <a:schemeClr val="accent1"/>
+          </a:effectRef>
+          <a:fontRef idx="minor">
+            <a:schemeClr val="lt1"/>
+          </a:fontRef>
+        </p:style>
+        <p:txBody>
+          <a:bodyPr rtlCol="0" anchor="ctr"/>
+          <a:lstStyle/>
+          <a:p/>
+        </p:txBody>
+      </p:sp>
+      <p:sp>
+        <p:nvSpPr>
+          <p:cNvPr id="7" name="Oval 6"/>
+          <p:cNvSpPr/>
+          <p:nvPr/>
+        </p:nvSpPr>
+        <p:spPr>
+          <a:xfrm>
+            <a:off x="1095984" y="2514600"/>
+            <a:ext cx="640080" cy="640080"/>
+          </a:xfrm>
+          <a:prstGeom prst="ellipse">
+            <a:avLst/>
+          </a:prstGeom>
+          <a:solidFill>
+            <a:srgbClr val="F2B705"/>
+          </a:solidFill>
+          <a:ln>
+            <a:noFill/>
+          </a:ln>
+          <a:effectLst/>
+        </p:spPr>
+        <p:style>
+          <a:lnRef idx="1">
+            <a:schemeClr val="accent1"/>
+          </a:lnRef>
+          <a:fillRef idx="3">
+            <a:schemeClr val="accent1"/>
+          </a:fillRef>
+          <a:effectRef idx="2">
+            <a:schemeClr val="accent1"/>
+          </a:effectRef>
+          <a:fontRef idx="minor">
+            <a:schemeClr val="lt1"/>
+          </a:fontRef>
+        </p:style>
+        <p:txBody>
+          <a:bodyPr rtlCol="0" anchor="ctr" lIns="0" rIns="0" tIns="0" bIns="0"/>
+          <a:lstStyle/>
+          <a:p>
+            <a:pPr algn="ctr"/>
+            <a:r>
+              <a:rPr sz="2000" b="1">
+                <a:solidFill>
+                  <a:srgbClr val="202122"/>
+                </a:solidFill>
+                <a:latin typeface="Calibri"/>
+              </a:rPr>
+              <a:t>1</a:t>
+            </a:r>
+          </a:p>
+        </p:txBody>
+      </p:sp>
+      <p:sp>
+        <p:nvSpPr>
+          <p:cNvPr id="8" name="TextBox 7"/>
+          <p:cNvSpPr txBox="1"/>
+          <p:nvPr/>
+        </p:nvSpPr>
+        <p:spPr>
+          <a:xfrm>
+            <a:off x="548640" y="3291840"/>
+            <a:ext cx="1734769" cy="731520"/>
+          </a:xfrm>
+          <a:prstGeom prst="rect">
+            <a:avLst/>
+          </a:prstGeom>
+          <a:noFill/>
+        </p:spPr>
+        <p:txBody>
+          <a:bodyPr wrap="square" anchor="t" lIns="0" rIns="0" tIns="0" bIns="0"/>
+          <a:lstStyle/>
+          <a:p>
+            <a:pPr algn="ctr"/>
+            <a:r>
+              <a:rPr sz="1700" b="1" i="0">
+                <a:solidFill>
+                  <a:srgbClr val="03306E"/>
+                </a:solidFill>
+                <a:latin typeface="Calibri"/>
+              </a:rPr>
+              <a:t>Initiate</a:t>
+            </a:r>
+          </a:p>
+        </p:txBody>
+      </p:sp>
+      <p:sp>
+        <p:nvSpPr>
+          <p:cNvPr id="9" name="Rounded Rectangle 8"/>
+          <p:cNvSpPr/>
+          <p:nvPr/>
+        </p:nvSpPr>
+        <p:spPr>
+          <a:xfrm>
+            <a:off x="548640" y="4069080"/>
+            <a:ext cx="1734769" cy="1188720"/>
           </a:xfrm>
           <a:prstGeom prst="roundRect">
             <a:avLst>
@@ -6134,14 +7999,47 @@
       </p:sp>
       <p:sp>
         <p:nvSpPr>
-          <p:cNvPr id="7" name="Oval 6"/>
+          <p:cNvPr id="10" name="TextBox 9"/>
+          <p:cNvSpPr txBox="1"/>
+          <p:nvPr/>
+        </p:nvSpPr>
+        <p:spPr>
+          <a:xfrm>
+            <a:off x="685800" y="4206240"/>
+            <a:ext cx="1460449" cy="914400"/>
+          </a:xfrm>
+          <a:prstGeom prst="rect">
+            <a:avLst/>
+          </a:prstGeom>
+          <a:noFill/>
+        </p:spPr>
+        <p:txBody>
+          <a:bodyPr wrap="square" anchor="t" lIns="0" rIns="0" tIns="0" bIns="0"/>
+          <a:lstStyle/>
+          <a:p>
+            <a:pPr algn="l"/>
+            <a:r>
+              <a:rPr sz="1700" b="0" i="0">
+                <a:solidFill>
+                  <a:srgbClr val="202122"/>
+                </a:solidFill>
+                <a:latin typeface="Calibri"/>
+              </a:rPr>
+              <a:t>Brief, goals and success criteria.</a:t>
+            </a:r>
+          </a:p>
+        </p:txBody>
+      </p:sp>
+      <p:sp>
+        <p:nvSpPr>
+          <p:cNvPr id="11" name="Oval 10"/>
           <p:cNvSpPr/>
           <p:nvPr/>
         </p:nvSpPr>
         <p:spPr>
           <a:xfrm>
-            <a:off x="777240" y="1828800"/>
-            <a:ext cx="457200" cy="457200"/>
+            <a:off x="2967913" y="2514600"/>
+            <a:ext cx="640080" cy="640080"/>
           </a:xfrm>
           <a:prstGeom prst="ellipse">
             <a:avLst/>
@@ -6174,27 +8072,27 @@
           <a:p>
             <a:pPr algn="ctr"/>
             <a:r>
-              <a:rPr sz="1500" b="1">
+              <a:rPr sz="2000" b="1">
                 <a:solidFill>
                   <a:srgbClr val="202122"/>
                 </a:solidFill>
                 <a:latin typeface="Calibri"/>
               </a:rPr>
-              <a:t>1</a:t>
-            </a:r>
-          </a:p>
-        </p:txBody>
-      </p:sp>
-      <p:sp>
-        <p:nvSpPr>
-          <p:cNvPr id="8" name="TextBox 7"/>
+              <a:t>2</a:t>
+            </a:r>
+          </a:p>
+        </p:txBody>
+      </p:sp>
+      <p:sp>
+        <p:nvSpPr>
+          <p:cNvPr id="12" name="TextBox 11"/>
           <p:cNvSpPr txBox="1"/>
           <p:nvPr/>
         </p:nvSpPr>
         <p:spPr>
           <a:xfrm>
-            <a:off x="1371600" y="1801368"/>
-            <a:ext cx="4404207" cy="512064"/>
+            <a:off x="2420569" y="3291840"/>
+            <a:ext cx="1734769" cy="731520"/>
           </a:xfrm>
           <a:prstGeom prst="rect">
             <a:avLst/>
@@ -6202,65 +8100,32 @@
           <a:noFill/>
         </p:spPr>
         <p:txBody>
-          <a:bodyPr wrap="square" anchor="ctr" lIns="0" rIns="0" tIns="0" bIns="0"/>
-          <a:lstStyle/>
-          <a:p>
-            <a:pPr algn="l"/>
-            <a:r>
-              <a:rPr sz="1900" b="1" i="0">
+          <a:bodyPr wrap="square" anchor="t" lIns="0" rIns="0" tIns="0" bIns="0"/>
+          <a:lstStyle/>
+          <a:p>
+            <a:pPr algn="ctr"/>
+            <a:r>
+              <a:rPr sz="1700" b="1" i="0">
                 <a:solidFill>
                   <a:srgbClr val="03306E"/>
                 </a:solidFill>
                 <a:latin typeface="Calibri"/>
               </a:rPr>
-              <a:t>Stakeholders</a:t>
-            </a:r>
-          </a:p>
-        </p:txBody>
-      </p:sp>
-      <p:sp>
-        <p:nvSpPr>
-          <p:cNvPr id="9" name="TextBox 8"/>
-          <p:cNvSpPr txBox="1"/>
-          <p:nvPr/>
-        </p:nvSpPr>
-        <p:spPr>
-          <a:xfrm>
-            <a:off x="777240" y="2468880"/>
-            <a:ext cx="4952847" cy="1143000"/>
-          </a:xfrm>
-          <a:prstGeom prst="rect">
-            <a:avLst/>
-          </a:prstGeom>
-          <a:noFill/>
-        </p:spPr>
-        <p:txBody>
-          <a:bodyPr wrap="square" anchor="t" lIns="0" rIns="0" tIns="0" bIns="0"/>
-          <a:lstStyle/>
-          <a:p>
-            <a:pPr algn="l"/>
-            <a:r>
-              <a:rPr sz="2000" b="0" i="0">
-                <a:solidFill>
-                  <a:srgbClr val="202122"/>
-                </a:solidFill>
-                <a:latin typeface="Calibri"/>
-              </a:rPr>
-              <a:t>Clients, regulators and others with an interest.</a:t>
-            </a:r>
-          </a:p>
-        </p:txBody>
-      </p:sp>
-      <p:sp>
-        <p:nvSpPr>
-          <p:cNvPr id="10" name="Rounded Rectangle 9"/>
+              <a:t>Plan</a:t>
+            </a:r>
+          </a:p>
+        </p:txBody>
+      </p:sp>
+      <p:sp>
+        <p:nvSpPr>
+          <p:cNvPr id="13" name="Rounded Rectangle 12"/>
           <p:cNvSpPr/>
           <p:nvPr/>
         </p:nvSpPr>
         <p:spPr>
           <a:xfrm>
-            <a:off x="6233007" y="1600200"/>
-            <a:ext cx="5410047" cy="2148840"/>
+            <a:off x="2420569" y="4069080"/>
+            <a:ext cx="1734769" cy="1188720"/>
           </a:xfrm>
           <a:prstGeom prst="roundRect">
             <a:avLst>
@@ -6297,14 +8162,47 @@
       </p:sp>
       <p:sp>
         <p:nvSpPr>
-          <p:cNvPr id="11" name="Oval 10"/>
+          <p:cNvPr id="14" name="TextBox 13"/>
+          <p:cNvSpPr txBox="1"/>
+          <p:nvPr/>
+        </p:nvSpPr>
+        <p:spPr>
+          <a:xfrm>
+            <a:off x="2557729" y="4206240"/>
+            <a:ext cx="1460449" cy="914400"/>
+          </a:xfrm>
+          <a:prstGeom prst="rect">
+            <a:avLst/>
+          </a:prstGeom>
+          <a:noFill/>
+        </p:spPr>
+        <p:txBody>
+          <a:bodyPr wrap="square" anchor="t" lIns="0" rIns="0" tIns="0" bIns="0"/>
+          <a:lstStyle/>
+          <a:p>
+            <a:pPr algn="l"/>
+            <a:r>
+              <a:rPr sz="1700" b="0" i="0">
+                <a:solidFill>
+                  <a:srgbClr val="202122"/>
+                </a:solidFill>
+                <a:latin typeface="Calibri"/>
+              </a:rPr>
+              <a:t>Resources, schedule, risks.</a:t>
+            </a:r>
+          </a:p>
+        </p:txBody>
+      </p:sp>
+      <p:sp>
+        <p:nvSpPr>
+          <p:cNvPr id="15" name="Oval 14"/>
           <p:cNvSpPr/>
           <p:nvPr/>
         </p:nvSpPr>
         <p:spPr>
           <a:xfrm>
-            <a:off x="6461607" y="1828800"/>
-            <a:ext cx="457200" cy="457200"/>
+            <a:off x="4839843" y="2514600"/>
+            <a:ext cx="640080" cy="640080"/>
           </a:xfrm>
           <a:prstGeom prst="ellipse">
             <a:avLst/>
@@ -6337,27 +8235,27 @@
           <a:p>
             <a:pPr algn="ctr"/>
             <a:r>
-              <a:rPr sz="1500" b="1">
+              <a:rPr sz="2000" b="1">
                 <a:solidFill>
                   <a:srgbClr val="202122"/>
                 </a:solidFill>
                 <a:latin typeface="Calibri"/>
               </a:rPr>
-              <a:t>2</a:t>
-            </a:r>
-          </a:p>
-        </p:txBody>
-      </p:sp>
-      <p:sp>
-        <p:nvSpPr>
-          <p:cNvPr id="12" name="TextBox 11"/>
+              <a:t>3</a:t>
+            </a:r>
+          </a:p>
+        </p:txBody>
+      </p:sp>
+      <p:sp>
+        <p:nvSpPr>
+          <p:cNvPr id="16" name="TextBox 15"/>
           <p:cNvSpPr txBox="1"/>
           <p:nvPr/>
         </p:nvSpPr>
         <p:spPr>
           <a:xfrm>
-            <a:off x="7055967" y="1801368"/>
-            <a:ext cx="4404207" cy="512064"/>
+            <a:off x="4292498" y="3291840"/>
+            <a:ext cx="1734769" cy="731520"/>
           </a:xfrm>
           <a:prstGeom prst="rect">
             <a:avLst/>
@@ -6365,65 +8263,32 @@
           <a:noFill/>
         </p:spPr>
         <p:txBody>
-          <a:bodyPr wrap="square" anchor="ctr" lIns="0" rIns="0" tIns="0" bIns="0"/>
-          <a:lstStyle/>
-          <a:p>
-            <a:pPr algn="l"/>
-            <a:r>
-              <a:rPr sz="1900" b="1" i="0">
+          <a:bodyPr wrap="square" anchor="t" lIns="0" rIns="0" tIns="0" bIns="0"/>
+          <a:lstStyle/>
+          <a:p>
+            <a:pPr algn="ctr"/>
+            <a:r>
+              <a:rPr sz="1700" b="1" i="0">
                 <a:solidFill>
                   <a:srgbClr val="03306E"/>
                 </a:solidFill>
                 <a:latin typeface="Calibri"/>
               </a:rPr>
-              <a:t>Project manager</a:t>
-            </a:r>
-          </a:p>
-        </p:txBody>
-      </p:sp>
-      <p:sp>
-        <p:nvSpPr>
-          <p:cNvPr id="13" name="TextBox 12"/>
-          <p:cNvSpPr txBox="1"/>
-          <p:nvPr/>
-        </p:nvSpPr>
-        <p:spPr>
-          <a:xfrm>
-            <a:off x="6461607" y="2468880"/>
-            <a:ext cx="4952847" cy="1143000"/>
-          </a:xfrm>
-          <a:prstGeom prst="rect">
-            <a:avLst/>
-          </a:prstGeom>
-          <a:noFill/>
-        </p:spPr>
-        <p:txBody>
-          <a:bodyPr wrap="square" anchor="t" lIns="0" rIns="0" tIns="0" bIns="0"/>
-          <a:lstStyle/>
-          <a:p>
-            <a:pPr algn="l"/>
-            <a:r>
-              <a:rPr sz="2000" b="0" i="0">
-                <a:solidFill>
-                  <a:srgbClr val="202122"/>
-                </a:solidFill>
-                <a:latin typeface="Calibri"/>
-              </a:rPr>
-              <a:t>Plans, monitors and controls the project.</a:t>
-            </a:r>
-          </a:p>
-        </p:txBody>
-      </p:sp>
-      <p:sp>
-        <p:nvSpPr>
-          <p:cNvPr id="14" name="Rounded Rectangle 13"/>
+              <a:t>Implement</a:t>
+            </a:r>
+          </a:p>
+        </p:txBody>
+      </p:sp>
+      <p:sp>
+        <p:nvSpPr>
+          <p:cNvPr id="17" name="Rounded Rectangle 16"/>
           <p:cNvSpPr/>
           <p:nvPr/>
         </p:nvSpPr>
         <p:spPr>
           <a:xfrm>
-            <a:off x="548640" y="4023360"/>
-            <a:ext cx="5410047" cy="2148840"/>
+            <a:off x="4292498" y="4069080"/>
+            <a:ext cx="1734769" cy="1188720"/>
           </a:xfrm>
           <a:prstGeom prst="roundRect">
             <a:avLst>
@@ -6460,14 +8325,47 @@
       </p:sp>
       <p:sp>
         <p:nvSpPr>
-          <p:cNvPr id="15" name="Oval 14"/>
+          <p:cNvPr id="18" name="TextBox 17"/>
+          <p:cNvSpPr txBox="1"/>
+          <p:nvPr/>
+        </p:nvSpPr>
+        <p:spPr>
+          <a:xfrm>
+            <a:off x="4429658" y="4206240"/>
+            <a:ext cx="1460449" cy="914400"/>
+          </a:xfrm>
+          <a:prstGeom prst="rect">
+            <a:avLst/>
+          </a:prstGeom>
+          <a:noFill/>
+        </p:spPr>
+        <p:txBody>
+          <a:bodyPr wrap="square" anchor="t" lIns="0" rIns="0" tIns="0" bIns="0"/>
+          <a:lstStyle/>
+          <a:p>
+            <a:pPr algn="l"/>
+            <a:r>
+              <a:rPr sz="1700" b="0" i="0">
+                <a:solidFill>
+                  <a:srgbClr val="202122"/>
+                </a:solidFill>
+                <a:latin typeface="Calibri"/>
+              </a:rPr>
+              <a:t>Do the work.</a:t>
+            </a:r>
+          </a:p>
+        </p:txBody>
+      </p:sp>
+      <p:sp>
+        <p:nvSpPr>
+          <p:cNvPr id="19" name="Oval 18"/>
           <p:cNvSpPr/>
           <p:nvPr/>
         </p:nvSpPr>
         <p:spPr>
           <a:xfrm>
-            <a:off x="777240" y="4251960"/>
-            <a:ext cx="457200" cy="457200"/>
+            <a:off x="6711772" y="2514600"/>
+            <a:ext cx="640080" cy="640080"/>
           </a:xfrm>
           <a:prstGeom prst="ellipse">
             <a:avLst/>
@@ -6500,27 +8398,27 @@
           <a:p>
             <a:pPr algn="ctr"/>
             <a:r>
-              <a:rPr sz="1500" b="1">
+              <a:rPr sz="2000" b="1">
                 <a:solidFill>
                   <a:srgbClr val="202122"/>
                 </a:solidFill>
                 <a:latin typeface="Calibri"/>
               </a:rPr>
-              <a:t>3</a:t>
-            </a:r>
-          </a:p>
-        </p:txBody>
-      </p:sp>
-      <p:sp>
-        <p:nvSpPr>
-          <p:cNvPr id="16" name="TextBox 15"/>
+              <a:t>4</a:t>
+            </a:r>
+          </a:p>
+        </p:txBody>
+      </p:sp>
+      <p:sp>
+        <p:nvSpPr>
+          <p:cNvPr id="20" name="TextBox 19"/>
           <p:cNvSpPr txBox="1"/>
           <p:nvPr/>
         </p:nvSpPr>
         <p:spPr>
           <a:xfrm>
-            <a:off x="1371600" y="4224528"/>
-            <a:ext cx="4404207" cy="512064"/>
+            <a:off x="6164427" y="3291840"/>
+            <a:ext cx="1734769" cy="731520"/>
           </a:xfrm>
           <a:prstGeom prst="rect">
             <a:avLst/>
@@ -6528,65 +8426,32 @@
           <a:noFill/>
         </p:spPr>
         <p:txBody>
-          <a:bodyPr wrap="square" anchor="ctr" lIns="0" rIns="0" tIns="0" bIns="0"/>
-          <a:lstStyle/>
-          <a:p>
-            <a:pPr algn="l"/>
-            <a:r>
-              <a:rPr sz="1900" b="1" i="0">
+          <a:bodyPr wrap="square" anchor="t" lIns="0" rIns="0" tIns="0" bIns="0"/>
+          <a:lstStyle/>
+          <a:p>
+            <a:pPr algn="ctr"/>
+            <a:r>
+              <a:rPr sz="1700" b="1" i="0">
                 <a:solidFill>
                   <a:srgbClr val="03306E"/>
                 </a:solidFill>
                 <a:latin typeface="Calibri"/>
               </a:rPr>
-              <a:t>Team members</a:t>
-            </a:r>
-          </a:p>
-        </p:txBody>
-      </p:sp>
-      <p:sp>
-        <p:nvSpPr>
-          <p:cNvPr id="17" name="TextBox 16"/>
-          <p:cNvSpPr txBox="1"/>
-          <p:nvPr/>
-        </p:nvSpPr>
-        <p:spPr>
-          <a:xfrm>
-            <a:off x="777240" y="4892040"/>
-            <a:ext cx="4952847" cy="1143000"/>
-          </a:xfrm>
-          <a:prstGeom prst="rect">
-            <a:avLst/>
-          </a:prstGeom>
-          <a:noFill/>
-        </p:spPr>
-        <p:txBody>
-          <a:bodyPr wrap="square" anchor="t" lIns="0" rIns="0" tIns="0" bIns="0"/>
-          <a:lstStyle/>
-          <a:p>
-            <a:pPr algn="l"/>
-            <a:r>
-              <a:rPr sz="2000" b="0" i="0">
-                <a:solidFill>
-                  <a:srgbClr val="202122"/>
-                </a:solidFill>
-                <a:latin typeface="Calibri"/>
-              </a:rPr>
-              <a:t>Deliver the tasks and report progress.</a:t>
-            </a:r>
-          </a:p>
-        </p:txBody>
-      </p:sp>
-      <p:sp>
-        <p:nvSpPr>
-          <p:cNvPr id="18" name="Rounded Rectangle 17"/>
+              <a:t>Monitor</a:t>
+            </a:r>
+          </a:p>
+        </p:txBody>
+      </p:sp>
+      <p:sp>
+        <p:nvSpPr>
+          <p:cNvPr id="21" name="Rounded Rectangle 20"/>
           <p:cNvSpPr/>
           <p:nvPr/>
         </p:nvSpPr>
         <p:spPr>
           <a:xfrm>
-            <a:off x="6233007" y="4023360"/>
-            <a:ext cx="5410047" cy="2148840"/>
+            <a:off x="6164427" y="4069080"/>
+            <a:ext cx="1734769" cy="1188720"/>
           </a:xfrm>
           <a:prstGeom prst="roundRect">
             <a:avLst>
@@ -6623,14 +8488,47 @@
       </p:sp>
       <p:sp>
         <p:nvSpPr>
-          <p:cNvPr id="19" name="Oval 18"/>
+          <p:cNvPr id="22" name="TextBox 21"/>
+          <p:cNvSpPr txBox="1"/>
+          <p:nvPr/>
+        </p:nvSpPr>
+        <p:spPr>
+          <a:xfrm>
+            <a:off x="6301587" y="4206240"/>
+            <a:ext cx="1460449" cy="914400"/>
+          </a:xfrm>
+          <a:prstGeom prst="rect">
+            <a:avLst/>
+          </a:prstGeom>
+          <a:noFill/>
+        </p:spPr>
+        <p:txBody>
+          <a:bodyPr wrap="square" anchor="t" lIns="0" rIns="0" tIns="0" bIns="0"/>
+          <a:lstStyle/>
+          <a:p>
+            <a:pPr algn="l"/>
+            <a:r>
+              <a:rPr sz="1700" b="0" i="0">
+                <a:solidFill>
+                  <a:srgbClr val="202122"/>
+                </a:solidFill>
+                <a:latin typeface="Calibri"/>
+              </a:rPr>
+              <a:t>Track against the plan.</a:t>
+            </a:r>
+          </a:p>
+        </p:txBody>
+      </p:sp>
+      <p:sp>
+        <p:nvSpPr>
+          <p:cNvPr id="23" name="Oval 22"/>
           <p:cNvSpPr/>
           <p:nvPr/>
         </p:nvSpPr>
         <p:spPr>
           <a:xfrm>
-            <a:off x="6461607" y="4251960"/>
-            <a:ext cx="457200" cy="457200"/>
+            <a:off x="8583701" y="2514600"/>
+            <a:ext cx="640080" cy="640080"/>
           </a:xfrm>
           <a:prstGeom prst="ellipse">
             <a:avLst/>
@@ -6663,27 +8561,27 @@
           <a:p>
             <a:pPr algn="ctr"/>
             <a:r>
-              <a:rPr sz="1500" b="1">
+              <a:rPr sz="2000" b="1">
                 <a:solidFill>
                   <a:srgbClr val="202122"/>
                 </a:solidFill>
                 <a:latin typeface="Calibri"/>
               </a:rPr>
-              <a:t>4</a:t>
-            </a:r>
-          </a:p>
-        </p:txBody>
-      </p:sp>
-      <p:sp>
-        <p:nvSpPr>
-          <p:cNvPr id="20" name="TextBox 19"/>
+              <a:t>5</a:t>
+            </a:r>
+          </a:p>
+        </p:txBody>
+      </p:sp>
+      <p:sp>
+        <p:nvSpPr>
+          <p:cNvPr id="24" name="TextBox 23"/>
           <p:cNvSpPr txBox="1"/>
           <p:nvPr/>
         </p:nvSpPr>
         <p:spPr>
           <a:xfrm>
-            <a:off x="7055967" y="4224528"/>
-            <a:ext cx="4404207" cy="512064"/>
+            <a:off x="8036356" y="3291840"/>
+            <a:ext cx="1734769" cy="731520"/>
           </a:xfrm>
           <a:prstGeom prst="rect">
             <a:avLst/>
@@ -6691,32 +8589,239 @@
           <a:noFill/>
         </p:spPr>
         <p:txBody>
-          <a:bodyPr wrap="square" anchor="ctr" lIns="0" rIns="0" tIns="0" bIns="0"/>
+          <a:bodyPr wrap="square" anchor="t" lIns="0" rIns="0" tIns="0" bIns="0"/>
+          <a:lstStyle/>
+          <a:p>
+            <a:pPr algn="ctr"/>
+            <a:r>
+              <a:rPr sz="1700" b="1" i="0">
+                <a:solidFill>
+                  <a:srgbClr val="03306E"/>
+                </a:solidFill>
+                <a:latin typeface="Calibri"/>
+              </a:rPr>
+              <a:t>Report</a:t>
+            </a:r>
+          </a:p>
+        </p:txBody>
+      </p:sp>
+      <p:sp>
+        <p:nvSpPr>
+          <p:cNvPr id="25" name="Rounded Rectangle 24"/>
+          <p:cNvSpPr/>
+          <p:nvPr/>
+        </p:nvSpPr>
+        <p:spPr>
+          <a:xfrm>
+            <a:off x="8036356" y="4069080"/>
+            <a:ext cx="1734769" cy="1188720"/>
+          </a:xfrm>
+          <a:prstGeom prst="roundRect">
+            <a:avLst>
+              <a:gd name="adj" fmla="val 6000"/>
+            </a:avLst>
+          </a:prstGeom>
+          <a:solidFill>
+            <a:srgbClr val="EAF3FF"/>
+          </a:solidFill>
+          <a:ln>
+            <a:noFill/>
+          </a:ln>
+          <a:effectLst/>
+        </p:spPr>
+        <p:style>
+          <a:lnRef idx="1">
+            <a:schemeClr val="accent1"/>
+          </a:lnRef>
+          <a:fillRef idx="3">
+            <a:schemeClr val="accent1"/>
+          </a:fillRef>
+          <a:effectRef idx="2">
+            <a:schemeClr val="accent1"/>
+          </a:effectRef>
+          <a:fontRef idx="minor">
+            <a:schemeClr val="lt1"/>
+          </a:fontRef>
+        </p:style>
+        <p:txBody>
+          <a:bodyPr rtlCol="0" anchor="ctr"/>
+          <a:lstStyle/>
+          <a:p/>
+        </p:txBody>
+      </p:sp>
+      <p:sp>
+        <p:nvSpPr>
+          <p:cNvPr id="26" name="TextBox 25"/>
+          <p:cNvSpPr txBox="1"/>
+          <p:nvPr/>
+        </p:nvSpPr>
+        <p:spPr>
+          <a:xfrm>
+            <a:off x="8173516" y="4206240"/>
+            <a:ext cx="1460449" cy="914400"/>
+          </a:xfrm>
+          <a:prstGeom prst="rect">
+            <a:avLst/>
+          </a:prstGeom>
+          <a:noFill/>
+        </p:spPr>
+        <p:txBody>
+          <a:bodyPr wrap="square" anchor="t" lIns="0" rIns="0" tIns="0" bIns="0"/>
           <a:lstStyle/>
           <a:p>
             <a:pPr algn="l"/>
             <a:r>
-              <a:rPr sz="1900" b="1" i="0">
+              <a:rPr sz="1700" b="0" i="0">
+                <a:solidFill>
+                  <a:srgbClr val="202122"/>
+                </a:solidFill>
+                <a:latin typeface="Calibri"/>
+              </a:rPr>
+              <a:t>Keep stakeholders informed.</a:t>
+            </a:r>
+          </a:p>
+        </p:txBody>
+      </p:sp>
+      <p:sp>
+        <p:nvSpPr>
+          <p:cNvPr id="27" name="Oval 26"/>
+          <p:cNvSpPr/>
+          <p:nvPr/>
+        </p:nvSpPr>
+        <p:spPr>
+          <a:xfrm>
+            <a:off x="10455630" y="2514600"/>
+            <a:ext cx="640080" cy="640080"/>
+          </a:xfrm>
+          <a:prstGeom prst="ellipse">
+            <a:avLst/>
+          </a:prstGeom>
+          <a:solidFill>
+            <a:srgbClr val="F2B705"/>
+          </a:solidFill>
+          <a:ln>
+            <a:noFill/>
+          </a:ln>
+          <a:effectLst/>
+        </p:spPr>
+        <p:style>
+          <a:lnRef idx="1">
+            <a:schemeClr val="accent1"/>
+          </a:lnRef>
+          <a:fillRef idx="3">
+            <a:schemeClr val="accent1"/>
+          </a:fillRef>
+          <a:effectRef idx="2">
+            <a:schemeClr val="accent1"/>
+          </a:effectRef>
+          <a:fontRef idx="minor">
+            <a:schemeClr val="lt1"/>
+          </a:fontRef>
+        </p:style>
+        <p:txBody>
+          <a:bodyPr rtlCol="0" anchor="ctr" lIns="0" rIns="0" tIns="0" bIns="0"/>
+          <a:lstStyle/>
+          <a:p>
+            <a:pPr algn="ctr"/>
+            <a:r>
+              <a:rPr sz="2000" b="1">
+                <a:solidFill>
+                  <a:srgbClr val="202122"/>
+                </a:solidFill>
+                <a:latin typeface="Calibri"/>
+              </a:rPr>
+              <a:t>6</a:t>
+            </a:r>
+          </a:p>
+        </p:txBody>
+      </p:sp>
+      <p:sp>
+        <p:nvSpPr>
+          <p:cNvPr id="28" name="TextBox 27"/>
+          <p:cNvSpPr txBox="1"/>
+          <p:nvPr/>
+        </p:nvSpPr>
+        <p:spPr>
+          <a:xfrm>
+            <a:off x="9908286" y="3291840"/>
+            <a:ext cx="1734769" cy="731520"/>
+          </a:xfrm>
+          <a:prstGeom prst="rect">
+            <a:avLst/>
+          </a:prstGeom>
+          <a:noFill/>
+        </p:spPr>
+        <p:txBody>
+          <a:bodyPr wrap="square" anchor="t" lIns="0" rIns="0" tIns="0" bIns="0"/>
+          <a:lstStyle/>
+          <a:p>
+            <a:pPr algn="ctr"/>
+            <a:r>
+              <a:rPr sz="1700" b="1" i="0">
                 <a:solidFill>
                   <a:srgbClr val="03306E"/>
                 </a:solidFill>
                 <a:latin typeface="Calibri"/>
               </a:rPr>
-              <a:t>Responsibilities</a:t>
-            </a:r>
-          </a:p>
-        </p:txBody>
-      </p:sp>
-      <p:sp>
-        <p:nvSpPr>
-          <p:cNvPr id="21" name="TextBox 20"/>
+              <a:t>Evaluate</a:t>
+            </a:r>
+          </a:p>
+        </p:txBody>
+      </p:sp>
+      <p:sp>
+        <p:nvSpPr>
+          <p:cNvPr id="29" name="Rounded Rectangle 28"/>
+          <p:cNvSpPr/>
+          <p:nvPr/>
+        </p:nvSpPr>
+        <p:spPr>
+          <a:xfrm>
+            <a:off x="9908286" y="4069080"/>
+            <a:ext cx="1734769" cy="1188720"/>
+          </a:xfrm>
+          <a:prstGeom prst="roundRect">
+            <a:avLst>
+              <a:gd name="adj" fmla="val 6000"/>
+            </a:avLst>
+          </a:prstGeom>
+          <a:solidFill>
+            <a:srgbClr val="EAF3FF"/>
+          </a:solidFill>
+          <a:ln>
+            <a:noFill/>
+          </a:ln>
+          <a:effectLst/>
+        </p:spPr>
+        <p:style>
+          <a:lnRef idx="1">
+            <a:schemeClr val="accent1"/>
+          </a:lnRef>
+          <a:fillRef idx="3">
+            <a:schemeClr val="accent1"/>
+          </a:fillRef>
+          <a:effectRef idx="2">
+            <a:schemeClr val="accent1"/>
+          </a:effectRef>
+          <a:fontRef idx="minor">
+            <a:schemeClr val="lt1"/>
+          </a:fontRef>
+        </p:style>
+        <p:txBody>
+          <a:bodyPr rtlCol="0" anchor="ctr"/>
+          <a:lstStyle/>
+          <a:p/>
+        </p:txBody>
+      </p:sp>
+      <p:sp>
+        <p:nvSpPr>
+          <p:cNvPr id="30" name="TextBox 29"/>
           <p:cNvSpPr txBox="1"/>
           <p:nvPr/>
         </p:nvSpPr>
         <p:spPr>
           <a:xfrm>
-            <a:off x="6461607" y="4892040"/>
-            <a:ext cx="4952847" cy="1143000"/>
+            <a:off x="10045446" y="4206240"/>
+            <a:ext cx="1460449" cy="914400"/>
           </a:xfrm>
           <a:prstGeom prst="rect">
             <a:avLst/>
@@ -6729,13 +8834,13 @@
           <a:p>
             <a:pPr algn="l"/>
             <a:r>
-              <a:rPr sz="2000" b="0" i="0">
+              <a:rPr sz="1700" b="0" i="0">
                 <a:solidFill>
                   <a:srgbClr val="202122"/>
                 </a:solidFill>
                 <a:latin typeface="Calibri"/>
               </a:rPr>
-              <a:t>Communication, monitoring, planning, finance, reporting.</a:t>
+              <a:t>Review and learn.</a:t>
             </a:r>
           </a:p>
         </p:txBody>
@@ -6827,7 +8932,7 @@
                 </a:solidFill>
                 <a:latin typeface="Cambria"/>
               </a:rPr>
-              <a:t>Planning and control</a:t>
+              <a:t>Quick check: The project life cycle</a:t>
             </a:r>
           </a:p>
         </p:txBody>
@@ -6900,22 +9005,20 @@
       </p:sp>
       <p:sp>
         <p:nvSpPr>
-          <p:cNvPr id="6" name="Rounded Rectangle 5"/>
+          <p:cNvPr id="6" name="Oval 5"/>
           <p:cNvSpPr/>
           <p:nvPr/>
         </p:nvSpPr>
         <p:spPr>
           <a:xfrm>
-            <a:off x="548640" y="1600200"/>
-            <a:ext cx="5364327" cy="640080"/>
-          </a:xfrm>
-          <a:prstGeom prst="roundRect">
-            <a:avLst>
-              <a:gd name="adj" fmla="val 15000"/>
-            </a:avLst>
+            <a:off x="548640" y="1691640"/>
+            <a:ext cx="502920" cy="502920"/>
+          </a:xfrm>
+          <a:prstGeom prst="ellipse">
+            <a:avLst/>
           </a:prstGeom>
           <a:solidFill>
-            <a:srgbClr val="03306E"/>
+            <a:srgbClr val="F2B705"/>
           </a:solidFill>
           <a:ln>
             <a:noFill/>
@@ -6937,9 +9040,20 @@
           </a:fontRef>
         </p:style>
         <p:txBody>
-          <a:bodyPr rtlCol="0" anchor="ctr"/>
-          <a:lstStyle/>
-          <a:p/>
+          <a:bodyPr rtlCol="0" anchor="ctr" lIns="0" rIns="0" tIns="0" bIns="0"/>
+          <a:lstStyle/>
+          <a:p>
+            <a:pPr algn="ctr"/>
+            <a:r>
+              <a:rPr sz="1600" b="1">
+                <a:solidFill>
+                  <a:srgbClr val="202122"/>
+                </a:solidFill>
+                <a:latin typeface="Calibri"/>
+              </a:rPr>
+              <a:t>1</a:t>
+            </a:r>
+          </a:p>
         </p:txBody>
       </p:sp>
       <p:sp>
@@ -6950,8 +9064,8 @@
         </p:nvSpPr>
         <p:spPr>
           <a:xfrm>
-            <a:off x="777240" y="1600200"/>
-            <a:ext cx="4907127" cy="640080"/>
+            <a:off x="1371600" y="1645920"/>
+            <a:ext cx="10271455" cy="1188720"/>
           </a:xfrm>
           <a:prstGeom prst="rect">
             <a:avLst/>
@@ -6959,40 +9073,38 @@
           <a:noFill/>
         </p:spPr>
         <p:txBody>
-          <a:bodyPr wrap="square" anchor="ctr" lIns="0" rIns="0" tIns="0" bIns="0"/>
+          <a:bodyPr wrap="square" anchor="t" lIns="0" rIns="0" tIns="0" bIns="0"/>
           <a:lstStyle/>
           <a:p>
             <a:pPr algn="l"/>
             <a:r>
-              <a:rPr sz="2000" b="1" i="0">
-                <a:solidFill>
-                  <a:srgbClr val="FFFFFF"/>
-                </a:solidFill>
-                <a:latin typeface="Calibri"/>
-              </a:rPr>
-              <a:t>Planning tools</a:t>
-            </a:r>
-          </a:p>
-        </p:txBody>
-      </p:sp>
-      <p:sp>
-        <p:nvSpPr>
-          <p:cNvPr id="8" name="Rounded Rectangle 7"/>
+              <a:rPr sz="2400" b="0" i="0">
+                <a:solidFill>
+                  <a:srgbClr val="202122"/>
+                </a:solidFill>
+                <a:latin typeface="Calibri"/>
+              </a:rPr>
+              <a:t>What happens at initiation?</a:t>
+            </a:r>
+          </a:p>
+        </p:txBody>
+      </p:sp>
+      <p:sp>
+        <p:nvSpPr>
+          <p:cNvPr id="8" name="Oval 7"/>
           <p:cNvSpPr/>
           <p:nvPr/>
         </p:nvSpPr>
         <p:spPr>
           <a:xfrm>
-            <a:off x="548640" y="2377440"/>
-            <a:ext cx="5364327" cy="3794760"/>
-          </a:xfrm>
-          <a:prstGeom prst="roundRect">
-            <a:avLst>
-              <a:gd name="adj" fmla="val 4000"/>
-            </a:avLst>
+            <a:off x="548640" y="3108960"/>
+            <a:ext cx="502920" cy="502920"/>
+          </a:xfrm>
+          <a:prstGeom prst="ellipse">
+            <a:avLst/>
           </a:prstGeom>
           <a:solidFill>
-            <a:srgbClr val="EAF3FF"/>
+            <a:srgbClr val="F2B705"/>
           </a:solidFill>
           <a:ln>
             <a:noFill/>
@@ -7014,9 +9126,20 @@
           </a:fontRef>
         </p:style>
         <p:txBody>
-          <a:bodyPr rtlCol="0" anchor="ctr"/>
-          <a:lstStyle/>
-          <a:p/>
+          <a:bodyPr rtlCol="0" anchor="ctr" lIns="0" rIns="0" tIns="0" bIns="0"/>
+          <a:lstStyle/>
+          <a:p>
+            <a:pPr algn="ctr"/>
+            <a:r>
+              <a:rPr sz="1600" b="1">
+                <a:solidFill>
+                  <a:srgbClr val="202122"/>
+                </a:solidFill>
+                <a:latin typeface="Calibri"/>
+              </a:rPr>
+              <a:t>2</a:t>
+            </a:r>
+          </a:p>
         </p:txBody>
       </p:sp>
       <p:sp>
@@ -7027,8 +9150,8 @@
         </p:nvSpPr>
         <p:spPr>
           <a:xfrm>
-            <a:off x="822959" y="2606040"/>
-            <a:ext cx="4815687" cy="3337560"/>
+            <a:off x="1371600" y="3063240"/>
+            <a:ext cx="10271455" cy="1188720"/>
           </a:xfrm>
           <a:prstGeom prst="rect">
             <a:avLst/>
@@ -7036,141 +9159,38 @@
           <a:noFill/>
         </p:spPr>
         <p:txBody>
-          <a:bodyPr wrap="square" lIns="0" rIns="0" tIns="0" bIns="0">
-            <a:spAutoFit/>
-          </a:bodyPr>
-          <a:lstStyle/>
-          <a:p>
-            <a:pPr marL="274320" indent="-274320">
-              <a:spcAft>
-                <a:spcPts val="990"/>
-              </a:spcAft>
-              <a:buClr>
-                <a:srgbClr val="0645AD"/>
-              </a:buClr>
-              <a:buFont typeface="Arial"/>
-              <a:buChar char="•"/>
-            </a:pPr>
-            <a:r>
-              <a:rPr sz="2200" b="1">
+          <a:bodyPr wrap="square" anchor="t" lIns="0" rIns="0" tIns="0" bIns="0"/>
+          <a:lstStyle/>
+          <a:p>
+            <a:pPr algn="l"/>
+            <a:r>
+              <a:rPr sz="2400" b="0" i="0">
                 <a:solidFill>
                   <a:srgbClr val="202122"/>
                 </a:solidFill>
                 <a:latin typeface="Calibri"/>
               </a:rPr>
-              <a:t>Gantt charts:</a:t>
-            </a:r>
-            <a:r>
-              <a:rPr sz="2200" b="0">
-                <a:solidFill>
-                  <a:srgbClr val="202122"/>
-                </a:solidFill>
-                <a:latin typeface="Calibri"/>
-              </a:rPr>
-              <a:t> tasks on a timeline</a:t>
-            </a:r>
-          </a:p>
-          <a:p>
-            <a:pPr marL="274320" indent="-274320">
-              <a:spcAft>
-                <a:spcPts val="990"/>
-              </a:spcAft>
-              <a:buClr>
-                <a:srgbClr val="0645AD"/>
-              </a:buClr>
-              <a:buFont typeface="Arial"/>
-              <a:buChar char="•"/>
-            </a:pPr>
-            <a:r>
-              <a:rPr sz="2200" b="1">
-                <a:solidFill>
-                  <a:srgbClr val="202122"/>
-                </a:solidFill>
-                <a:latin typeface="Calibri"/>
-              </a:rPr>
-              <a:t>Critical path analysis:</a:t>
-            </a:r>
-            <a:r>
-              <a:rPr sz="2200" b="0">
-                <a:solidFill>
-                  <a:srgbClr val="202122"/>
-                </a:solidFill>
-                <a:latin typeface="Calibri"/>
-              </a:rPr>
-              <a:t> the longest chain of dependent tasks</a:t>
-            </a:r>
-          </a:p>
-          <a:p>
-            <a:pPr marL="274320" indent="-274320">
-              <a:spcAft>
-                <a:spcPts val="990"/>
-              </a:spcAft>
-              <a:buClr>
-                <a:srgbClr val="0645AD"/>
-              </a:buClr>
-              <a:buFont typeface="Arial"/>
-              <a:buChar char="•"/>
-            </a:pPr>
-            <a:r>
-              <a:rPr sz="2200" b="1">
-                <a:solidFill>
-                  <a:srgbClr val="202122"/>
-                </a:solidFill>
-                <a:latin typeface="Calibri"/>
-              </a:rPr>
-              <a:t>PERT:</a:t>
-            </a:r>
-            <a:r>
-              <a:rPr sz="2200" b="0">
-                <a:solidFill>
-                  <a:srgbClr val="202122"/>
-                </a:solidFill>
-                <a:latin typeface="Calibri"/>
-              </a:rPr>
-              <a:t> optimistic, likely and pessimistic estimates</a:t>
-            </a:r>
-          </a:p>
-          <a:p>
-            <a:pPr marL="274320" indent="-274320">
-              <a:spcAft>
-                <a:spcPts val="990"/>
-              </a:spcAft>
-              <a:buClr>
-                <a:srgbClr val="0645AD"/>
-              </a:buClr>
-              <a:buFont typeface="Arial"/>
-              <a:buChar char="•"/>
-            </a:pPr>
-            <a:r>
-              <a:rPr sz="2200" b="0">
-                <a:solidFill>
-                  <a:srgbClr val="202122"/>
-                </a:solidFill>
-                <a:latin typeface="Calibri"/>
-              </a:rPr>
-              <a:t>Contingency planning and managing interdependencies</a:t>
-            </a:r>
-          </a:p>
-        </p:txBody>
-      </p:sp>
-      <p:sp>
-        <p:nvSpPr>
-          <p:cNvPr id="10" name="Rounded Rectangle 9"/>
+              <a:t>Name three project constraints.</a:t>
+            </a:r>
+          </a:p>
+        </p:txBody>
+      </p:sp>
+      <p:sp>
+        <p:nvSpPr>
+          <p:cNvPr id="10" name="Oval 9"/>
           <p:cNvSpPr/>
           <p:nvPr/>
         </p:nvSpPr>
         <p:spPr>
           <a:xfrm>
-            <a:off x="6278727" y="1600200"/>
-            <a:ext cx="5364327" cy="640080"/>
-          </a:xfrm>
-          <a:prstGeom prst="roundRect">
-            <a:avLst>
-              <a:gd name="adj" fmla="val 15000"/>
-            </a:avLst>
+            <a:off x="548640" y="4526280"/>
+            <a:ext cx="502920" cy="502920"/>
+          </a:xfrm>
+          <a:prstGeom prst="ellipse">
+            <a:avLst/>
           </a:prstGeom>
           <a:solidFill>
-            <a:srgbClr val="0645AD"/>
+            <a:srgbClr val="F2B705"/>
           </a:solidFill>
           <a:ln>
             <a:noFill/>
@@ -7192,9 +9212,20 @@
           </a:fontRef>
         </p:style>
         <p:txBody>
-          <a:bodyPr rtlCol="0" anchor="ctr"/>
-          <a:lstStyle/>
-          <a:p/>
+          <a:bodyPr rtlCol="0" anchor="ctr" lIns="0" rIns="0" tIns="0" bIns="0"/>
+          <a:lstStyle/>
+          <a:p>
+            <a:pPr algn="ctr"/>
+            <a:r>
+              <a:rPr sz="1600" b="1">
+                <a:solidFill>
+                  <a:srgbClr val="202122"/>
+                </a:solidFill>
+                <a:latin typeface="Calibri"/>
+              </a:rPr>
+              <a:t>3</a:t>
+            </a:r>
+          </a:p>
         </p:txBody>
       </p:sp>
       <p:sp>
@@ -7205,8 +9236,8 @@
         </p:nvSpPr>
         <p:spPr>
           <a:xfrm>
-            <a:off x="6507327" y="1600200"/>
-            <a:ext cx="4907127" cy="640080"/>
+            <a:off x="1371600" y="4480560"/>
+            <a:ext cx="10271455" cy="1188720"/>
           </a:xfrm>
           <a:prstGeom prst="rect">
             <a:avLst/>
@@ -7214,76 +9245,32 @@
           <a:noFill/>
         </p:spPr>
         <p:txBody>
-          <a:bodyPr wrap="square" anchor="ctr" lIns="0" rIns="0" tIns="0" bIns="0"/>
+          <a:bodyPr wrap="square" anchor="t" lIns="0" rIns="0" tIns="0" bIns="0"/>
           <a:lstStyle/>
           <a:p>
             <a:pPr algn="l"/>
             <a:r>
-              <a:rPr sz="2000" b="1" i="0">
-                <a:solidFill>
-                  <a:srgbClr val="FFFFFF"/>
-                </a:solidFill>
-                <a:latin typeface="Calibri"/>
-              </a:rPr>
-              <a:t>Control methods</a:t>
-            </a:r>
-          </a:p>
-        </p:txBody>
-      </p:sp>
-      <p:sp>
-        <p:nvSpPr>
-          <p:cNvPr id="12" name="Rounded Rectangle 11"/>
-          <p:cNvSpPr/>
-          <p:nvPr/>
-        </p:nvSpPr>
-        <p:spPr>
-          <a:xfrm>
-            <a:off x="6278727" y="2377440"/>
-            <a:ext cx="5364327" cy="3794760"/>
-          </a:xfrm>
-          <a:prstGeom prst="roundRect">
-            <a:avLst>
-              <a:gd name="adj" fmla="val 4000"/>
-            </a:avLst>
-          </a:prstGeom>
-          <a:solidFill>
-            <a:srgbClr val="EAF3FF"/>
-          </a:solidFill>
-          <a:ln>
-            <a:noFill/>
-          </a:ln>
-          <a:effectLst/>
-        </p:spPr>
-        <p:style>
-          <a:lnRef idx="1">
-            <a:schemeClr val="accent1"/>
-          </a:lnRef>
-          <a:fillRef idx="3">
-            <a:schemeClr val="accent1"/>
-          </a:fillRef>
-          <a:effectRef idx="2">
-            <a:schemeClr val="accent1"/>
-          </a:effectRef>
-          <a:fontRef idx="minor">
-            <a:schemeClr val="lt1"/>
-          </a:fontRef>
-        </p:style>
-        <p:txBody>
-          <a:bodyPr rtlCol="0" anchor="ctr"/>
-          <a:lstStyle/>
-          <a:p/>
-        </p:txBody>
-      </p:sp>
-      <p:sp>
-        <p:nvSpPr>
-          <p:cNvPr id="13" name="TextBox 12"/>
+              <a:rPr sz="2400" b="0" i="0">
+                <a:solidFill>
+                  <a:srgbClr val="202122"/>
+                </a:solidFill>
+                <a:latin typeface="Calibri"/>
+              </a:rPr>
+              <a:t>Why evaluate a finished project?</a:t>
+            </a:r>
+          </a:p>
+        </p:txBody>
+      </p:sp>
+      <p:sp>
+        <p:nvSpPr>
+          <p:cNvPr id="12" name="TextBox 11"/>
           <p:cNvSpPr txBox="1"/>
           <p:nvPr/>
         </p:nvSpPr>
         <p:spPr>
           <a:xfrm>
-            <a:off x="6553047" y="2606040"/>
-            <a:ext cx="4815687" cy="3337560"/>
+            <a:off x="548640" y="5852160"/>
+            <a:ext cx="11094415" cy="365760"/>
           </a:xfrm>
           <a:prstGeom prst="rect">
             <a:avLst/>
@@ -7291,98 +9278,18 @@
           <a:noFill/>
         </p:spPr>
         <p:txBody>
-          <a:bodyPr wrap="square" lIns="0" rIns="0" tIns="0" bIns="0">
-            <a:spAutoFit/>
-          </a:bodyPr>
-          <a:lstStyle/>
-          <a:p>
-            <a:pPr marL="274320" indent="-274320">
-              <a:spcAft>
-                <a:spcPts val="990"/>
-              </a:spcAft>
-              <a:buClr>
-                <a:srgbClr val="0645AD"/>
-              </a:buClr>
-              <a:buFont typeface="Arial"/>
-              <a:buChar char="•"/>
-            </a:pPr>
-            <a:r>
-              <a:rPr sz="2200" b="1">
-                <a:solidFill>
-                  <a:srgbClr val="202122"/>
-                </a:solidFill>
-                <a:latin typeface="Calibri"/>
-              </a:rPr>
-              <a:t>Monitoring reports:</a:t>
-            </a:r>
-            <a:r>
-              <a:rPr sz="2200" b="0">
-                <a:solidFill>
-                  <a:srgbClr val="202122"/>
-                </a:solidFill>
-                <a:latin typeface="Calibri"/>
-              </a:rPr>
-              <a:t> budget, quality, cost, time</a:t>
-            </a:r>
-          </a:p>
-          <a:p>
-            <a:pPr marL="274320" indent="-274320">
-              <a:spcAft>
-                <a:spcPts val="990"/>
-              </a:spcAft>
-              <a:buClr>
-                <a:srgbClr val="0645AD"/>
-              </a:buClr>
-              <a:buFont typeface="Arial"/>
-              <a:buChar char="•"/>
-            </a:pPr>
-            <a:r>
-              <a:rPr sz="2200" b="1">
-                <a:solidFill>
-                  <a:srgbClr val="202122"/>
-                </a:solidFill>
-                <a:latin typeface="Calibri"/>
-              </a:rPr>
-              <a:t>Managing by stages:</a:t>
-            </a:r>
-            <a:r>
-              <a:rPr sz="2200" b="0">
-                <a:solidFill>
-                  <a:srgbClr val="202122"/>
-                </a:solidFill>
-                <a:latin typeface="Calibri"/>
-              </a:rPr>
-              <a:t> approve each stage before the next</a:t>
-            </a:r>
-          </a:p>
-          <a:p>
-            <a:pPr marL="274320" indent="-274320">
-              <a:spcAft>
-                <a:spcPts val="990"/>
-              </a:spcAft>
-              <a:buClr>
-                <a:srgbClr val="0645AD"/>
-              </a:buClr>
-              <a:buFont typeface="Arial"/>
-              <a:buChar char="•"/>
-            </a:pPr>
-            <a:r>
-              <a:rPr sz="2200" b="1">
-                <a:solidFill>
-                  <a:srgbClr val="202122"/>
-                </a:solidFill>
-                <a:latin typeface="Calibri"/>
-              </a:rPr>
-              <a:t>Managing by exception:</a:t>
-            </a:r>
-            <a:r>
-              <a:rPr sz="2200" b="0">
-                <a:solidFill>
-                  <a:srgbClr val="202122"/>
-                </a:solidFill>
-                <a:latin typeface="Calibri"/>
-              </a:rPr>
-              <a:t> escalate only when limits are exceeded</a:t>
+          <a:bodyPr wrap="square" anchor="t" lIns="0" rIns="0" tIns="0" bIns="0"/>
+          <a:lstStyle/>
+          <a:p>
+            <a:pPr algn="l"/>
+            <a:r>
+              <a:rPr sz="1300" b="0" i="1">
+                <a:solidFill>
+                  <a:srgbClr val="54595D"/>
+                </a:solidFill>
+                <a:latin typeface="Calibri"/>
+              </a:rPr>
+              <a:t>Answer on mini whiteboards or in your book. Answers are in the speaker notes.</a:t>
             </a:r>
           </a:p>
         </p:txBody>
@@ -7474,7 +9381,7 @@
                 </a:solidFill>
                 <a:latin typeface="Cambria"/>
               </a:rPr>
-              <a:t>Check your understanding</a:t>
+              <a:t>Roles</a:t>
             </a:r>
           </a:p>
         </p:txBody>
@@ -7547,14 +9454,58 @@
       </p:sp>
       <p:sp>
         <p:nvSpPr>
-          <p:cNvPr id="6" name="Oval 5"/>
+          <p:cNvPr id="6" name="Rounded Rectangle 5"/>
           <p:cNvSpPr/>
           <p:nvPr/>
         </p:nvSpPr>
         <p:spPr>
           <a:xfrm>
-            <a:off x="548640" y="1618488"/>
-            <a:ext cx="411480" cy="411480"/>
+            <a:off x="548640" y="1600200"/>
+            <a:ext cx="5410047" cy="2148840"/>
+          </a:xfrm>
+          <a:prstGeom prst="roundRect">
+            <a:avLst>
+              <a:gd name="adj" fmla="val 6000"/>
+            </a:avLst>
+          </a:prstGeom>
+          <a:solidFill>
+            <a:srgbClr val="EAF3FF"/>
+          </a:solidFill>
+          <a:ln>
+            <a:noFill/>
+          </a:ln>
+          <a:effectLst/>
+        </p:spPr>
+        <p:style>
+          <a:lnRef idx="1">
+            <a:schemeClr val="accent1"/>
+          </a:lnRef>
+          <a:fillRef idx="3">
+            <a:schemeClr val="accent1"/>
+          </a:fillRef>
+          <a:effectRef idx="2">
+            <a:schemeClr val="accent1"/>
+          </a:effectRef>
+          <a:fontRef idx="minor">
+            <a:schemeClr val="lt1"/>
+          </a:fontRef>
+        </p:style>
+        <p:txBody>
+          <a:bodyPr rtlCol="0" anchor="ctr"/>
+          <a:lstStyle/>
+          <a:p/>
+        </p:txBody>
+      </p:sp>
+      <p:sp>
+        <p:nvSpPr>
+          <p:cNvPr id="7" name="Oval 6"/>
+          <p:cNvSpPr/>
+          <p:nvPr/>
+        </p:nvSpPr>
+        <p:spPr>
+          <a:xfrm>
+            <a:off x="777240" y="1828800"/>
+            <a:ext cx="457200" cy="457200"/>
           </a:xfrm>
           <a:prstGeom prst="ellipse">
             <a:avLst/>
@@ -7587,7 +9538,7 @@
           <a:p>
             <a:pPr algn="ctr"/>
             <a:r>
-              <a:rPr sz="1400" b="1">
+              <a:rPr sz="1500" b="1">
                 <a:solidFill>
                   <a:srgbClr val="202122"/>
                 </a:solidFill>
@@ -7600,14 +9551,14 @@
       </p:sp>
       <p:sp>
         <p:nvSpPr>
-          <p:cNvPr id="7" name="TextBox 6"/>
+          <p:cNvPr id="8" name="TextBox 7"/>
           <p:cNvSpPr txBox="1"/>
           <p:nvPr/>
         </p:nvSpPr>
         <p:spPr>
           <a:xfrm>
-            <a:off x="1234440" y="1600200"/>
-            <a:ext cx="10408615" cy="1030986"/>
+            <a:off x="1371600" y="1801368"/>
+            <a:ext cx="4404207" cy="512064"/>
           </a:xfrm>
           <a:prstGeom prst="rect">
             <a:avLst/>
@@ -7615,32 +9566,109 @@
           <a:noFill/>
         </p:spPr>
         <p:txBody>
+          <a:bodyPr wrap="square" anchor="ctr" lIns="0" rIns="0" tIns="0" bIns="0"/>
+          <a:lstStyle/>
+          <a:p>
+            <a:pPr algn="l"/>
+            <a:r>
+              <a:rPr sz="1900" b="1" i="0">
+                <a:solidFill>
+                  <a:srgbClr val="03306E"/>
+                </a:solidFill>
+                <a:latin typeface="Calibri"/>
+              </a:rPr>
+              <a:t>Stakeholders</a:t>
+            </a:r>
+          </a:p>
+        </p:txBody>
+      </p:sp>
+      <p:sp>
+        <p:nvSpPr>
+          <p:cNvPr id="9" name="TextBox 8"/>
+          <p:cNvSpPr txBox="1"/>
+          <p:nvPr/>
+        </p:nvSpPr>
+        <p:spPr>
+          <a:xfrm>
+            <a:off x="777240" y="2468880"/>
+            <a:ext cx="4952847" cy="1143000"/>
+          </a:xfrm>
+          <a:prstGeom prst="rect">
+            <a:avLst/>
+          </a:prstGeom>
+          <a:noFill/>
+        </p:spPr>
+        <p:txBody>
           <a:bodyPr wrap="square" anchor="t" lIns="0" rIns="0" tIns="0" bIns="0"/>
           <a:lstStyle/>
           <a:p>
             <a:pPr algn="l"/>
             <a:r>
-              <a:rPr sz="2200" b="0" i="0">
+              <a:rPr sz="2000" b="0" i="0">
                 <a:solidFill>
                   <a:srgbClr val="202122"/>
                 </a:solidFill>
                 <a:latin typeface="Calibri"/>
               </a:rPr>
-              <a:t>What happens if a critical path task is delayed?</a:t>
-            </a:r>
-          </a:p>
-        </p:txBody>
-      </p:sp>
-      <p:sp>
-        <p:nvSpPr>
-          <p:cNvPr id="8" name="Oval 7"/>
+              <a:t>Clients, regulators and others with an interest.</a:t>
+            </a:r>
+          </a:p>
+        </p:txBody>
+      </p:sp>
+      <p:sp>
+        <p:nvSpPr>
+          <p:cNvPr id="10" name="Rounded Rectangle 9"/>
           <p:cNvSpPr/>
           <p:nvPr/>
         </p:nvSpPr>
         <p:spPr>
           <a:xfrm>
-            <a:off x="548640" y="2814066"/>
-            <a:ext cx="411480" cy="411480"/>
+            <a:off x="6233007" y="1600200"/>
+            <a:ext cx="5410047" cy="2148840"/>
+          </a:xfrm>
+          <a:prstGeom prst="roundRect">
+            <a:avLst>
+              <a:gd name="adj" fmla="val 6000"/>
+            </a:avLst>
+          </a:prstGeom>
+          <a:solidFill>
+            <a:srgbClr val="EAF3FF"/>
+          </a:solidFill>
+          <a:ln>
+            <a:noFill/>
+          </a:ln>
+          <a:effectLst/>
+        </p:spPr>
+        <p:style>
+          <a:lnRef idx="1">
+            <a:schemeClr val="accent1"/>
+          </a:lnRef>
+          <a:fillRef idx="3">
+            <a:schemeClr val="accent1"/>
+          </a:fillRef>
+          <a:effectRef idx="2">
+            <a:schemeClr val="accent1"/>
+          </a:effectRef>
+          <a:fontRef idx="minor">
+            <a:schemeClr val="lt1"/>
+          </a:fontRef>
+        </p:style>
+        <p:txBody>
+          <a:bodyPr rtlCol="0" anchor="ctr"/>
+          <a:lstStyle/>
+          <a:p/>
+        </p:txBody>
+      </p:sp>
+      <p:sp>
+        <p:nvSpPr>
+          <p:cNvPr id="11" name="Oval 10"/>
+          <p:cNvSpPr/>
+          <p:nvPr/>
+        </p:nvSpPr>
+        <p:spPr>
+          <a:xfrm>
+            <a:off x="6461607" y="1828800"/>
+            <a:ext cx="457200" cy="457200"/>
           </a:xfrm>
           <a:prstGeom prst="ellipse">
             <a:avLst/>
@@ -7673,7 +9701,7 @@
           <a:p>
             <a:pPr algn="ctr"/>
             <a:r>
-              <a:rPr sz="1400" b="1">
+              <a:rPr sz="1500" b="1">
                 <a:solidFill>
                   <a:srgbClr val="202122"/>
                 </a:solidFill>
@@ -7686,14 +9714,14 @@
       </p:sp>
       <p:sp>
         <p:nvSpPr>
-          <p:cNvPr id="9" name="TextBox 8"/>
+          <p:cNvPr id="12" name="TextBox 11"/>
           <p:cNvSpPr txBox="1"/>
           <p:nvPr/>
         </p:nvSpPr>
         <p:spPr>
           <a:xfrm>
-            <a:off x="1234440" y="2795778"/>
-            <a:ext cx="10408615" cy="1030986"/>
+            <a:off x="7055967" y="1801368"/>
+            <a:ext cx="4404207" cy="512064"/>
           </a:xfrm>
           <a:prstGeom prst="rect">
             <a:avLst/>
@@ -7701,32 +9729,109 @@
           <a:noFill/>
         </p:spPr>
         <p:txBody>
+          <a:bodyPr wrap="square" anchor="ctr" lIns="0" rIns="0" tIns="0" bIns="0"/>
+          <a:lstStyle/>
+          <a:p>
+            <a:pPr algn="l"/>
+            <a:r>
+              <a:rPr sz="1900" b="1" i="0">
+                <a:solidFill>
+                  <a:srgbClr val="03306E"/>
+                </a:solidFill>
+                <a:latin typeface="Calibri"/>
+              </a:rPr>
+              <a:t>Project manager</a:t>
+            </a:r>
+          </a:p>
+        </p:txBody>
+      </p:sp>
+      <p:sp>
+        <p:nvSpPr>
+          <p:cNvPr id="13" name="TextBox 12"/>
+          <p:cNvSpPr txBox="1"/>
+          <p:nvPr/>
+        </p:nvSpPr>
+        <p:spPr>
+          <a:xfrm>
+            <a:off x="6461607" y="2468880"/>
+            <a:ext cx="4952847" cy="1143000"/>
+          </a:xfrm>
+          <a:prstGeom prst="rect">
+            <a:avLst/>
+          </a:prstGeom>
+          <a:noFill/>
+        </p:spPr>
+        <p:txBody>
           <a:bodyPr wrap="square" anchor="t" lIns="0" rIns="0" tIns="0" bIns="0"/>
           <a:lstStyle/>
           <a:p>
             <a:pPr algn="l"/>
             <a:r>
-              <a:rPr sz="2200" b="0" i="0">
+              <a:rPr sz="2000" b="0" i="0">
                 <a:solidFill>
                   <a:srgbClr val="202122"/>
                 </a:solidFill>
                 <a:latin typeface="Calibri"/>
               </a:rPr>
-              <a:t>What is managing by exception?</a:t>
-            </a:r>
-          </a:p>
-        </p:txBody>
-      </p:sp>
-      <p:sp>
-        <p:nvSpPr>
-          <p:cNvPr id="10" name="Oval 9"/>
+              <a:t>Plans, monitors and controls the project.</a:t>
+            </a:r>
+          </a:p>
+        </p:txBody>
+      </p:sp>
+      <p:sp>
+        <p:nvSpPr>
+          <p:cNvPr id="14" name="Rounded Rectangle 13"/>
           <p:cNvSpPr/>
           <p:nvPr/>
         </p:nvSpPr>
         <p:spPr>
           <a:xfrm>
-            <a:off x="548640" y="4009644"/>
-            <a:ext cx="411480" cy="411480"/>
+            <a:off x="548640" y="4023360"/>
+            <a:ext cx="5410047" cy="2148840"/>
+          </a:xfrm>
+          <a:prstGeom prst="roundRect">
+            <a:avLst>
+              <a:gd name="adj" fmla="val 6000"/>
+            </a:avLst>
+          </a:prstGeom>
+          <a:solidFill>
+            <a:srgbClr val="EAF3FF"/>
+          </a:solidFill>
+          <a:ln>
+            <a:noFill/>
+          </a:ln>
+          <a:effectLst/>
+        </p:spPr>
+        <p:style>
+          <a:lnRef idx="1">
+            <a:schemeClr val="accent1"/>
+          </a:lnRef>
+          <a:fillRef idx="3">
+            <a:schemeClr val="accent1"/>
+          </a:fillRef>
+          <a:effectRef idx="2">
+            <a:schemeClr val="accent1"/>
+          </a:effectRef>
+          <a:fontRef idx="minor">
+            <a:schemeClr val="lt1"/>
+          </a:fontRef>
+        </p:style>
+        <p:txBody>
+          <a:bodyPr rtlCol="0" anchor="ctr"/>
+          <a:lstStyle/>
+          <a:p/>
+        </p:txBody>
+      </p:sp>
+      <p:sp>
+        <p:nvSpPr>
+          <p:cNvPr id="15" name="Oval 14"/>
+          <p:cNvSpPr/>
+          <p:nvPr/>
+        </p:nvSpPr>
+        <p:spPr>
+          <a:xfrm>
+            <a:off x="777240" y="4251960"/>
+            <a:ext cx="457200" cy="457200"/>
           </a:xfrm>
           <a:prstGeom prst="ellipse">
             <a:avLst/>
@@ -7759,7 +9864,7 @@
           <a:p>
             <a:pPr algn="ctr"/>
             <a:r>
-              <a:rPr sz="1400" b="1">
+              <a:rPr sz="1500" b="1">
                 <a:solidFill>
                   <a:srgbClr val="202122"/>
                 </a:solidFill>
@@ -7772,14 +9877,14 @@
       </p:sp>
       <p:sp>
         <p:nvSpPr>
-          <p:cNvPr id="11" name="TextBox 10"/>
+          <p:cNvPr id="16" name="TextBox 15"/>
           <p:cNvSpPr txBox="1"/>
           <p:nvPr/>
         </p:nvSpPr>
         <p:spPr>
           <a:xfrm>
-            <a:off x="1234440" y="3991356"/>
-            <a:ext cx="10408615" cy="1030986"/>
+            <a:off x="1371600" y="4224528"/>
+            <a:ext cx="4404207" cy="512064"/>
           </a:xfrm>
           <a:prstGeom prst="rect">
             <a:avLst/>
@@ -7787,32 +9892,109 @@
           <a:noFill/>
         </p:spPr>
         <p:txBody>
+          <a:bodyPr wrap="square" anchor="ctr" lIns="0" rIns="0" tIns="0" bIns="0"/>
+          <a:lstStyle/>
+          <a:p>
+            <a:pPr algn="l"/>
+            <a:r>
+              <a:rPr sz="1900" b="1" i="0">
+                <a:solidFill>
+                  <a:srgbClr val="03306E"/>
+                </a:solidFill>
+                <a:latin typeface="Calibri"/>
+              </a:rPr>
+              <a:t>Team members</a:t>
+            </a:r>
+          </a:p>
+        </p:txBody>
+      </p:sp>
+      <p:sp>
+        <p:nvSpPr>
+          <p:cNvPr id="17" name="TextBox 16"/>
+          <p:cNvSpPr txBox="1"/>
+          <p:nvPr/>
+        </p:nvSpPr>
+        <p:spPr>
+          <a:xfrm>
+            <a:off x="777240" y="4892040"/>
+            <a:ext cx="4952847" cy="1143000"/>
+          </a:xfrm>
+          <a:prstGeom prst="rect">
+            <a:avLst/>
+          </a:prstGeom>
+          <a:noFill/>
+        </p:spPr>
+        <p:txBody>
           <a:bodyPr wrap="square" anchor="t" lIns="0" rIns="0" tIns="0" bIns="0"/>
           <a:lstStyle/>
           <a:p>
             <a:pPr algn="l"/>
             <a:r>
-              <a:rPr sz="2200" b="0" i="0">
+              <a:rPr sz="2000" b="0" i="0">
                 <a:solidFill>
                   <a:srgbClr val="202122"/>
                 </a:solidFill>
                 <a:latin typeface="Calibri"/>
               </a:rPr>
-              <a:t>What does PERT use for time estimates?</a:t>
-            </a:r>
-          </a:p>
-        </p:txBody>
-      </p:sp>
-      <p:sp>
-        <p:nvSpPr>
-          <p:cNvPr id="12" name="Oval 11"/>
+              <a:t>Deliver the tasks and report progress.</a:t>
+            </a:r>
+          </a:p>
+        </p:txBody>
+      </p:sp>
+      <p:sp>
+        <p:nvSpPr>
+          <p:cNvPr id="18" name="Rounded Rectangle 17"/>
           <p:cNvSpPr/>
           <p:nvPr/>
         </p:nvSpPr>
         <p:spPr>
           <a:xfrm>
-            <a:off x="548640" y="5205221"/>
-            <a:ext cx="411480" cy="411480"/>
+            <a:off x="6233007" y="4023360"/>
+            <a:ext cx="5410047" cy="2148840"/>
+          </a:xfrm>
+          <a:prstGeom prst="roundRect">
+            <a:avLst>
+              <a:gd name="adj" fmla="val 6000"/>
+            </a:avLst>
+          </a:prstGeom>
+          <a:solidFill>
+            <a:srgbClr val="EAF3FF"/>
+          </a:solidFill>
+          <a:ln>
+            <a:noFill/>
+          </a:ln>
+          <a:effectLst/>
+        </p:spPr>
+        <p:style>
+          <a:lnRef idx="1">
+            <a:schemeClr val="accent1"/>
+          </a:lnRef>
+          <a:fillRef idx="3">
+            <a:schemeClr val="accent1"/>
+          </a:fillRef>
+          <a:effectRef idx="2">
+            <a:schemeClr val="accent1"/>
+          </a:effectRef>
+          <a:fontRef idx="minor">
+            <a:schemeClr val="lt1"/>
+          </a:fontRef>
+        </p:style>
+        <p:txBody>
+          <a:bodyPr rtlCol="0" anchor="ctr"/>
+          <a:lstStyle/>
+          <a:p/>
+        </p:txBody>
+      </p:sp>
+      <p:sp>
+        <p:nvSpPr>
+          <p:cNvPr id="19" name="Oval 18"/>
+          <p:cNvSpPr/>
+          <p:nvPr/>
+        </p:nvSpPr>
+        <p:spPr>
+          <a:xfrm>
+            <a:off x="6461607" y="4251960"/>
+            <a:ext cx="457200" cy="457200"/>
           </a:xfrm>
           <a:prstGeom prst="ellipse">
             <a:avLst/>
@@ -7845,7 +10027,7 @@
           <a:p>
             <a:pPr algn="ctr"/>
             <a:r>
-              <a:rPr sz="1400" b="1">
+              <a:rPr sz="1500" b="1">
                 <a:solidFill>
                   <a:srgbClr val="202122"/>
                 </a:solidFill>
@@ -7858,14 +10040,14 @@
       </p:sp>
       <p:sp>
         <p:nvSpPr>
-          <p:cNvPr id="13" name="TextBox 12"/>
+          <p:cNvPr id="20" name="TextBox 19"/>
           <p:cNvSpPr txBox="1"/>
           <p:nvPr/>
         </p:nvSpPr>
         <p:spPr>
           <a:xfrm>
-            <a:off x="1234440" y="5186933"/>
-            <a:ext cx="10408615" cy="1030986"/>
+            <a:off x="7055967" y="4224528"/>
+            <a:ext cx="4404207" cy="512064"/>
           </a:xfrm>
           <a:prstGeom prst="rect">
             <a:avLst/>
@@ -7873,18 +10055,51 @@
           <a:noFill/>
         </p:spPr>
         <p:txBody>
+          <a:bodyPr wrap="square" anchor="ctr" lIns="0" rIns="0" tIns="0" bIns="0"/>
+          <a:lstStyle/>
+          <a:p>
+            <a:pPr algn="l"/>
+            <a:r>
+              <a:rPr sz="1900" b="1" i="0">
+                <a:solidFill>
+                  <a:srgbClr val="03306E"/>
+                </a:solidFill>
+                <a:latin typeface="Calibri"/>
+              </a:rPr>
+              <a:t>Responsibilities</a:t>
+            </a:r>
+          </a:p>
+        </p:txBody>
+      </p:sp>
+      <p:sp>
+        <p:nvSpPr>
+          <p:cNvPr id="21" name="TextBox 20"/>
+          <p:cNvSpPr txBox="1"/>
+          <p:nvPr/>
+        </p:nvSpPr>
+        <p:spPr>
+          <a:xfrm>
+            <a:off x="6461607" y="4892040"/>
+            <a:ext cx="4952847" cy="1143000"/>
+          </a:xfrm>
+          <a:prstGeom prst="rect">
+            <a:avLst/>
+          </a:prstGeom>
+          <a:noFill/>
+        </p:spPr>
+        <p:txBody>
           <a:bodyPr wrap="square" anchor="t" lIns="0" rIns="0" tIns="0" bIns="0"/>
           <a:lstStyle/>
           <a:p>
             <a:pPr algn="l"/>
             <a:r>
-              <a:rPr sz="2200" b="0" i="0">
+              <a:rPr sz="2000" b="0" i="0">
                 <a:solidFill>
                   <a:srgbClr val="202122"/>
                 </a:solidFill>
                 <a:latin typeface="Calibri"/>
               </a:rPr>
-              <a:t>Name three project constraints.</a:t>
+              <a:t>Communication, monitoring, planning, finance, reporting.</a:t>
             </a:r>
           </a:p>
         </p:txBody>
@@ -7976,7 +10191,7 @@
                 </a:solidFill>
                 <a:latin typeface="Cambria"/>
               </a:rPr>
-              <a:t>Answers</a:t>
+              <a:t>Planning and control</a:t>
             </a:r>
           </a:p>
         </p:txBody>
@@ -8049,14 +10264,129 @@
       </p:sp>
       <p:sp>
         <p:nvSpPr>
-          <p:cNvPr id="6" name="Oval 5"/>
+          <p:cNvPr id="6" name="TextBox 5"/>
+          <p:cNvSpPr txBox="1"/>
+          <p:nvPr/>
+        </p:nvSpPr>
+        <p:spPr>
+          <a:xfrm>
+            <a:off x="548640" y="1554480"/>
+            <a:ext cx="6720840" cy="4617720"/>
+          </a:xfrm>
+          <a:prstGeom prst="rect">
+            <a:avLst/>
+          </a:prstGeom>
+          <a:noFill/>
+        </p:spPr>
+        <p:txBody>
+          <a:bodyPr wrap="square" lIns="0" rIns="0" tIns="0" bIns="0">
+            <a:spAutoFit/>
+          </a:bodyPr>
+          <a:lstStyle/>
+          <a:p>
+            <a:pPr>
+              <a:spcAft>
+                <a:spcPts val="1260"/>
+              </a:spcAft>
+            </a:pPr>
+            <a:r>
+              <a:rPr sz="2100" b="0">
+                <a:solidFill>
+                  <a:srgbClr val="202122"/>
+                </a:solidFill>
+                <a:latin typeface="Calibri"/>
+              </a:rPr>
+              <a:t>Planning starts by identifying the resources needed: time, budget, people, training, communication and production facilities.</a:t>
+            </a:r>
+          </a:p>
+          <a:p>
+            <a:pPr>
+              <a:spcAft>
+                <a:spcPts val="1260"/>
+              </a:spcAft>
+            </a:pPr>
+            <a:r>
+              <a:rPr sz="2100" b="0">
+                <a:solidFill>
+                  <a:srgbClr val="202122"/>
+                </a:solidFill>
+                <a:latin typeface="Calibri"/>
+              </a:rPr>
+              <a:t>A Gantt chart shows tasks as bars on a timeline. Critical path analysis (CPA) finds the longest chain of dependent tasks, which sets the shortest possible project length. PERT uses optimistic, likely and pessimistic estimates. Contingency plans prepare for things going wrong.</a:t>
+            </a:r>
+          </a:p>
+          <a:p>
+            <a:pPr>
+              <a:spcAft>
+                <a:spcPts val="1260"/>
+              </a:spcAft>
+            </a:pPr>
+            <a:r>
+              <a:rPr sz="2100" b="0">
+                <a:solidFill>
+                  <a:srgbClr val="202122"/>
+                </a:solidFill>
+                <a:latin typeface="Calibri"/>
+              </a:rPr>
+              <a:t>Control uses monitoring reports on budget, quality, cost and time. Managing by stages approves each stage before the next; managing by exception escalates only when agreed limits are exceeded.</a:t>
+            </a:r>
+          </a:p>
+        </p:txBody>
+      </p:sp>
+      <p:sp>
+        <p:nvSpPr>
+          <p:cNvPr id="7" name="Rounded Rectangle 6"/>
           <p:cNvSpPr/>
           <p:nvPr/>
         </p:nvSpPr>
         <p:spPr>
           <a:xfrm>
-            <a:off x="548640" y="1618488"/>
-            <a:ext cx="411480" cy="411480"/>
+            <a:off x="7772400" y="1554480"/>
+            <a:ext cx="3867912" cy="4526280"/>
+          </a:xfrm>
+          <a:prstGeom prst="roundRect">
+            <a:avLst>
+              <a:gd name="adj" fmla="val 8000"/>
+            </a:avLst>
+          </a:prstGeom>
+          <a:solidFill>
+            <a:srgbClr val="03306E"/>
+          </a:solidFill>
+          <a:ln>
+            <a:noFill/>
+          </a:ln>
+          <a:effectLst/>
+        </p:spPr>
+        <p:style>
+          <a:lnRef idx="1">
+            <a:schemeClr val="accent1"/>
+          </a:lnRef>
+          <a:fillRef idx="3">
+            <a:schemeClr val="accent1"/>
+          </a:fillRef>
+          <a:effectRef idx="2">
+            <a:schemeClr val="accent1"/>
+          </a:effectRef>
+          <a:fontRef idx="minor">
+            <a:schemeClr val="lt1"/>
+          </a:fontRef>
+        </p:style>
+        <p:txBody>
+          <a:bodyPr rtlCol="0" anchor="ctr"/>
+          <a:lstStyle/>
+          <a:p/>
+        </p:txBody>
+      </p:sp>
+      <p:sp>
+        <p:nvSpPr>
+          <p:cNvPr id="8" name="Oval 7"/>
+          <p:cNvSpPr/>
+          <p:nvPr/>
+        </p:nvSpPr>
+        <p:spPr>
+          <a:xfrm>
+            <a:off x="8046720" y="1828800"/>
+            <a:ext cx="548640" cy="548640"/>
           </a:xfrm>
           <a:prstGeom prst="ellipse">
             <a:avLst/>
@@ -8089,110 +10419,13 @@
           <a:p>
             <a:pPr algn="ctr"/>
             <a:r>
-              <a:rPr sz="1400" b="1">
+              <a:rPr sz="1300" b="1">
                 <a:solidFill>
                   <a:srgbClr val="202122"/>
                 </a:solidFill>
                 <a:latin typeface="Calibri"/>
               </a:rPr>
-              <a:t>1</a:t>
-            </a:r>
-          </a:p>
-        </p:txBody>
-      </p:sp>
-      <p:sp>
-        <p:nvSpPr>
-          <p:cNvPr id="7" name="TextBox 6"/>
-          <p:cNvSpPr txBox="1"/>
-          <p:nvPr/>
-        </p:nvSpPr>
-        <p:spPr>
-          <a:xfrm>
-            <a:off x="1234440" y="1600200"/>
-            <a:ext cx="10408615" cy="1030986"/>
-          </a:xfrm>
-          <a:prstGeom prst="rect">
-            <a:avLst/>
-          </a:prstGeom>
-          <a:noFill/>
-        </p:spPr>
-        <p:txBody>
-          <a:bodyPr wrap="square" anchor="t" lIns="0" rIns="0" tIns="0" bIns="0"/>
-          <a:lstStyle/>
-          <a:p>
-            <a:pPr algn="l"/>
-            <a:r>
-              <a:rPr sz="1800" b="0" i="0">
-                <a:solidFill>
-                  <a:srgbClr val="54595D"/>
-                </a:solidFill>
-                <a:latin typeface="Calibri"/>
-              </a:rPr>
-              <a:t>What happens if a critical path task is delayed?</a:t>
-            </a:r>
-          </a:p>
-          <a:p>
-            <a:r>
-              <a:rPr sz="1800" b="1">
-                <a:solidFill>
-                  <a:srgbClr val="03306E"/>
-                </a:solidFill>
-                <a:latin typeface="Calibri"/>
-              </a:rPr>
-              <a:t>The whole project is delayed.</a:t>
-            </a:r>
-          </a:p>
-        </p:txBody>
-      </p:sp>
-      <p:sp>
-        <p:nvSpPr>
-          <p:cNvPr id="8" name="Oval 7"/>
-          <p:cNvSpPr/>
-          <p:nvPr/>
-        </p:nvSpPr>
-        <p:spPr>
-          <a:xfrm>
-            <a:off x="548640" y="2814066"/>
-            <a:ext cx="411480" cy="411480"/>
-          </a:xfrm>
-          <a:prstGeom prst="ellipse">
-            <a:avLst/>
-          </a:prstGeom>
-          <a:solidFill>
-            <a:srgbClr val="F2B705"/>
-          </a:solidFill>
-          <a:ln>
-            <a:noFill/>
-          </a:ln>
-          <a:effectLst/>
-        </p:spPr>
-        <p:style>
-          <a:lnRef idx="1">
-            <a:schemeClr val="accent1"/>
-          </a:lnRef>
-          <a:fillRef idx="3">
-            <a:schemeClr val="accent1"/>
-          </a:fillRef>
-          <a:effectRef idx="2">
-            <a:schemeClr val="accent1"/>
-          </a:effectRef>
-          <a:fontRef idx="minor">
-            <a:schemeClr val="lt1"/>
-          </a:fontRef>
-        </p:style>
-        <p:txBody>
-          <a:bodyPr rtlCol="0" anchor="ctr" lIns="0" rIns="0" tIns="0" bIns="0"/>
-          <a:lstStyle/>
-          <a:p>
-            <a:pPr algn="ctr"/>
-            <a:r>
-              <a:rPr sz="1400" b="1">
-                <a:solidFill>
-                  <a:srgbClr val="202122"/>
-                </a:solidFill>
-                <a:latin typeface="Calibri"/>
-              </a:rPr>
-              <a:t>2</a:t>
+              <a:t>e.g.</a:t>
             </a:r>
           </a:p>
         </p:txBody>
@@ -8205,8 +10438,8 @@
         </p:nvSpPr>
         <p:spPr>
           <a:xfrm>
-            <a:off x="1234440" y="2795778"/>
-            <a:ext cx="10408615" cy="1030986"/>
+            <a:off x="8046720" y="2560320"/>
+            <a:ext cx="3291840" cy="365760"/>
           </a:xfrm>
           <a:prstGeom prst="rect">
             <a:avLst/>
@@ -8219,91 +10452,27 @@
           <a:p>
             <a:pPr algn="l"/>
             <a:r>
-              <a:rPr sz="1800" b="0" i="0">
-                <a:solidFill>
-                  <a:srgbClr val="54595D"/>
-                </a:solidFill>
-                <a:latin typeface="Calibri"/>
-              </a:rPr>
-              <a:t>What is managing by exception?</a:t>
-            </a:r>
-          </a:p>
-          <a:p>
-            <a:r>
-              <a:rPr sz="1800" b="1">
-                <a:solidFill>
-                  <a:srgbClr val="03306E"/>
-                </a:solidFill>
-                <a:latin typeface="Calibri"/>
-              </a:rPr>
-              <a:t>Only escalating issues when agreed tolerances are exceeded.</a:t>
-            </a:r>
-          </a:p>
-        </p:txBody>
-      </p:sp>
-      <p:sp>
-        <p:nvSpPr>
-          <p:cNvPr id="10" name="Oval 9"/>
-          <p:cNvSpPr/>
-          <p:nvPr/>
-        </p:nvSpPr>
-        <p:spPr>
-          <a:xfrm>
-            <a:off x="548640" y="4009644"/>
-            <a:ext cx="411480" cy="411480"/>
-          </a:xfrm>
-          <a:prstGeom prst="ellipse">
-            <a:avLst/>
-          </a:prstGeom>
-          <a:solidFill>
-            <a:srgbClr val="F2B705"/>
-          </a:solidFill>
-          <a:ln>
-            <a:noFill/>
-          </a:ln>
-          <a:effectLst/>
-        </p:spPr>
-        <p:style>
-          <a:lnRef idx="1">
-            <a:schemeClr val="accent1"/>
-          </a:lnRef>
-          <a:fillRef idx="3">
-            <a:schemeClr val="accent1"/>
-          </a:fillRef>
-          <a:effectRef idx="2">
-            <a:schemeClr val="accent1"/>
-          </a:effectRef>
-          <a:fontRef idx="minor">
-            <a:schemeClr val="lt1"/>
-          </a:fontRef>
-        </p:style>
-        <p:txBody>
-          <a:bodyPr rtlCol="0" anchor="ctr" lIns="0" rIns="0" tIns="0" bIns="0"/>
-          <a:lstStyle/>
-          <a:p>
-            <a:pPr algn="ctr"/>
-            <a:r>
-              <a:rPr sz="1400" b="1">
-                <a:solidFill>
-                  <a:srgbClr val="202122"/>
-                </a:solidFill>
-                <a:latin typeface="Calibri"/>
-              </a:rPr>
-              <a:t>3</a:t>
-            </a:r>
-          </a:p>
-        </p:txBody>
-      </p:sp>
-      <p:sp>
-        <p:nvSpPr>
-          <p:cNvPr id="11" name="TextBox 10"/>
+              <a:rPr sz="1300" b="1" i="0">
+                <a:solidFill>
+                  <a:srgbClr val="A9C8F0"/>
+                </a:solidFill>
+                <a:latin typeface="Calibri"/>
+              </a:rPr>
+              <a:t>EXAMPLE</a:t>
+            </a:r>
+          </a:p>
+        </p:txBody>
+      </p:sp>
+      <p:sp>
+        <p:nvSpPr>
+          <p:cNvPr id="10" name="TextBox 9"/>
           <p:cNvSpPr txBox="1"/>
           <p:nvPr/>
         </p:nvSpPr>
         <p:spPr>
           <a:xfrm>
-            <a:off x="1234440" y="3991356"/>
-            <a:ext cx="10408615" cy="1030986"/>
+            <a:off x="8046720" y="2971800"/>
+            <a:ext cx="3291840" cy="2971800"/>
           </a:xfrm>
           <a:prstGeom prst="rect">
             <a:avLst/>
@@ -8316,121 +10485,13 @@
           <a:p>
             <a:pPr algn="l"/>
             <a:r>
-              <a:rPr sz="1800" b="0" i="0">
-                <a:solidFill>
-                  <a:srgbClr val="54595D"/>
-                </a:solidFill>
-                <a:latin typeface="Calibri"/>
-              </a:rPr>
-              <a:t>What does PERT use for time estimates?</a:t>
-            </a:r>
-          </a:p>
-          <a:p>
-            <a:r>
-              <a:rPr sz="1800" b="1">
-                <a:solidFill>
-                  <a:srgbClr val="03306E"/>
-                </a:solidFill>
-                <a:latin typeface="Calibri"/>
-              </a:rPr>
-              <a:t>Optimistic, most likely and pessimistic estimates.</a:t>
-            </a:r>
-          </a:p>
-        </p:txBody>
-      </p:sp>
-      <p:sp>
-        <p:nvSpPr>
-          <p:cNvPr id="12" name="Oval 11"/>
-          <p:cNvSpPr/>
-          <p:nvPr/>
-        </p:nvSpPr>
-        <p:spPr>
-          <a:xfrm>
-            <a:off x="548640" y="5205221"/>
-            <a:ext cx="411480" cy="411480"/>
-          </a:xfrm>
-          <a:prstGeom prst="ellipse">
-            <a:avLst/>
-          </a:prstGeom>
-          <a:solidFill>
-            <a:srgbClr val="F2B705"/>
-          </a:solidFill>
-          <a:ln>
-            <a:noFill/>
-          </a:ln>
-          <a:effectLst/>
-        </p:spPr>
-        <p:style>
-          <a:lnRef idx="1">
-            <a:schemeClr val="accent1"/>
-          </a:lnRef>
-          <a:fillRef idx="3">
-            <a:schemeClr val="accent1"/>
-          </a:fillRef>
-          <a:effectRef idx="2">
-            <a:schemeClr val="accent1"/>
-          </a:effectRef>
-          <a:fontRef idx="minor">
-            <a:schemeClr val="lt1"/>
-          </a:fontRef>
-        </p:style>
-        <p:txBody>
-          <a:bodyPr rtlCol="0" anchor="ctr" lIns="0" rIns="0" tIns="0" bIns="0"/>
-          <a:lstStyle/>
-          <a:p>
-            <a:pPr algn="ctr"/>
-            <a:r>
-              <a:rPr sz="1400" b="1">
-                <a:solidFill>
-                  <a:srgbClr val="202122"/>
-                </a:solidFill>
-                <a:latin typeface="Calibri"/>
-              </a:rPr>
-              <a:t>4</a:t>
-            </a:r>
-          </a:p>
-        </p:txBody>
-      </p:sp>
-      <p:sp>
-        <p:nvSpPr>
-          <p:cNvPr id="13" name="TextBox 12"/>
-          <p:cNvSpPr txBox="1"/>
-          <p:nvPr/>
-        </p:nvSpPr>
-        <p:spPr>
-          <a:xfrm>
-            <a:off x="1234440" y="5186933"/>
-            <a:ext cx="10408615" cy="1030986"/>
-          </a:xfrm>
-          <a:prstGeom prst="rect">
-            <a:avLst/>
-          </a:prstGeom>
-          <a:noFill/>
-        </p:spPr>
-        <p:txBody>
-          <a:bodyPr wrap="square" anchor="t" lIns="0" rIns="0" tIns="0" bIns="0"/>
-          <a:lstStyle/>
-          <a:p>
-            <a:pPr algn="l"/>
-            <a:r>
-              <a:rPr sz="1800" b="0" i="0">
-                <a:solidFill>
-                  <a:srgbClr val="54595D"/>
-                </a:solidFill>
-                <a:latin typeface="Calibri"/>
-              </a:rPr>
-              <a:t>Name three project constraints.</a:t>
-            </a:r>
-          </a:p>
-          <a:p>
-            <a:r>
-              <a:rPr sz="1800" b="1">
-                <a:solidFill>
-                  <a:srgbClr val="03306E"/>
-                </a:solidFill>
-                <a:latin typeface="Calibri"/>
-              </a:rPr>
-              <a:t>Any three, e.g. budget, time, quality.</a:t>
+              <a:rPr sz="1900" b="0" i="0">
+                <a:solidFill>
+                  <a:srgbClr val="FFFFFF"/>
+                </a:solidFill>
+                <a:latin typeface="Cambria"/>
+              </a:rPr>
+              <a:t>Tasks: design 3 days, order parts 5, machine 4, assemble 2, test 1. If ordering can start during design, the critical path is order, machine, assemble, test: 12 days.</a:t>
             </a:r>
           </a:p>
         </p:txBody>
@@ -8522,7 +10583,7 @@
                 </a:solidFill>
                 <a:latin typeface="Cambria"/>
               </a:rPr>
-              <a:t>Activity: Plan a workshop project</a:t>
+              <a:t>Planning and control</a:t>
             </a:r>
           </a:p>
         </p:txBody>
@@ -8601,16 +10662,16 @@
         </p:nvSpPr>
         <p:spPr>
           <a:xfrm>
-            <a:off x="548640" y="1508760"/>
-            <a:ext cx="2011680" cy="457200"/>
+            <a:off x="548640" y="1600200"/>
+            <a:ext cx="5364327" cy="640080"/>
           </a:xfrm>
           <a:prstGeom prst="roundRect">
             <a:avLst>
-              <a:gd name="adj" fmla="val 50000"/>
+              <a:gd name="adj" fmla="val 15000"/>
             </a:avLst>
           </a:prstGeom>
           <a:solidFill>
-            <a:srgbClr val="F2B705"/>
+            <a:srgbClr val="03306E"/>
           </a:solidFill>
           <a:ln>
             <a:noFill/>
@@ -8645,8 +10706,8 @@
         </p:nvSpPr>
         <p:spPr>
           <a:xfrm>
-            <a:off x="548640" y="1508760"/>
-            <a:ext cx="2011680" cy="457200"/>
+            <a:off x="777240" y="1600200"/>
+            <a:ext cx="4907127" cy="640080"/>
           </a:xfrm>
           <a:prstGeom prst="rect">
             <a:avLst/>
@@ -8657,65 +10718,212 @@
           <a:bodyPr wrap="square" anchor="ctr" lIns="0" rIns="0" tIns="0" bIns="0"/>
           <a:lstStyle/>
           <a:p>
-            <a:pPr algn="ctr"/>
-            <a:r>
-              <a:rPr sz="1400" b="1" i="0">
+            <a:pPr algn="l"/>
+            <a:r>
+              <a:rPr sz="2000" b="1" i="0">
+                <a:solidFill>
+                  <a:srgbClr val="FFFFFF"/>
+                </a:solidFill>
+                <a:latin typeface="Calibri"/>
+              </a:rPr>
+              <a:t>Planning tools</a:t>
+            </a:r>
+          </a:p>
+        </p:txBody>
+      </p:sp>
+      <p:sp>
+        <p:nvSpPr>
+          <p:cNvPr id="8" name="Rounded Rectangle 7"/>
+          <p:cNvSpPr/>
+          <p:nvPr/>
+        </p:nvSpPr>
+        <p:spPr>
+          <a:xfrm>
+            <a:off x="548640" y="2377440"/>
+            <a:ext cx="5364327" cy="3794760"/>
+          </a:xfrm>
+          <a:prstGeom prst="roundRect">
+            <a:avLst>
+              <a:gd name="adj" fmla="val 4000"/>
+            </a:avLst>
+          </a:prstGeom>
+          <a:solidFill>
+            <a:srgbClr val="EAF3FF"/>
+          </a:solidFill>
+          <a:ln>
+            <a:noFill/>
+          </a:ln>
+          <a:effectLst/>
+        </p:spPr>
+        <p:style>
+          <a:lnRef idx="1">
+            <a:schemeClr val="accent1"/>
+          </a:lnRef>
+          <a:fillRef idx="3">
+            <a:schemeClr val="accent1"/>
+          </a:fillRef>
+          <a:effectRef idx="2">
+            <a:schemeClr val="accent1"/>
+          </a:effectRef>
+          <a:fontRef idx="minor">
+            <a:schemeClr val="lt1"/>
+          </a:fontRef>
+        </p:style>
+        <p:txBody>
+          <a:bodyPr rtlCol="0" anchor="ctr"/>
+          <a:lstStyle/>
+          <a:p/>
+        </p:txBody>
+      </p:sp>
+      <p:sp>
+        <p:nvSpPr>
+          <p:cNvPr id="9" name="TextBox 8"/>
+          <p:cNvSpPr txBox="1"/>
+          <p:nvPr/>
+        </p:nvSpPr>
+        <p:spPr>
+          <a:xfrm>
+            <a:off x="822959" y="2606040"/>
+            <a:ext cx="4815687" cy="3337560"/>
+          </a:xfrm>
+          <a:prstGeom prst="rect">
+            <a:avLst/>
+          </a:prstGeom>
+          <a:noFill/>
+        </p:spPr>
+        <p:txBody>
+          <a:bodyPr wrap="square" lIns="0" rIns="0" tIns="0" bIns="0">
+            <a:spAutoFit/>
+          </a:bodyPr>
+          <a:lstStyle/>
+          <a:p>
+            <a:pPr marL="274320" indent="-274320">
+              <a:spcAft>
+                <a:spcPts val="990"/>
+              </a:spcAft>
+              <a:buClr>
+                <a:srgbClr val="0645AD"/>
+              </a:buClr>
+              <a:buFont typeface="Arial"/>
+              <a:buChar char="•"/>
+            </a:pPr>
+            <a:r>
+              <a:rPr sz="2200" b="1">
                 <a:solidFill>
                   <a:srgbClr val="202122"/>
                 </a:solidFill>
                 <a:latin typeface="Calibri"/>
               </a:rPr>
-              <a:t>30 minutes</a:t>
-            </a:r>
-          </a:p>
-        </p:txBody>
-      </p:sp>
-      <p:sp>
-        <p:nvSpPr>
-          <p:cNvPr id="8" name="TextBox 7"/>
-          <p:cNvSpPr txBox="1"/>
-          <p:nvPr/>
-        </p:nvSpPr>
-        <p:spPr>
-          <a:xfrm>
-            <a:off x="2743200" y="1508760"/>
-            <a:ext cx="4754880" cy="457200"/>
-          </a:xfrm>
-          <a:prstGeom prst="rect">
-            <a:avLst/>
-          </a:prstGeom>
-          <a:noFill/>
-        </p:spPr>
-        <p:txBody>
-          <a:bodyPr wrap="square" anchor="ctr" lIns="0" rIns="0" tIns="0" bIns="0"/>
-          <a:lstStyle/>
-          <a:p>
-            <a:pPr algn="l"/>
-            <a:r>
-              <a:rPr sz="1400" b="0" i="1">
-                <a:solidFill>
-                  <a:srgbClr val="54595D"/>
-                </a:solidFill>
-                <a:latin typeface="Calibri"/>
-              </a:rPr>
-              <a:t>Pairs</a:t>
-            </a:r>
-          </a:p>
-        </p:txBody>
-      </p:sp>
-      <p:sp>
-        <p:nvSpPr>
-          <p:cNvPr id="9" name="Oval 8"/>
+              <a:t>Gantt charts:</a:t>
+            </a:r>
+            <a:r>
+              <a:rPr sz="2200" b="0">
+                <a:solidFill>
+                  <a:srgbClr val="202122"/>
+                </a:solidFill>
+                <a:latin typeface="Calibri"/>
+              </a:rPr>
+              <a:t> tasks on a timeline</a:t>
+            </a:r>
+          </a:p>
+          <a:p>
+            <a:pPr marL="274320" indent="-274320">
+              <a:spcAft>
+                <a:spcPts val="990"/>
+              </a:spcAft>
+              <a:buClr>
+                <a:srgbClr val="0645AD"/>
+              </a:buClr>
+              <a:buFont typeface="Arial"/>
+              <a:buChar char="•"/>
+            </a:pPr>
+            <a:r>
+              <a:rPr sz="2200" b="1">
+                <a:solidFill>
+                  <a:srgbClr val="202122"/>
+                </a:solidFill>
+                <a:latin typeface="Calibri"/>
+              </a:rPr>
+              <a:t>Critical path analysis:</a:t>
+            </a:r>
+            <a:r>
+              <a:rPr sz="2200" b="0">
+                <a:solidFill>
+                  <a:srgbClr val="202122"/>
+                </a:solidFill>
+                <a:latin typeface="Calibri"/>
+              </a:rPr>
+              <a:t> the longest chain of dependent tasks</a:t>
+            </a:r>
+          </a:p>
+          <a:p>
+            <a:pPr marL="274320" indent="-274320">
+              <a:spcAft>
+                <a:spcPts val="990"/>
+              </a:spcAft>
+              <a:buClr>
+                <a:srgbClr val="0645AD"/>
+              </a:buClr>
+              <a:buFont typeface="Arial"/>
+              <a:buChar char="•"/>
+            </a:pPr>
+            <a:r>
+              <a:rPr sz="2200" b="1">
+                <a:solidFill>
+                  <a:srgbClr val="202122"/>
+                </a:solidFill>
+                <a:latin typeface="Calibri"/>
+              </a:rPr>
+              <a:t>PERT:</a:t>
+            </a:r>
+            <a:r>
+              <a:rPr sz="2200" b="0">
+                <a:solidFill>
+                  <a:srgbClr val="202122"/>
+                </a:solidFill>
+                <a:latin typeface="Calibri"/>
+              </a:rPr>
+              <a:t> optimistic, likely and pessimistic estimates</a:t>
+            </a:r>
+          </a:p>
+          <a:p>
+            <a:pPr marL="274320" indent="-274320">
+              <a:spcAft>
+                <a:spcPts val="990"/>
+              </a:spcAft>
+              <a:buClr>
+                <a:srgbClr val="0645AD"/>
+              </a:buClr>
+              <a:buFont typeface="Arial"/>
+              <a:buChar char="•"/>
+            </a:pPr>
+            <a:r>
+              <a:rPr sz="2200" b="0">
+                <a:solidFill>
+                  <a:srgbClr val="202122"/>
+                </a:solidFill>
+                <a:latin typeface="Calibri"/>
+              </a:rPr>
+              <a:t>Contingency planning and managing interdependencies</a:t>
+            </a:r>
+          </a:p>
+        </p:txBody>
+      </p:sp>
+      <p:sp>
+        <p:nvSpPr>
+          <p:cNvPr id="10" name="Rounded Rectangle 9"/>
           <p:cNvSpPr/>
           <p:nvPr/>
         </p:nvSpPr>
         <p:spPr>
           <a:xfrm>
-            <a:off x="548640" y="2482596"/>
-            <a:ext cx="384048" cy="384048"/>
-          </a:xfrm>
-          <a:prstGeom prst="ellipse">
-            <a:avLst/>
+            <a:off x="6278727" y="1600200"/>
+            <a:ext cx="5364327" cy="640080"/>
+          </a:xfrm>
+          <a:prstGeom prst="roundRect">
+            <a:avLst>
+              <a:gd name="adj" fmla="val 15000"/>
+            </a:avLst>
           </a:prstGeom>
           <a:solidFill>
             <a:srgbClr val="0645AD"/>
@@ -8740,327 +10948,58 @@
           </a:fontRef>
         </p:style>
         <p:txBody>
-          <a:bodyPr rtlCol="0" anchor="ctr" lIns="0" rIns="0" tIns="0" bIns="0"/>
-          <a:lstStyle/>
-          <a:p>
-            <a:pPr algn="ctr"/>
-            <a:r>
-              <a:rPr sz="1300" b="1">
+          <a:bodyPr rtlCol="0" anchor="ctr"/>
+          <a:lstStyle/>
+          <a:p/>
+        </p:txBody>
+      </p:sp>
+      <p:sp>
+        <p:nvSpPr>
+          <p:cNvPr id="11" name="TextBox 10"/>
+          <p:cNvSpPr txBox="1"/>
+          <p:nvPr/>
+        </p:nvSpPr>
+        <p:spPr>
+          <a:xfrm>
+            <a:off x="6507327" y="1600200"/>
+            <a:ext cx="4907127" cy="640080"/>
+          </a:xfrm>
+          <a:prstGeom prst="rect">
+            <a:avLst/>
+          </a:prstGeom>
+          <a:noFill/>
+        </p:spPr>
+        <p:txBody>
+          <a:bodyPr wrap="square" anchor="ctr" lIns="0" rIns="0" tIns="0" bIns="0"/>
+          <a:lstStyle/>
+          <a:p>
+            <a:pPr algn="l"/>
+            <a:r>
+              <a:rPr sz="2000" b="1" i="0">
                 <a:solidFill>
                   <a:srgbClr val="FFFFFF"/>
                 </a:solidFill>
                 <a:latin typeface="Calibri"/>
               </a:rPr>
-              <a:t>1</a:t>
-            </a:r>
-          </a:p>
-        </p:txBody>
-      </p:sp>
-      <p:sp>
-        <p:nvSpPr>
-          <p:cNvPr id="10" name="TextBox 9"/>
-          <p:cNvSpPr txBox="1"/>
-          <p:nvPr/>
-        </p:nvSpPr>
-        <p:spPr>
-          <a:xfrm>
-            <a:off x="1143000" y="2240280"/>
-            <a:ext cx="5943600" cy="868680"/>
-          </a:xfrm>
-          <a:prstGeom prst="rect">
-            <a:avLst/>
-          </a:prstGeom>
-          <a:noFill/>
-        </p:spPr>
-        <p:txBody>
-          <a:bodyPr wrap="square" anchor="ctr" lIns="0" rIns="0" tIns="0" bIns="0"/>
-          <a:lstStyle/>
-          <a:p>
-            <a:pPr algn="l"/>
-            <a:r>
-              <a:rPr sz="1700" b="0" i="0">
-                <a:solidFill>
-                  <a:srgbClr val="202122"/>
-                </a:solidFill>
-                <a:latin typeface="Calibri"/>
-              </a:rPr>
-              <a:t>Tasks: design (3 days), order parts (5), machine parts (4), assemble (2), test (1). Machining can't start until parts arrive.</a:t>
-            </a:r>
-          </a:p>
-        </p:txBody>
-      </p:sp>
-      <p:sp>
-        <p:nvSpPr>
-          <p:cNvPr id="11" name="Oval 10"/>
+              <a:t>Control methods</a:t>
+            </a:r>
+          </a:p>
+        </p:txBody>
+      </p:sp>
+      <p:sp>
+        <p:nvSpPr>
+          <p:cNvPr id="12" name="Rounded Rectangle 11"/>
           <p:cNvSpPr/>
           <p:nvPr/>
         </p:nvSpPr>
         <p:spPr>
           <a:xfrm>
-            <a:off x="548640" y="3461004"/>
-            <a:ext cx="384048" cy="384048"/>
-          </a:xfrm>
-          <a:prstGeom prst="ellipse">
-            <a:avLst/>
-          </a:prstGeom>
-          <a:solidFill>
-            <a:srgbClr val="0645AD"/>
-          </a:solidFill>
-          <a:ln>
-            <a:noFill/>
-          </a:ln>
-          <a:effectLst/>
-        </p:spPr>
-        <p:style>
-          <a:lnRef idx="1">
-            <a:schemeClr val="accent1"/>
-          </a:lnRef>
-          <a:fillRef idx="3">
-            <a:schemeClr val="accent1"/>
-          </a:fillRef>
-          <a:effectRef idx="2">
-            <a:schemeClr val="accent1"/>
-          </a:effectRef>
-          <a:fontRef idx="minor">
-            <a:schemeClr val="lt1"/>
-          </a:fontRef>
-        </p:style>
-        <p:txBody>
-          <a:bodyPr rtlCol="0" anchor="ctr" lIns="0" rIns="0" tIns="0" bIns="0"/>
-          <a:lstStyle/>
-          <a:p>
-            <a:pPr algn="ctr"/>
-            <a:r>
-              <a:rPr sz="1300" b="1">
-                <a:solidFill>
-                  <a:srgbClr val="FFFFFF"/>
-                </a:solidFill>
-                <a:latin typeface="Calibri"/>
-              </a:rPr>
-              <a:t>2</a:t>
-            </a:r>
-          </a:p>
-        </p:txBody>
-      </p:sp>
-      <p:sp>
-        <p:nvSpPr>
-          <p:cNvPr id="12" name="TextBox 11"/>
-          <p:cNvSpPr txBox="1"/>
-          <p:nvPr/>
-        </p:nvSpPr>
-        <p:spPr>
-          <a:xfrm>
-            <a:off x="1143000" y="3218688"/>
-            <a:ext cx="5943600" cy="868680"/>
-          </a:xfrm>
-          <a:prstGeom prst="rect">
-            <a:avLst/>
-          </a:prstGeom>
-          <a:noFill/>
-        </p:spPr>
-        <p:txBody>
-          <a:bodyPr wrap="square" anchor="ctr" lIns="0" rIns="0" tIns="0" bIns="0"/>
-          <a:lstStyle/>
-          <a:p>
-            <a:pPr algn="l"/>
-            <a:r>
-              <a:rPr sz="1700" b="0" i="0">
-                <a:solidFill>
-                  <a:srgbClr val="202122"/>
-                </a:solidFill>
-                <a:latin typeface="Calibri"/>
-              </a:rPr>
-              <a:t>Draw a Gantt chart.</a:t>
-            </a:r>
-          </a:p>
-        </p:txBody>
-      </p:sp>
-      <p:sp>
-        <p:nvSpPr>
-          <p:cNvPr id="13" name="Oval 12"/>
-          <p:cNvSpPr/>
-          <p:nvPr/>
-        </p:nvSpPr>
-        <p:spPr>
-          <a:xfrm>
-            <a:off x="548640" y="4439412"/>
-            <a:ext cx="384048" cy="384048"/>
-          </a:xfrm>
-          <a:prstGeom prst="ellipse">
-            <a:avLst/>
-          </a:prstGeom>
-          <a:solidFill>
-            <a:srgbClr val="0645AD"/>
-          </a:solidFill>
-          <a:ln>
-            <a:noFill/>
-          </a:ln>
-          <a:effectLst/>
-        </p:spPr>
-        <p:style>
-          <a:lnRef idx="1">
-            <a:schemeClr val="accent1"/>
-          </a:lnRef>
-          <a:fillRef idx="3">
-            <a:schemeClr val="accent1"/>
-          </a:fillRef>
-          <a:effectRef idx="2">
-            <a:schemeClr val="accent1"/>
-          </a:effectRef>
-          <a:fontRef idx="minor">
-            <a:schemeClr val="lt1"/>
-          </a:fontRef>
-        </p:style>
-        <p:txBody>
-          <a:bodyPr rtlCol="0" anchor="ctr" lIns="0" rIns="0" tIns="0" bIns="0"/>
-          <a:lstStyle/>
-          <a:p>
-            <a:pPr algn="ctr"/>
-            <a:r>
-              <a:rPr sz="1300" b="1">
-                <a:solidFill>
-                  <a:srgbClr val="FFFFFF"/>
-                </a:solidFill>
-                <a:latin typeface="Calibri"/>
-              </a:rPr>
-              <a:t>3</a:t>
-            </a:r>
-          </a:p>
-        </p:txBody>
-      </p:sp>
-      <p:sp>
-        <p:nvSpPr>
-          <p:cNvPr id="14" name="TextBox 13"/>
-          <p:cNvSpPr txBox="1"/>
-          <p:nvPr/>
-        </p:nvSpPr>
-        <p:spPr>
-          <a:xfrm>
-            <a:off x="1143000" y="4197096"/>
-            <a:ext cx="5943600" cy="868680"/>
-          </a:xfrm>
-          <a:prstGeom prst="rect">
-            <a:avLst/>
-          </a:prstGeom>
-          <a:noFill/>
-        </p:spPr>
-        <p:txBody>
-          <a:bodyPr wrap="square" anchor="ctr" lIns="0" rIns="0" tIns="0" bIns="0"/>
-          <a:lstStyle/>
-          <a:p>
-            <a:pPr algn="l"/>
-            <a:r>
-              <a:rPr sz="1700" b="0" i="0">
-                <a:solidFill>
-                  <a:srgbClr val="202122"/>
-                </a:solidFill>
-                <a:latin typeface="Calibri"/>
-              </a:rPr>
-              <a:t>Find the critical path and total duration.</a:t>
-            </a:r>
-          </a:p>
-        </p:txBody>
-      </p:sp>
-      <p:sp>
-        <p:nvSpPr>
-          <p:cNvPr id="15" name="Oval 14"/>
-          <p:cNvSpPr/>
-          <p:nvPr/>
-        </p:nvSpPr>
-        <p:spPr>
-          <a:xfrm>
-            <a:off x="548640" y="5417820"/>
-            <a:ext cx="384048" cy="384048"/>
-          </a:xfrm>
-          <a:prstGeom prst="ellipse">
-            <a:avLst/>
-          </a:prstGeom>
-          <a:solidFill>
-            <a:srgbClr val="0645AD"/>
-          </a:solidFill>
-          <a:ln>
-            <a:noFill/>
-          </a:ln>
-          <a:effectLst/>
-        </p:spPr>
-        <p:style>
-          <a:lnRef idx="1">
-            <a:schemeClr val="accent1"/>
-          </a:lnRef>
-          <a:fillRef idx="3">
-            <a:schemeClr val="accent1"/>
-          </a:fillRef>
-          <a:effectRef idx="2">
-            <a:schemeClr val="accent1"/>
-          </a:effectRef>
-          <a:fontRef idx="minor">
-            <a:schemeClr val="lt1"/>
-          </a:fontRef>
-        </p:style>
-        <p:txBody>
-          <a:bodyPr rtlCol="0" anchor="ctr" lIns="0" rIns="0" tIns="0" bIns="0"/>
-          <a:lstStyle/>
-          <a:p>
-            <a:pPr algn="ctr"/>
-            <a:r>
-              <a:rPr sz="1300" b="1">
-                <a:solidFill>
-                  <a:srgbClr val="FFFFFF"/>
-                </a:solidFill>
-                <a:latin typeface="Calibri"/>
-              </a:rPr>
-              <a:t>4</a:t>
-            </a:r>
-          </a:p>
-        </p:txBody>
-      </p:sp>
-      <p:sp>
-        <p:nvSpPr>
-          <p:cNvPr id="16" name="TextBox 15"/>
-          <p:cNvSpPr txBox="1"/>
-          <p:nvPr/>
-        </p:nvSpPr>
-        <p:spPr>
-          <a:xfrm>
-            <a:off x="1143000" y="5175504"/>
-            <a:ext cx="5943600" cy="868680"/>
-          </a:xfrm>
-          <a:prstGeom prst="rect">
-            <a:avLst/>
-          </a:prstGeom>
-          <a:noFill/>
-        </p:spPr>
-        <p:txBody>
-          <a:bodyPr wrap="square" anchor="ctr" lIns="0" rIns="0" tIns="0" bIns="0"/>
-          <a:lstStyle/>
-          <a:p>
-            <a:pPr algn="l"/>
-            <a:r>
-              <a:rPr sz="1700" b="0" i="0">
-                <a:solidFill>
-                  <a:srgbClr val="202122"/>
-                </a:solidFill>
-                <a:latin typeface="Calibri"/>
-              </a:rPr>
-              <a:t>Write one contingency plan.</a:t>
-            </a:r>
-          </a:p>
-        </p:txBody>
-      </p:sp>
-      <p:sp>
-        <p:nvSpPr>
-          <p:cNvPr id="17" name="Rounded Rectangle 16"/>
-          <p:cNvSpPr/>
-          <p:nvPr/>
-        </p:nvSpPr>
-        <p:spPr>
-          <a:xfrm>
-            <a:off x="7772400" y="1508760"/>
-            <a:ext cx="3867912" cy="4572000"/>
+            <a:off x="6278727" y="2377440"/>
+            <a:ext cx="5364327" cy="3794760"/>
           </a:xfrm>
           <a:prstGeom prst="roundRect">
             <a:avLst>
-              <a:gd name="adj" fmla="val 8000"/>
+              <a:gd name="adj" fmla="val 4000"/>
             </a:avLst>
           </a:prstGeom>
           <a:solidFill>
@@ -9093,47 +11032,14 @@
       </p:sp>
       <p:sp>
         <p:nvSpPr>
-          <p:cNvPr id="18" name="TextBox 17"/>
+          <p:cNvPr id="13" name="TextBox 12"/>
           <p:cNvSpPr txBox="1"/>
           <p:nvPr/>
         </p:nvSpPr>
         <p:spPr>
           <a:xfrm>
-            <a:off x="8046720" y="1737360"/>
-            <a:ext cx="3291840" cy="365760"/>
-          </a:xfrm>
-          <a:prstGeom prst="rect">
-            <a:avLst/>
-          </a:prstGeom>
-          <a:noFill/>
-        </p:spPr>
-        <p:txBody>
-          <a:bodyPr wrap="square" anchor="t" lIns="0" rIns="0" tIns="0" bIns="0"/>
-          <a:lstStyle/>
-          <a:p>
-            <a:pPr algn="l"/>
-            <a:r>
-              <a:rPr sz="1300" b="1" i="0">
-                <a:solidFill>
-                  <a:srgbClr val="0645AD"/>
-                </a:solidFill>
-                <a:latin typeface="Calibri"/>
-              </a:rPr>
-              <a:t>SUCCESS CRITERIA</a:t>
-            </a:r>
-          </a:p>
-        </p:txBody>
-      </p:sp>
-      <p:sp>
-        <p:nvSpPr>
-          <p:cNvPr id="19" name="TextBox 18"/>
-          <p:cNvSpPr txBox="1"/>
-          <p:nvPr/>
-        </p:nvSpPr>
-        <p:spPr>
-          <a:xfrm>
-            <a:off x="8046720" y="2240280"/>
-            <a:ext cx="3337560" cy="3657600"/>
+            <a:off x="6553047" y="2606040"/>
+            <a:ext cx="4815687" cy="3337560"/>
           </a:xfrm>
           <a:prstGeom prst="rect">
             <a:avLst/>
@@ -9148,7 +11054,7 @@
           <a:p>
             <a:pPr marL="274320" indent="-274320">
               <a:spcAft>
-                <a:spcPts val="810"/>
+                <a:spcPts val="990"/>
               </a:spcAft>
               <a:buClr>
                 <a:srgbClr val="0645AD"/>
@@ -9157,19 +11063,28 @@
               <a:buChar char="•"/>
             </a:pPr>
             <a:r>
-              <a:rPr sz="1800" b="0">
+              <a:rPr sz="2200" b="1">
                 <a:solidFill>
                   <a:srgbClr val="202122"/>
                 </a:solidFill>
                 <a:latin typeface="Calibri"/>
               </a:rPr>
-              <a:t>Dependencies correct</a:t>
+              <a:t>Monitoring reports:</a:t>
+            </a:r>
+            <a:r>
+              <a:rPr sz="2200" b="0">
+                <a:solidFill>
+                  <a:srgbClr val="202122"/>
+                </a:solidFill>
+                <a:latin typeface="Calibri"/>
+              </a:rPr>
+              <a:t> budget, quality, cost, time</a:t>
             </a:r>
           </a:p>
           <a:p>
             <a:pPr marL="274320" indent="-274320">
               <a:spcAft>
-                <a:spcPts val="810"/>
+                <a:spcPts val="990"/>
               </a:spcAft>
               <a:buClr>
                 <a:srgbClr val="0645AD"/>
@@ -9178,19 +11093,28 @@
               <a:buChar char="•"/>
             </a:pPr>
             <a:r>
-              <a:rPr sz="1800" b="0">
+              <a:rPr sz="2200" b="1">
                 <a:solidFill>
                   <a:srgbClr val="202122"/>
                 </a:solidFill>
                 <a:latin typeface="Calibri"/>
               </a:rPr>
-              <a:t>Critical path identified</a:t>
+              <a:t>Managing by stages:</a:t>
+            </a:r>
+            <a:r>
+              <a:rPr sz="2200" b="0">
+                <a:solidFill>
+                  <a:srgbClr val="202122"/>
+                </a:solidFill>
+                <a:latin typeface="Calibri"/>
+              </a:rPr>
+              <a:t> approve each stage before the next</a:t>
             </a:r>
           </a:p>
           <a:p>
             <a:pPr marL="274320" indent="-274320">
               <a:spcAft>
-                <a:spcPts val="810"/>
+                <a:spcPts val="990"/>
               </a:spcAft>
               <a:buClr>
                 <a:srgbClr val="0645AD"/>
@@ -9199,13 +11123,22 @@
               <a:buChar char="•"/>
             </a:pPr>
             <a:r>
-              <a:rPr sz="1800" b="0">
+              <a:rPr sz="2200" b="1">
                 <a:solidFill>
                   <a:srgbClr val="202122"/>
                 </a:solidFill>
                 <a:latin typeface="Calibri"/>
               </a:rPr>
-              <a:t>Contingency is realistic</a:t>
+              <a:t>Managing by exception:</a:t>
+            </a:r>
+            <a:r>
+              <a:rPr sz="2200" b="0">
+                <a:solidFill>
+                  <a:srgbClr val="202122"/>
+                </a:solidFill>
+                <a:latin typeface="Calibri"/>
+              </a:rPr>
+              <a:t> escalate only when limits are exceeded</a:t>
             </a:r>
           </a:p>
         </p:txBody>
@@ -9224,7 +11157,7 @@
     <p:bg>
       <p:bgPr>
         <a:solidFill>
-          <a:srgbClr val="03306E"/>
+          <a:srgbClr val="FFFFFF"/>
         </a:solidFill>
         <a:effectLst/>
       </p:bgPr>
@@ -9260,7 +11193,7 @@
             <a:r>
               <a:rPr sz="1100" b="1" i="0">
                 <a:solidFill>
-                  <a:srgbClr val="A9C8F0"/>
+                  <a:srgbClr val="54595D"/>
                 </a:solidFill>
                 <a:latin typeface="Calibri"/>
               </a:rPr>
@@ -9293,24 +11226,90 @@
             <a:r>
               <a:rPr sz="3200" b="1" i="0">
                 <a:solidFill>
-                  <a:srgbClr val="FFFFFF"/>
+                  <a:srgbClr val="03306E"/>
                 </a:solidFill>
                 <a:latin typeface="Cambria"/>
               </a:rPr>
-              <a:t>Exit ticket</a:t>
-            </a:r>
-          </a:p>
-        </p:txBody>
-      </p:sp>
-      <p:sp>
-        <p:nvSpPr>
-          <p:cNvPr id="4" name="Oval 3"/>
+              <a:t>Quick check: Planning and control</a:t>
+            </a:r>
+          </a:p>
+        </p:txBody>
+      </p:sp>
+      <p:sp>
+        <p:nvSpPr>
+          <p:cNvPr id="4" name="TextBox 3"/>
+          <p:cNvSpPr txBox="1"/>
+          <p:nvPr/>
+        </p:nvSpPr>
+        <p:spPr>
+          <a:xfrm>
+            <a:off x="548640" y="6446520"/>
+            <a:ext cx="8229600" cy="274320"/>
+          </a:xfrm>
+          <a:prstGeom prst="rect">
+            <a:avLst/>
+          </a:prstGeom>
+          <a:noFill/>
+        </p:spPr>
+        <p:txBody>
+          <a:bodyPr wrap="square" anchor="t" lIns="0" rIns="0" tIns="0" bIns="0"/>
+          <a:lstStyle/>
+          <a:p>
+            <a:pPr algn="l"/>
+            <a:r>
+              <a:rPr sz="1000" b="0" i="0">
+                <a:solidFill>
+                  <a:srgbClr val="54595D"/>
+                </a:solidFill>
+                <a:latin typeface="Calibri"/>
+              </a:rPr>
+              <a:t>Design and Development for Engineering and Manufacturing T Level  ·  Project and Programme Management</a:t>
+            </a:r>
+          </a:p>
+        </p:txBody>
+      </p:sp>
+      <p:sp>
+        <p:nvSpPr>
+          <p:cNvPr id="5" name="TextBox 4"/>
+          <p:cNvSpPr txBox="1"/>
+          <p:nvPr/>
+        </p:nvSpPr>
+        <p:spPr>
+          <a:xfrm>
+            <a:off x="10728655" y="6446520"/>
+            <a:ext cx="914400" cy="274320"/>
+          </a:xfrm>
+          <a:prstGeom prst="rect">
+            <a:avLst/>
+          </a:prstGeom>
+          <a:noFill/>
+        </p:spPr>
+        <p:txBody>
+          <a:bodyPr wrap="square" anchor="t" lIns="0" rIns="0" tIns="0" bIns="0"/>
+          <a:lstStyle/>
+          <a:p>
+            <a:pPr algn="r"/>
+            <a:r>
+              <a:rPr sz="1000" b="0" i="0">
+                <a:solidFill>
+                  <a:srgbClr val="54595D"/>
+                </a:solidFill>
+                <a:latin typeface="Calibri"/>
+              </a:rPr>
+              <a:t>9</a:t>
+            </a:r>
+          </a:p>
+        </p:txBody>
+      </p:sp>
+      <p:sp>
+        <p:nvSpPr>
+          <p:cNvPr id="6" name="Oval 5"/>
           <p:cNvSpPr/>
           <p:nvPr/>
         </p:nvSpPr>
         <p:spPr>
           <a:xfrm>
-            <a:off x="548640" y="1737360"/>
+            <a:off x="548640" y="1691640"/>
             <a:ext cx="502920" cy="502920"/>
           </a:xfrm>
           <a:prstGeom prst="ellipse">
@@ -9344,7 +11343,7 @@
           <a:p>
             <a:pPr algn="ctr"/>
             <a:r>
-              <a:rPr sz="1700" b="1">
+              <a:rPr sz="1600" b="1">
                 <a:solidFill>
                   <a:srgbClr val="202122"/>
                 </a:solidFill>
@@ -9357,14 +11356,14 @@
       </p:sp>
       <p:sp>
         <p:nvSpPr>
-          <p:cNvPr id="5" name="TextBox 4"/>
+          <p:cNvPr id="7" name="TextBox 6"/>
           <p:cNvSpPr txBox="1"/>
           <p:nvPr/>
         </p:nvSpPr>
         <p:spPr>
           <a:xfrm>
-            <a:off x="1325880" y="1645920"/>
-            <a:ext cx="6583680" cy="822960"/>
+            <a:off x="1371600" y="1645920"/>
+            <a:ext cx="10271455" cy="1188720"/>
           </a:xfrm>
           <a:prstGeom prst="rect">
             <a:avLst/>
@@ -9372,31 +11371,31 @@
           <a:noFill/>
         </p:spPr>
         <p:txBody>
-          <a:bodyPr wrap="square" anchor="ctr" lIns="0" rIns="0" tIns="0" bIns="0"/>
+          <a:bodyPr wrap="square" anchor="t" lIns="0" rIns="0" tIns="0" bIns="0"/>
           <a:lstStyle/>
           <a:p>
             <a:pPr algn="l"/>
             <a:r>
-              <a:rPr sz="2000" b="0" i="0">
-                <a:solidFill>
-                  <a:srgbClr val="FFFFFF"/>
-                </a:solidFill>
-                <a:latin typeface="Calibri"/>
-              </a:rPr>
-              <a:t>Why involve regulators as stakeholders?</a:t>
-            </a:r>
-          </a:p>
-        </p:txBody>
-      </p:sp>
-      <p:sp>
-        <p:nvSpPr>
-          <p:cNvPr id="6" name="Oval 5"/>
+              <a:rPr sz="2400" b="0" i="0">
+                <a:solidFill>
+                  <a:srgbClr val="202122"/>
+                </a:solidFill>
+                <a:latin typeface="Calibri"/>
+              </a:rPr>
+              <a:t>What does the critical path determine?</a:t>
+            </a:r>
+          </a:p>
+        </p:txBody>
+      </p:sp>
+      <p:sp>
+        <p:nvSpPr>
+          <p:cNvPr id="8" name="Oval 7"/>
           <p:cNvSpPr/>
           <p:nvPr/>
         </p:nvSpPr>
         <p:spPr>
           <a:xfrm>
-            <a:off x="548640" y="2697480"/>
+            <a:off x="548640" y="3108960"/>
             <a:ext cx="502920" cy="502920"/>
           </a:xfrm>
           <a:prstGeom prst="ellipse">
@@ -9430,7 +11429,7 @@
           <a:p>
             <a:pPr algn="ctr"/>
             <a:r>
-              <a:rPr sz="1700" b="1">
+              <a:rPr sz="1600" b="1">
                 <a:solidFill>
                   <a:srgbClr val="202122"/>
                 </a:solidFill>
@@ -9443,14 +11442,14 @@
       </p:sp>
       <p:sp>
         <p:nvSpPr>
-          <p:cNvPr id="7" name="TextBox 6"/>
+          <p:cNvPr id="9" name="TextBox 8"/>
           <p:cNvSpPr txBox="1"/>
           <p:nvPr/>
         </p:nvSpPr>
         <p:spPr>
           <a:xfrm>
-            <a:off x="1325880" y="2606040"/>
-            <a:ext cx="6583680" cy="822960"/>
+            <a:off x="1371600" y="3063240"/>
+            <a:ext cx="10271455" cy="1188720"/>
           </a:xfrm>
           <a:prstGeom prst="rect">
             <a:avLst/>
@@ -9458,31 +11457,31 @@
           <a:noFill/>
         </p:spPr>
         <p:txBody>
-          <a:bodyPr wrap="square" anchor="ctr" lIns="0" rIns="0" tIns="0" bIns="0"/>
+          <a:bodyPr wrap="square" anchor="t" lIns="0" rIns="0" tIns="0" bIns="0"/>
           <a:lstStyle/>
           <a:p>
             <a:pPr algn="l"/>
             <a:r>
-              <a:rPr sz="2000" b="0" i="0">
-                <a:solidFill>
-                  <a:srgbClr val="FFFFFF"/>
-                </a:solidFill>
-                <a:latin typeface="Calibri"/>
-              </a:rPr>
-              <a:t>What is float?</a:t>
-            </a:r>
-          </a:p>
-        </p:txBody>
-      </p:sp>
-      <p:sp>
-        <p:nvSpPr>
-          <p:cNvPr id="8" name="Oval 7"/>
+              <a:rPr sz="2400" b="0" i="0">
+                <a:solidFill>
+                  <a:srgbClr val="202122"/>
+                </a:solidFill>
+                <a:latin typeface="Calibri"/>
+              </a:rPr>
+              <a:t>What is managing by exception?</a:t>
+            </a:r>
+          </a:p>
+        </p:txBody>
+      </p:sp>
+      <p:sp>
+        <p:nvSpPr>
+          <p:cNvPr id="10" name="Oval 9"/>
           <p:cNvSpPr/>
           <p:nvPr/>
         </p:nvSpPr>
         <p:spPr>
           <a:xfrm>
-            <a:off x="548640" y="3657600"/>
+            <a:off x="548640" y="4526280"/>
             <a:ext cx="502920" cy="502920"/>
           </a:xfrm>
           <a:prstGeom prst="ellipse">
@@ -9516,7 +11515,7 @@
           <a:p>
             <a:pPr algn="ctr"/>
             <a:r>
-              <a:rPr sz="1700" b="1">
+              <a:rPr sz="1600" b="1">
                 <a:solidFill>
                   <a:srgbClr val="202122"/>
                 </a:solidFill>
@@ -9525,83 +11524,6 @@
               <a:t>3</a:t>
             </a:r>
           </a:p>
-        </p:txBody>
-      </p:sp>
-      <p:sp>
-        <p:nvSpPr>
-          <p:cNvPr id="9" name="TextBox 8"/>
-          <p:cNvSpPr txBox="1"/>
-          <p:nvPr/>
-        </p:nvSpPr>
-        <p:spPr>
-          <a:xfrm>
-            <a:off x="1325880" y="3566160"/>
-            <a:ext cx="6583680" cy="822960"/>
-          </a:xfrm>
-          <a:prstGeom prst="rect">
-            <a:avLst/>
-          </a:prstGeom>
-          <a:noFill/>
-        </p:spPr>
-        <p:txBody>
-          <a:bodyPr wrap="square" anchor="ctr" lIns="0" rIns="0" tIns="0" bIns="0"/>
-          <a:lstStyle/>
-          <a:p>
-            <a:pPr algn="l"/>
-            <a:r>
-              <a:rPr sz="2000" b="0" i="0">
-                <a:solidFill>
-                  <a:srgbClr val="FFFFFF"/>
-                </a:solidFill>
-                <a:latin typeface="Calibri"/>
-              </a:rPr>
-              <a:t>When would you manage by stages?</a:t>
-            </a:r>
-          </a:p>
-        </p:txBody>
-      </p:sp>
-      <p:sp>
-        <p:nvSpPr>
-          <p:cNvPr id="10" name="Rounded Rectangle 9"/>
-          <p:cNvSpPr/>
-          <p:nvPr/>
-        </p:nvSpPr>
-        <p:spPr>
-          <a:xfrm>
-            <a:off x="8229600" y="1645920"/>
-            <a:ext cx="3410712" cy="2926080"/>
-          </a:xfrm>
-          <a:prstGeom prst="roundRect">
-            <a:avLst>
-              <a:gd name="adj" fmla="val 8000"/>
-            </a:avLst>
-          </a:prstGeom>
-          <a:solidFill>
-            <a:srgbClr val="0645AD"/>
-          </a:solidFill>
-          <a:ln>
-            <a:noFill/>
-          </a:ln>
-          <a:effectLst/>
-        </p:spPr>
-        <p:style>
-          <a:lnRef idx="1">
-            <a:schemeClr val="accent1"/>
-          </a:lnRef>
-          <a:fillRef idx="3">
-            <a:schemeClr val="accent1"/>
-          </a:fillRef>
-          <a:effectRef idx="2">
-            <a:schemeClr val="accent1"/>
-          </a:effectRef>
-          <a:fontRef idx="minor">
-            <a:schemeClr val="lt1"/>
-          </a:fontRef>
-        </p:style>
-        <p:txBody>
-          <a:bodyPr rtlCol="0" anchor="ctr"/>
-          <a:lstStyle/>
-          <a:p/>
         </p:txBody>
       </p:sp>
       <p:sp>
@@ -9612,8 +11534,8 @@
         </p:nvSpPr>
         <p:spPr>
           <a:xfrm>
-            <a:off x="8503920" y="1874519"/>
-            <a:ext cx="2926080" cy="365760"/>
+            <a:off x="1371600" y="4480560"/>
+            <a:ext cx="10271455" cy="1188720"/>
           </a:xfrm>
           <a:prstGeom prst="rect">
             <a:avLst/>
@@ -9626,13 +11548,13 @@
           <a:p>
             <a:pPr algn="l"/>
             <a:r>
-              <a:rPr sz="1300" b="1" i="0">
-                <a:solidFill>
-                  <a:srgbClr val="A9C8F0"/>
-                </a:solidFill>
-                <a:latin typeface="Calibri"/>
-              </a:rPr>
-              <a:t>REVISE THIS TOPIC</a:t>
+              <a:rPr sz="2400" b="0" i="0">
+                <a:solidFill>
+                  <a:srgbClr val="202122"/>
+                </a:solidFill>
+                <a:latin typeface="Calibri"/>
+              </a:rPr>
+              <a:t>What does PERT use?</a:t>
             </a:r>
           </a:p>
         </p:txBody>
@@ -9645,8 +11567,8 @@
         </p:nvSpPr>
         <p:spPr>
           <a:xfrm>
-            <a:off x="8503920" y="2286000"/>
-            <a:ext cx="2926080" cy="548640"/>
+            <a:off x="548640" y="5852160"/>
+            <a:ext cx="11094415" cy="365760"/>
           </a:xfrm>
           <a:prstGeom prst="rect">
             <a:avLst/>
@@ -9659,79 +11581,13 @@
           <a:p>
             <a:pPr algn="l"/>
             <a:r>
-              <a:rPr sz="1400" b="0" i="0">
-                <a:solidFill>
-                  <a:srgbClr val="FFFFFF"/>
-                </a:solidFill>
-                <a:latin typeface="Calibri"/>
-              </a:rPr>
-              <a:t>Revision notes for this lesson are on the study wiki:</a:t>
-            </a:r>
-          </a:p>
-        </p:txBody>
-      </p:sp>
-      <p:sp>
-        <p:nvSpPr>
-          <p:cNvPr id="13" name="TextBox 12"/>
-          <p:cNvSpPr txBox="1"/>
-          <p:nvPr/>
-        </p:nvSpPr>
-        <p:spPr>
-          <a:xfrm>
-            <a:off x="8503920" y="2926080"/>
-            <a:ext cx="2926080" cy="1463040"/>
-          </a:xfrm>
-          <a:prstGeom prst="rect">
-            <a:avLst/>
-          </a:prstGeom>
-          <a:noFill/>
-        </p:spPr>
-        <p:txBody>
-          <a:bodyPr wrap="square" anchor="t" lIns="0" rIns="0" tIns="0" bIns="0"/>
-          <a:lstStyle/>
-          <a:p>
-            <a:pPr algn="l"/>
-            <a:r>
-              <a:rPr sz="2000" b="1" i="0">
-                <a:solidFill>
-                  <a:srgbClr val="FFFFFF"/>
-                </a:solidFill>
-                <a:latin typeface="Cambria"/>
-              </a:rPr>
-              <a:t>Engineering Core, Part 2</a:t>
-            </a:r>
-          </a:p>
-        </p:txBody>
-      </p:sp>
-      <p:sp>
-        <p:nvSpPr>
-          <p:cNvPr id="14" name="TextBox 13"/>
-          <p:cNvSpPr txBox="1"/>
-          <p:nvPr/>
-        </p:nvSpPr>
-        <p:spPr>
-          <a:xfrm>
-            <a:off x="548640" y="5669280"/>
-            <a:ext cx="11094415" cy="548640"/>
-          </a:xfrm>
-          <a:prstGeom prst="rect">
-            <a:avLst/>
-          </a:prstGeom>
-          <a:noFill/>
-        </p:spPr>
-        <p:txBody>
-          <a:bodyPr wrap="square" anchor="t" lIns="0" rIns="0" tIns="0" bIns="0"/>
-          <a:lstStyle/>
-          <a:p>
-            <a:pPr algn="l"/>
-            <a:r>
-              <a:rPr sz="1200" b="0" i="0">
-                <a:solidFill>
-                  <a:srgbClr val="A9C8F0"/>
-                </a:solidFill>
-                <a:latin typeface="Calibri"/>
-              </a:rPr>
-              <a:t>https://lana6478.github.io/T-level-Design-Development-Engineering-Manufacturing/#/01-core-component/02-engineering-core-part2.md</a:t>
+              <a:rPr sz="1300" b="0" i="1">
+                <a:solidFill>
+                  <a:srgbClr val="54595D"/>
+                </a:solidFill>
+                <a:latin typeface="Calibri"/>
+              </a:rPr>
+              <a:t>Answer on mini whiteboards or in your book. Answers are in the speaker notes.</a:t>
             </a:r>
           </a:p>
         </p:txBody>
